--- a/LabBook_10.pptx
+++ b/LabBook_10.pptx
@@ -5,10 +5,10 @@
     <p:sldMasterId id="2147483648" r:id="rId1"/>
   </p:sldMasterIdLst>
   <p:notesMasterIdLst>
-    <p:notesMasterId r:id="rId9"/>
+    <p:notesMasterId r:id="rId10"/>
   </p:notesMasterIdLst>
   <p:handoutMasterIdLst>
-    <p:handoutMasterId r:id="rId10"/>
+    <p:handoutMasterId r:id="rId11"/>
   </p:handoutMasterIdLst>
   <p:sldIdLst>
     <p:sldId id="256" r:id="rId2"/>
@@ -16,8 +16,9 @@
     <p:sldId id="290" r:id="rId4"/>
     <p:sldId id="292" r:id="rId5"/>
     <p:sldId id="297" r:id="rId6"/>
-    <p:sldId id="293" r:id="rId7"/>
-    <p:sldId id="288" r:id="rId8"/>
+    <p:sldId id="298" r:id="rId7"/>
+    <p:sldId id="293" r:id="rId8"/>
+    <p:sldId id="288" r:id="rId9"/>
   </p:sldIdLst>
   <p:sldSz cx="12192000" cy="6858000"/>
   <p:notesSz cx="12192000" cy="6858000"/>
@@ -392,7 +393,7 @@
           <a:p>
             <a:fld id="{8438F8DC-35B0-48E6-A86E-42F1F08DD00F}" type="datetimeFigureOut">
               <a:rPr lang="es-ES" smtClean="0"/>
-              <a:t>16/02/2026</a:t>
+              <a:t>23/2/26</a:t>
             </a:fld>
             <a:endParaRPr lang="es-ES"/>
           </a:p>
@@ -569,7 +570,7 @@
           <a:p>
             <a:fld id="{FACBDC12-F39B-4B97-8F4D-6734F9D366FF}" type="datetimeFigureOut">
               <a:rPr lang="es-ES" smtClean="0"/>
-              <a:t>16/02/2026</a:t>
+              <a:t>23/2/26</a:t>
             </a:fld>
             <a:endParaRPr lang="es-ES"/>
           </a:p>
@@ -1225,7 +1226,7 @@
           <a:p>
             <a:fld id="{676223B9-C868-4436-87D9-1A3152E1157A}" type="slidenum">
               <a:rPr lang="es-ES" smtClean="0"/>
-              <a:t>6</a:t>
+              <a:t>7</a:t>
             </a:fld>
             <a:endParaRPr lang="es-ES"/>
           </a:p>
@@ -5092,7 +5093,7 @@
         <p:spPr>
           <a:xfrm>
             <a:off x="609441" y="4860334"/>
-            <a:ext cx="11199971" cy="1200329"/>
+            <a:ext cx="11199971" cy="1754326"/>
           </a:xfrm>
           <a:prstGeom prst="rect">
             <a:avLst/>
@@ -5133,35 +5134,35 @@
           <a:p>
             <a:pPr algn="just"/>
             <a:r>
-              <a:rPr lang="es-ES" sz="1200" dirty="0">
+              <a:rPr lang="es-ES_tradnl" sz="1200" dirty="0">
                 <a:latin typeface="Arial" panose="020B0604020202020204" pitchFamily="34" charset="0"/>
                 <a:cs typeface="Arial" panose="020B0604020202020204" pitchFamily="34" charset="0"/>
               </a:rPr>
               <a:t>Si observamos la primera gráfica, vemos que el valor del índice efectivo se estabiliza para valores de </a:t>
             </a:r>
             <a:r>
-              <a:rPr lang="es-ES" sz="1200" dirty="0" err="1">
+              <a:rPr lang="es-ES_tradnl" sz="1200" dirty="0" err="1">
                 <a:latin typeface="Arial" panose="020B0604020202020204" pitchFamily="34" charset="0"/>
                 <a:cs typeface="Arial" panose="020B0604020202020204" pitchFamily="34" charset="0"/>
               </a:rPr>
               <a:t>grid</a:t>
             </a:r>
             <a:r>
-              <a:rPr lang="es-ES" sz="1200" dirty="0">
+              <a:rPr lang="es-ES_tradnl" sz="1200" dirty="0">
                 <a:latin typeface="Arial" panose="020B0604020202020204" pitchFamily="34" charset="0"/>
                 <a:cs typeface="Arial" panose="020B0604020202020204" pitchFamily="34" charset="0"/>
               </a:rPr>
               <a:t> </a:t>
             </a:r>
             <a:r>
-              <a:rPr lang="es-ES" sz="1200" dirty="0" err="1">
+              <a:rPr lang="es-ES_tradnl" sz="1200" dirty="0" err="1">
                 <a:latin typeface="Arial" panose="020B0604020202020204" pitchFamily="34" charset="0"/>
                 <a:cs typeface="Arial" panose="020B0604020202020204" pitchFamily="34" charset="0"/>
               </a:rPr>
               <a:t>resolution</a:t>
             </a:r>
             <a:r>
-              <a:rPr lang="es-ES" sz="1200" dirty="0">
+              <a:rPr lang="es-ES_tradnl" sz="1200" dirty="0">
                 <a:latin typeface="Arial" panose="020B0604020202020204" pitchFamily="34" charset="0"/>
                 <a:cs typeface="Arial" panose="020B0604020202020204" pitchFamily="34" charset="0"/>
               </a:rPr>
@@ -5171,86 +5172,183 @@
           <a:p>
             <a:pPr algn="just"/>
             <a:r>
-              <a:rPr lang="es-ES" sz="1200" dirty="0">
+              <a:rPr lang="es-ES_tradnl" sz="1200" dirty="0">
                 <a:latin typeface="Arial" panose="020B0604020202020204" pitchFamily="34" charset="0"/>
                 <a:cs typeface="Arial" panose="020B0604020202020204" pitchFamily="34" charset="0"/>
               </a:rPr>
               <a:t>Para crear la gráfica para el caso de análisis de </a:t>
             </a:r>
             <a:r>
-              <a:rPr lang="es-ES" sz="1200" dirty="0" err="1">
+              <a:rPr lang="es-ES_tradnl" sz="1200" dirty="0" err="1">
                 <a:latin typeface="Arial" panose="020B0604020202020204" pitchFamily="34" charset="0"/>
                 <a:cs typeface="Arial" panose="020B0604020202020204" pitchFamily="34" charset="0"/>
               </a:rPr>
               <a:t>max_grid_scaling</a:t>
             </a:r>
             <a:r>
-              <a:rPr lang="es-ES" sz="1200" dirty="0">
+              <a:rPr lang="es-ES_tradnl" sz="1200" dirty="0">
                 <a:latin typeface="Arial" panose="020B0604020202020204" pitchFamily="34" charset="0"/>
                 <a:cs typeface="Arial" panose="020B0604020202020204" pitchFamily="34" charset="0"/>
               </a:rPr>
               <a:t> en vez de usar un valor de </a:t>
             </a:r>
             <a:r>
-              <a:rPr lang="es-ES" sz="1200" dirty="0" err="1">
+              <a:rPr lang="es-ES_tradnl" sz="1200" dirty="0" err="1">
                 <a:latin typeface="Arial" panose="020B0604020202020204" pitchFamily="34" charset="0"/>
                 <a:cs typeface="Arial" panose="020B0604020202020204" pitchFamily="34" charset="0"/>
               </a:rPr>
               <a:t>grid</a:t>
             </a:r>
             <a:r>
-              <a:rPr lang="es-ES" sz="1200" dirty="0">
+              <a:rPr lang="es-ES_tradnl" sz="1200" dirty="0">
                 <a:latin typeface="Arial" panose="020B0604020202020204" pitchFamily="34" charset="0"/>
                 <a:cs typeface="Arial" panose="020B0604020202020204" pitchFamily="34" charset="0"/>
               </a:rPr>
               <a:t> </a:t>
             </a:r>
             <a:r>
-              <a:rPr lang="es-ES" sz="1200" dirty="0" err="1">
+              <a:rPr lang="es-ES_tradnl" sz="1200" dirty="0" err="1">
                 <a:latin typeface="Arial" panose="020B0604020202020204" pitchFamily="34" charset="0"/>
                 <a:cs typeface="Arial" panose="020B0604020202020204" pitchFamily="34" charset="0"/>
               </a:rPr>
               <a:t>resolution</a:t>
             </a:r>
             <a:r>
-              <a:rPr lang="es-ES" sz="1200" dirty="0">
+              <a:rPr lang="es-ES_tradnl" sz="1200" dirty="0">
                 <a:latin typeface="Arial" panose="020B0604020202020204" pitchFamily="34" charset="0"/>
                 <a:cs typeface="Arial" panose="020B0604020202020204" pitchFamily="34" charset="0"/>
               </a:rPr>
               <a:t> mayor a 50, se ha optado por usar de 20, ya que para este valor se obtiene un índice efectivo equivalente al del caso de estabilidad para valores mayores a 50 en el </a:t>
             </a:r>
             <a:r>
-              <a:rPr lang="es-ES" sz="1200" dirty="0" err="1">
+              <a:rPr lang="es-ES_tradnl" sz="1200" dirty="0" err="1">
                 <a:latin typeface="Arial" panose="020B0604020202020204" pitchFamily="34" charset="0"/>
                 <a:cs typeface="Arial" panose="020B0604020202020204" pitchFamily="34" charset="0"/>
               </a:rPr>
               <a:t>grid</a:t>
             </a:r>
             <a:r>
-              <a:rPr lang="es-ES" sz="1200" dirty="0">
+              <a:rPr lang="es-ES_tradnl" sz="1200" dirty="0">
                 <a:latin typeface="Arial" panose="020B0604020202020204" pitchFamily="34" charset="0"/>
                 <a:cs typeface="Arial" panose="020B0604020202020204" pitchFamily="34" charset="0"/>
               </a:rPr>
               <a:t> </a:t>
             </a:r>
             <a:r>
-              <a:rPr lang="es-ES" sz="1200" dirty="0" err="1">
+              <a:rPr lang="es-ES_tradnl" sz="1200" dirty="0" err="1">
                 <a:latin typeface="Arial" panose="020B0604020202020204" pitchFamily="34" charset="0"/>
                 <a:cs typeface="Arial" panose="020B0604020202020204" pitchFamily="34" charset="0"/>
               </a:rPr>
               <a:t>resolution</a:t>
             </a:r>
             <a:r>
-              <a:rPr lang="es-ES" sz="1200" dirty="0">
-                <a:latin typeface="Arial" panose="020B0604020202020204" pitchFamily="34" charset="0"/>
-                <a:cs typeface="Arial" panose="020B0604020202020204" pitchFamily="34" charset="0"/>
-              </a:rPr>
-              <a:t>, y con ello tendremos un menor coste computacional.</a:t>
-            </a:r>
-            <a:endParaRPr lang="en-US" sz="1200" dirty="0">
+              <a:rPr lang="es-ES_tradnl" sz="1200" dirty="0">
+                <a:latin typeface="Arial" panose="020B0604020202020204" pitchFamily="34" charset="0"/>
+                <a:cs typeface="Arial" panose="020B0604020202020204" pitchFamily="34" charset="0"/>
+              </a:rPr>
+              <a:t>, y con ello tendremos un menor coste computacional. En este caso vemos que se empieza a estabilizar en valores de </a:t>
+            </a:r>
+            <a:r>
+              <a:rPr lang="es-ES_tradnl" sz="1200" dirty="0" err="1">
+                <a:latin typeface="Arial" panose="020B0604020202020204" pitchFamily="34" charset="0"/>
+                <a:cs typeface="Arial" panose="020B0604020202020204" pitchFamily="34" charset="0"/>
+              </a:rPr>
+              <a:t>max_grid_scaling</a:t>
+            </a:r>
+            <a:r>
+              <a:rPr lang="es-ES_tradnl" sz="1200" dirty="0">
+                <a:latin typeface="Arial" panose="020B0604020202020204" pitchFamily="34" charset="0"/>
+                <a:cs typeface="Arial" panose="020B0604020202020204" pitchFamily="34" charset="0"/>
+              </a:rPr>
+              <a:t> mayores a 1.5.</a:t>
+            </a:r>
+          </a:p>
+          <a:p>
+            <a:pPr algn="just"/>
+            <a:endParaRPr lang="es-ES_tradnl" sz="1200" dirty="0">
               <a:latin typeface="Arial" panose="020B0604020202020204" pitchFamily="34" charset="0"/>
               <a:cs typeface="Arial" panose="020B0604020202020204" pitchFamily="34" charset="0"/>
             </a:endParaRPr>
+          </a:p>
+          <a:p>
+            <a:pPr algn="just"/>
+            <a:r>
+              <a:rPr lang="es-ES_tradnl" sz="1200" dirty="0">
+                <a:latin typeface="Arial" panose="020B0604020202020204" pitchFamily="34" charset="0"/>
+                <a:cs typeface="Arial" panose="020B0604020202020204" pitchFamily="34" charset="0"/>
+              </a:rPr>
+              <a:t>Finalmente, podemos concluir que para valores del </a:t>
+            </a:r>
+            <a:r>
+              <a:rPr lang="es-ES_tradnl" sz="1200" dirty="0" err="1">
+                <a:latin typeface="Arial" panose="020B0604020202020204" pitchFamily="34" charset="0"/>
+                <a:cs typeface="Arial" panose="020B0604020202020204" pitchFamily="34" charset="0"/>
+              </a:rPr>
+              <a:t>grid</a:t>
+            </a:r>
+            <a:r>
+              <a:rPr lang="es-ES_tradnl" sz="1200" dirty="0">
+                <a:latin typeface="Arial" panose="020B0604020202020204" pitchFamily="34" charset="0"/>
+                <a:cs typeface="Arial" panose="020B0604020202020204" pitchFamily="34" charset="0"/>
+              </a:rPr>
+              <a:t> </a:t>
+            </a:r>
+            <a:r>
+              <a:rPr lang="es-ES_tradnl" sz="1200" dirty="0" err="1">
+                <a:latin typeface="Arial" panose="020B0604020202020204" pitchFamily="34" charset="0"/>
+                <a:cs typeface="Arial" panose="020B0604020202020204" pitchFamily="34" charset="0"/>
+              </a:rPr>
+              <a:t>resolution</a:t>
+            </a:r>
+            <a:r>
+              <a:rPr lang="es-ES_tradnl" sz="1200" dirty="0">
+                <a:latin typeface="Arial" panose="020B0604020202020204" pitchFamily="34" charset="0"/>
+                <a:cs typeface="Arial" panose="020B0604020202020204" pitchFamily="34" charset="0"/>
+              </a:rPr>
+              <a:t> mayores de 50 y valores de </a:t>
+            </a:r>
+            <a:r>
+              <a:rPr lang="es-ES_tradnl" sz="1200" dirty="0" err="1">
+                <a:latin typeface="Arial" panose="020B0604020202020204" pitchFamily="34" charset="0"/>
+                <a:cs typeface="Arial" panose="020B0604020202020204" pitchFamily="34" charset="0"/>
+              </a:rPr>
+              <a:t>max</a:t>
+            </a:r>
+            <a:r>
+              <a:rPr lang="es-ES_tradnl" sz="1200" dirty="0">
+                <a:latin typeface="Arial" panose="020B0604020202020204" pitchFamily="34" charset="0"/>
+                <a:cs typeface="Arial" panose="020B0604020202020204" pitchFamily="34" charset="0"/>
+              </a:rPr>
+              <a:t> </a:t>
+            </a:r>
+            <a:r>
+              <a:rPr lang="es-ES_tradnl" sz="1200" dirty="0" err="1">
+                <a:latin typeface="Arial" panose="020B0604020202020204" pitchFamily="34" charset="0"/>
+                <a:cs typeface="Arial" panose="020B0604020202020204" pitchFamily="34" charset="0"/>
+              </a:rPr>
+              <a:t>grid</a:t>
+            </a:r>
+            <a:r>
+              <a:rPr lang="es-ES_tradnl" sz="1200" dirty="0">
+                <a:latin typeface="Arial" panose="020B0604020202020204" pitchFamily="34" charset="0"/>
+                <a:cs typeface="Arial" panose="020B0604020202020204" pitchFamily="34" charset="0"/>
+              </a:rPr>
+              <a:t> </a:t>
+            </a:r>
+            <a:r>
+              <a:rPr lang="es-ES_tradnl" sz="1200" dirty="0" err="1">
+                <a:latin typeface="Arial" panose="020B0604020202020204" pitchFamily="34" charset="0"/>
+                <a:cs typeface="Arial" panose="020B0604020202020204" pitchFamily="34" charset="0"/>
+              </a:rPr>
+              <a:t>scaling</a:t>
+            </a:r>
+            <a:r>
+              <a:rPr lang="es-ES_tradnl" sz="1200" dirty="0">
+                <a:latin typeface="Arial" panose="020B0604020202020204" pitchFamily="34" charset="0"/>
+                <a:cs typeface="Arial" panose="020B0604020202020204" pitchFamily="34" charset="0"/>
+              </a:rPr>
+              <a:t> mayores de 1.5 se obtienen valores estables del índice efectivo. Por lo tanto, estos serán los valores óptimos para obtener un valor de índice efectivo más cercano al real.</a:t>
+            </a:r>
           </a:p>
         </p:txBody>
       </p:sp>
@@ -5638,8 +5736,8 @@
         </p:nvSpPr>
         <p:spPr>
           <a:xfrm>
-            <a:off x="609600" y="4661161"/>
-            <a:ext cx="11199971" cy="2123658"/>
+            <a:off x="609600" y="4412516"/>
+            <a:ext cx="11199971" cy="2292935"/>
           </a:xfrm>
           <a:prstGeom prst="rect">
             <a:avLst/>
@@ -5663,21 +5761,21 @@
           <a:p>
             <a:pPr algn="just"/>
             <a:r>
-              <a:rPr lang="en-US" sz="1200" dirty="0">
+              <a:rPr lang="en-US" sz="1100" dirty="0">
                 <a:latin typeface="Arial" panose="020B0604020202020204" pitchFamily="34" charset="0"/>
                 <a:cs typeface="Arial" panose="020B0604020202020204" pitchFamily="34" charset="0"/>
               </a:rPr>
               <a:t>Comment results (neff changes this way with width, polarization behavior, </a:t>
             </a:r>
             <a:r>
-              <a:rPr lang="en-US" sz="1200" dirty="0" err="1">
+              <a:rPr lang="en-US" sz="1100" dirty="0" err="1">
                 <a:latin typeface="Arial" panose="020B0604020202020204" pitchFamily="34" charset="0"/>
                 <a:cs typeface="Arial" panose="020B0604020202020204" pitchFamily="34" charset="0"/>
               </a:rPr>
               <a:t>etc</a:t>
             </a:r>
             <a:r>
-              <a:rPr lang="en-US" sz="1200" dirty="0">
+              <a:rPr lang="en-US" sz="1100" dirty="0">
                 <a:latin typeface="Arial" panose="020B0604020202020204" pitchFamily="34" charset="0"/>
                 <a:cs typeface="Arial" panose="020B0604020202020204" pitchFamily="34" charset="0"/>
               </a:rPr>
@@ -5686,7 +5784,7 @@
           </a:p>
           <a:p>
             <a:pPr algn="just"/>
-            <a:endParaRPr lang="en-US" sz="1200" dirty="0">
+            <a:endParaRPr lang="en-US" sz="1100" dirty="0">
               <a:latin typeface="Arial" panose="020B0604020202020204" pitchFamily="34" charset="0"/>
               <a:cs typeface="Arial" panose="020B0604020202020204" pitchFamily="34" charset="0"/>
             </a:endParaRPr>
@@ -5694,770 +5792,273 @@
           <a:p>
             <a:pPr algn="just"/>
             <a:r>
-              <a:rPr lang="en-US" sz="1200" dirty="0" err="1">
-                <a:latin typeface="Arial" panose="020B0604020202020204" pitchFamily="34" charset="0"/>
-                <a:cs typeface="Arial" panose="020B0604020202020204" pitchFamily="34" charset="0"/>
-              </a:rPr>
-              <a:t>En</a:t>
-            </a:r>
-            <a:r>
-              <a:rPr lang="en-US" sz="1200" dirty="0">
-                <a:latin typeface="Arial" panose="020B0604020202020204" pitchFamily="34" charset="0"/>
-                <a:cs typeface="Arial" panose="020B0604020202020204" pitchFamily="34" charset="0"/>
-              </a:rPr>
-              <a:t> primer </a:t>
-            </a:r>
-            <a:r>
-              <a:rPr lang="en-US" sz="1200" dirty="0" err="1">
+              <a:rPr lang="en-US" sz="1100" dirty="0">
+                <a:latin typeface="Arial" panose="020B0604020202020204" pitchFamily="34" charset="0"/>
+                <a:cs typeface="Arial" panose="020B0604020202020204" pitchFamily="34" charset="0"/>
+              </a:rPr>
+              <a:t>En primer </a:t>
+            </a:r>
+            <a:r>
+              <a:rPr lang="en-US" sz="1100" dirty="0" err="1">
                 <a:latin typeface="Arial" panose="020B0604020202020204" pitchFamily="34" charset="0"/>
                 <a:cs typeface="Arial" panose="020B0604020202020204" pitchFamily="34" charset="0"/>
               </a:rPr>
               <a:t>lugar</a:t>
             </a:r>
             <a:r>
-              <a:rPr lang="en-US" sz="1200" dirty="0">
+              <a:rPr lang="en-US" sz="1100" dirty="0">
                 <a:latin typeface="Arial" panose="020B0604020202020204" pitchFamily="34" charset="0"/>
                 <a:cs typeface="Arial" panose="020B0604020202020204" pitchFamily="34" charset="0"/>
               </a:rPr>
               <a:t> </a:t>
             </a:r>
             <a:r>
-              <a:rPr lang="en-US" sz="1200" dirty="0" err="1">
+              <a:rPr lang="en-US" sz="1100" dirty="0" err="1">
                 <a:latin typeface="Arial" panose="020B0604020202020204" pitchFamily="34" charset="0"/>
                 <a:cs typeface="Arial" panose="020B0604020202020204" pitchFamily="34" charset="0"/>
               </a:rPr>
               <a:t>podemos</a:t>
             </a:r>
             <a:r>
-              <a:rPr lang="en-US" sz="1200" dirty="0">
+              <a:rPr lang="en-US" sz="1100" dirty="0">
                 <a:latin typeface="Arial" panose="020B0604020202020204" pitchFamily="34" charset="0"/>
                 <a:cs typeface="Arial" panose="020B0604020202020204" pitchFamily="34" charset="0"/>
               </a:rPr>
               <a:t> </a:t>
             </a:r>
             <a:r>
-              <a:rPr lang="en-US" sz="1200" dirty="0" err="1">
+              <a:rPr lang="en-US" sz="1100" dirty="0" err="1">
                 <a:latin typeface="Arial" panose="020B0604020202020204" pitchFamily="34" charset="0"/>
                 <a:cs typeface="Arial" panose="020B0604020202020204" pitchFamily="34" charset="0"/>
               </a:rPr>
               <a:t>observar</a:t>
             </a:r>
             <a:r>
-              <a:rPr lang="en-US" sz="1200" dirty="0">
+              <a:rPr lang="en-US" sz="1100" dirty="0">
                 <a:latin typeface="Arial" panose="020B0604020202020204" pitchFamily="34" charset="0"/>
                 <a:cs typeface="Arial" panose="020B0604020202020204" pitchFamily="34" charset="0"/>
               </a:rPr>
               <a:t> que los </a:t>
             </a:r>
             <a:r>
-              <a:rPr lang="en-US" sz="1200" dirty="0" err="1">
+              <a:rPr lang="en-US" sz="1100" dirty="0" err="1">
                 <a:latin typeface="Arial" panose="020B0604020202020204" pitchFamily="34" charset="0"/>
                 <a:cs typeface="Arial" panose="020B0604020202020204" pitchFamily="34" charset="0"/>
               </a:rPr>
               <a:t>modos</a:t>
             </a:r>
             <a:r>
-              <a:rPr lang="en-US" sz="1200" dirty="0">
+              <a:rPr lang="en-US" sz="1100" dirty="0">
                 <a:latin typeface="Arial" panose="020B0604020202020204" pitchFamily="34" charset="0"/>
                 <a:cs typeface="Arial" panose="020B0604020202020204" pitchFamily="34" charset="0"/>
               </a:rPr>
               <a:t> 0 y 2 </a:t>
             </a:r>
             <a:r>
-              <a:rPr lang="en-US" sz="1200" dirty="0" err="1">
+              <a:rPr lang="en-US" sz="1100" dirty="0" err="1">
                 <a:latin typeface="Arial" panose="020B0604020202020204" pitchFamily="34" charset="0"/>
                 <a:cs typeface="Arial" panose="020B0604020202020204" pitchFamily="34" charset="0"/>
               </a:rPr>
               <a:t>corresponden</a:t>
             </a:r>
             <a:r>
-              <a:rPr lang="en-US" sz="1200" dirty="0">
+              <a:rPr lang="en-US" sz="1100" dirty="0">
                 <a:latin typeface="Arial" panose="020B0604020202020204" pitchFamily="34" charset="0"/>
                 <a:cs typeface="Arial" panose="020B0604020202020204" pitchFamily="34" charset="0"/>
               </a:rPr>
               <a:t> al modo TE0 y TE1 </a:t>
             </a:r>
             <a:r>
-              <a:rPr lang="en-US" sz="1200" dirty="0" err="1">
+              <a:rPr lang="en-US" sz="1100" dirty="0" err="1">
                 <a:latin typeface="Arial" panose="020B0604020202020204" pitchFamily="34" charset="0"/>
                 <a:cs typeface="Arial" panose="020B0604020202020204" pitchFamily="34" charset="0"/>
               </a:rPr>
               <a:t>respectivamente</a:t>
             </a:r>
             <a:r>
-              <a:rPr lang="en-US" sz="1200" dirty="0">
+              <a:rPr lang="en-US" sz="1100" dirty="0">
                 <a:latin typeface="Arial" panose="020B0604020202020204" pitchFamily="34" charset="0"/>
                 <a:cs typeface="Arial" panose="020B0604020202020204" pitchFamily="34" charset="0"/>
               </a:rPr>
               <a:t>, y los </a:t>
             </a:r>
             <a:r>
-              <a:rPr lang="en-US" sz="1200" dirty="0" err="1">
+              <a:rPr lang="en-US" sz="1100" dirty="0" err="1">
                 <a:latin typeface="Arial" panose="020B0604020202020204" pitchFamily="34" charset="0"/>
                 <a:cs typeface="Arial" panose="020B0604020202020204" pitchFamily="34" charset="0"/>
               </a:rPr>
               <a:t>modos</a:t>
             </a:r>
             <a:r>
-              <a:rPr lang="en-US" sz="1200" dirty="0">
+              <a:rPr lang="en-US" sz="1100" dirty="0">
                 <a:latin typeface="Arial" panose="020B0604020202020204" pitchFamily="34" charset="0"/>
                 <a:cs typeface="Arial" panose="020B0604020202020204" pitchFamily="34" charset="0"/>
               </a:rPr>
               <a:t> 1 y 3 a los </a:t>
             </a:r>
             <a:r>
-              <a:rPr lang="en-US" sz="1200" dirty="0" err="1">
+              <a:rPr lang="en-US" sz="1100" dirty="0" err="1">
                 <a:latin typeface="Arial" panose="020B0604020202020204" pitchFamily="34" charset="0"/>
                 <a:cs typeface="Arial" panose="020B0604020202020204" pitchFamily="34" charset="0"/>
               </a:rPr>
               <a:t>modos</a:t>
             </a:r>
             <a:r>
-              <a:rPr lang="en-US" sz="1200" dirty="0">
+              <a:rPr lang="en-US" sz="1100" dirty="0">
                 <a:latin typeface="Arial" panose="020B0604020202020204" pitchFamily="34" charset="0"/>
                 <a:cs typeface="Arial" panose="020B0604020202020204" pitchFamily="34" charset="0"/>
               </a:rPr>
               <a:t> TM0 y TM1 </a:t>
             </a:r>
             <a:r>
-              <a:rPr lang="en-US" sz="1200" dirty="0" err="1">
+              <a:rPr lang="en-US" sz="1100" dirty="0" err="1">
                 <a:latin typeface="Arial" panose="020B0604020202020204" pitchFamily="34" charset="0"/>
                 <a:cs typeface="Arial" panose="020B0604020202020204" pitchFamily="34" charset="0"/>
               </a:rPr>
               <a:t>respectivamente</a:t>
             </a:r>
             <a:r>
-              <a:rPr lang="en-US" sz="1200" dirty="0">
-                <a:latin typeface="Arial" panose="020B0604020202020204" pitchFamily="34" charset="0"/>
-                <a:cs typeface="Arial" panose="020B0604020202020204" pitchFamily="34" charset="0"/>
-              </a:rPr>
-              <a:t>. Por </a:t>
-            </a:r>
-            <a:r>
-              <a:rPr lang="en-US" sz="1200" dirty="0" err="1">
-                <a:latin typeface="Arial" panose="020B0604020202020204" pitchFamily="34" charset="0"/>
-                <a:cs typeface="Arial" panose="020B0604020202020204" pitchFamily="34" charset="0"/>
-              </a:rPr>
-              <a:t>otro</a:t>
-            </a:r>
-            <a:r>
-              <a:rPr lang="en-US" sz="1200" dirty="0">
+              <a:rPr lang="en-US" sz="1100" dirty="0">
+                <a:latin typeface="Arial" panose="020B0604020202020204" pitchFamily="34" charset="0"/>
+                <a:cs typeface="Arial" panose="020B0604020202020204" pitchFamily="34" charset="0"/>
+              </a:rPr>
+              <a:t>. </a:t>
+            </a:r>
+            <a:r>
+              <a:rPr lang="en-US" sz="1100" dirty="0" err="1">
+                <a:latin typeface="Arial" panose="020B0604020202020204" pitchFamily="34" charset="0"/>
+                <a:cs typeface="Arial" panose="020B0604020202020204" pitchFamily="34" charset="0"/>
+              </a:rPr>
+              <a:t>Adicionalmente</a:t>
+            </a:r>
+            <a:r>
+              <a:rPr lang="en-US" sz="1100" dirty="0">
+                <a:latin typeface="Arial" panose="020B0604020202020204" pitchFamily="34" charset="0"/>
+                <a:cs typeface="Arial" panose="020B0604020202020204" pitchFamily="34" charset="0"/>
+              </a:rPr>
+              <a:t>, se </a:t>
+            </a:r>
+            <a:r>
+              <a:rPr lang="en-US" sz="1100" dirty="0" err="1">
+                <a:latin typeface="Arial" panose="020B0604020202020204" pitchFamily="34" charset="0"/>
+                <a:cs typeface="Arial" panose="020B0604020202020204" pitchFamily="34" charset="0"/>
+              </a:rPr>
+              <a:t>puede</a:t>
+            </a:r>
+            <a:r>
+              <a:rPr lang="en-US" sz="1100" dirty="0">
                 <a:latin typeface="Arial" panose="020B0604020202020204" pitchFamily="34" charset="0"/>
                 <a:cs typeface="Arial" panose="020B0604020202020204" pitchFamily="34" charset="0"/>
               </a:rPr>
               <a:t> </a:t>
             </a:r>
             <a:r>
-              <a:rPr lang="en-US" sz="1200" dirty="0" err="1">
-                <a:latin typeface="Arial" panose="020B0604020202020204" pitchFamily="34" charset="0"/>
-                <a:cs typeface="Arial" panose="020B0604020202020204" pitchFamily="34" charset="0"/>
-              </a:rPr>
-              <a:t>lado</a:t>
-            </a:r>
-            <a:r>
-              <a:rPr lang="en-US" sz="1200" dirty="0">
-                <a:latin typeface="Arial" panose="020B0604020202020204" pitchFamily="34" charset="0"/>
-                <a:cs typeface="Arial" panose="020B0604020202020204" pitchFamily="34" charset="0"/>
-              </a:rPr>
-              <a:t>, para saber </a:t>
-            </a:r>
-            <a:r>
-              <a:rPr lang="en-US" sz="1200" dirty="0" err="1">
-                <a:latin typeface="Arial" panose="020B0604020202020204" pitchFamily="34" charset="0"/>
-                <a:cs typeface="Arial" panose="020B0604020202020204" pitchFamily="34" charset="0"/>
-              </a:rPr>
-              <a:t>si</a:t>
-            </a:r>
-            <a:r>
-              <a:rPr lang="en-US" sz="1200" dirty="0">
-                <a:latin typeface="Arial" panose="020B0604020202020204" pitchFamily="34" charset="0"/>
-                <a:cs typeface="Arial" panose="020B0604020202020204" pitchFamily="34" charset="0"/>
-              </a:rPr>
-              <a:t> un modo se </a:t>
-            </a:r>
-            <a:r>
-              <a:rPr lang="en-US" sz="1200" dirty="0" err="1">
-                <a:latin typeface="Arial" panose="020B0604020202020204" pitchFamily="34" charset="0"/>
-                <a:cs typeface="Arial" panose="020B0604020202020204" pitchFamily="34" charset="0"/>
-              </a:rPr>
-              <a:t>propaga</a:t>
-            </a:r>
-            <a:r>
-              <a:rPr lang="en-US" sz="1200" dirty="0">
-                <a:latin typeface="Arial" panose="020B0604020202020204" pitchFamily="34" charset="0"/>
-                <a:cs typeface="Arial" panose="020B0604020202020204" pitchFamily="34" charset="0"/>
-              </a:rPr>
-              <a:t> o no </a:t>
-            </a:r>
-            <a:r>
-              <a:rPr lang="en-US" sz="1200" dirty="0" err="1">
-                <a:latin typeface="Arial" panose="020B0604020202020204" pitchFamily="34" charset="0"/>
-                <a:cs typeface="Arial" panose="020B0604020202020204" pitchFamily="34" charset="0"/>
-              </a:rPr>
-              <a:t>en</a:t>
-            </a:r>
-            <a:r>
-              <a:rPr lang="en-US" sz="1200" dirty="0">
-                <a:latin typeface="Arial" panose="020B0604020202020204" pitchFamily="34" charset="0"/>
-                <a:cs typeface="Arial" panose="020B0604020202020204" pitchFamily="34" charset="0"/>
-              </a:rPr>
-              <a:t> una </a:t>
-            </a:r>
-            <a:r>
-              <a:rPr lang="en-US" sz="1200" dirty="0" err="1">
-                <a:latin typeface="Arial" panose="020B0604020202020204" pitchFamily="34" charset="0"/>
-                <a:cs typeface="Arial" panose="020B0604020202020204" pitchFamily="34" charset="0"/>
-              </a:rPr>
-              <a:t>guía</a:t>
-            </a:r>
-            <a:r>
-              <a:rPr lang="en-US" sz="1200" dirty="0">
+              <a:rPr lang="en-US" sz="1100" dirty="0" err="1">
+                <a:latin typeface="Arial" panose="020B0604020202020204" pitchFamily="34" charset="0"/>
+                <a:cs typeface="Arial" panose="020B0604020202020204" pitchFamily="34" charset="0"/>
+              </a:rPr>
+              <a:t>ver</a:t>
+            </a:r>
+            <a:r>
+              <a:rPr lang="en-US" sz="1100" dirty="0">
+                <a:latin typeface="Arial" panose="020B0604020202020204" pitchFamily="34" charset="0"/>
+                <a:cs typeface="Arial" panose="020B0604020202020204" pitchFamily="34" charset="0"/>
+              </a:rPr>
+              <a:t> que no hay un </a:t>
+            </a:r>
+            <a:r>
+              <a:rPr lang="en-US" sz="1100" dirty="0" err="1">
+                <a:latin typeface="Arial" panose="020B0604020202020204" pitchFamily="34" charset="0"/>
+                <a:cs typeface="Arial" panose="020B0604020202020204" pitchFamily="34" charset="0"/>
+              </a:rPr>
+              <a:t>cambio</a:t>
+            </a:r>
+            <a:r>
+              <a:rPr lang="en-US" sz="1100" dirty="0">
                 <a:latin typeface="Arial" panose="020B0604020202020204" pitchFamily="34" charset="0"/>
                 <a:cs typeface="Arial" panose="020B0604020202020204" pitchFamily="34" charset="0"/>
               </a:rPr>
               <a:t> de </a:t>
             </a:r>
             <a:r>
-              <a:rPr lang="en-US" sz="1200" dirty="0" err="1">
-                <a:latin typeface="Arial" panose="020B0604020202020204" pitchFamily="34" charset="0"/>
-                <a:cs typeface="Arial" panose="020B0604020202020204" pitchFamily="34" charset="0"/>
-              </a:rPr>
-              <a:t>onda</a:t>
-            </a:r>
-            <a:r>
-              <a:rPr lang="en-US" sz="1200" dirty="0">
-                <a:latin typeface="Arial" panose="020B0604020202020204" pitchFamily="34" charset="0"/>
-                <a:cs typeface="Arial" panose="020B0604020202020204" pitchFamily="34" charset="0"/>
-              </a:rPr>
-              <a:t>, </a:t>
-            </a:r>
-            <a:r>
-              <a:rPr lang="en-US" sz="1200" dirty="0" err="1">
-                <a:latin typeface="Arial" panose="020B0604020202020204" pitchFamily="34" charset="0"/>
-                <a:cs typeface="Arial" panose="020B0604020202020204" pitchFamily="34" charset="0"/>
-              </a:rPr>
-              <a:t>tiene</a:t>
-            </a:r>
-            <a:r>
-              <a:rPr lang="en-US" sz="1200" dirty="0">
-                <a:latin typeface="Arial" panose="020B0604020202020204" pitchFamily="34" charset="0"/>
-                <a:cs typeface="Arial" panose="020B0604020202020204" pitchFamily="34" charset="0"/>
-              </a:rPr>
-              <a:t> que </a:t>
-            </a:r>
-            <a:r>
-              <a:rPr lang="en-US" sz="1200" dirty="0" err="1">
-                <a:latin typeface="Arial" panose="020B0604020202020204" pitchFamily="34" charset="0"/>
-                <a:cs typeface="Arial" panose="020B0604020202020204" pitchFamily="34" charset="0"/>
-              </a:rPr>
-              <a:t>tener</a:t>
-            </a:r>
-            <a:r>
-              <a:rPr lang="en-US" sz="1200" dirty="0">
-                <a:latin typeface="Arial" panose="020B0604020202020204" pitchFamily="34" charset="0"/>
-                <a:cs typeface="Arial" panose="020B0604020202020204" pitchFamily="34" charset="0"/>
-              </a:rPr>
-              <a:t> un </a:t>
-            </a:r>
-            <a:r>
-              <a:rPr lang="en-US" sz="1200" dirty="0" err="1">
-                <a:latin typeface="Arial" panose="020B0604020202020204" pitchFamily="34" charset="0"/>
-                <a:cs typeface="Arial" panose="020B0604020202020204" pitchFamily="34" charset="0"/>
-              </a:rPr>
-              <a:t>índice</a:t>
-            </a:r>
-            <a:r>
-              <a:rPr lang="en-US" sz="1200" dirty="0">
+              <a:rPr lang="en-US" sz="1100" dirty="0" err="1">
+                <a:latin typeface="Arial" panose="020B0604020202020204" pitchFamily="34" charset="0"/>
+                <a:cs typeface="Arial" panose="020B0604020202020204" pitchFamily="34" charset="0"/>
+              </a:rPr>
+              <a:t>fracción</a:t>
+            </a:r>
+            <a:r>
+              <a:rPr lang="en-US" sz="1100" dirty="0">
+                <a:latin typeface="Arial" panose="020B0604020202020204" pitchFamily="34" charset="0"/>
+                <a:cs typeface="Arial" panose="020B0604020202020204" pitchFamily="34" charset="0"/>
+              </a:rPr>
+              <a:t> de </a:t>
+            </a:r>
+            <a:r>
+              <a:rPr lang="en-US" sz="1100" dirty="0" err="1">
+                <a:latin typeface="Arial" panose="020B0604020202020204" pitchFamily="34" charset="0"/>
+                <a:cs typeface="Arial" panose="020B0604020202020204" pitchFamily="34" charset="0"/>
+              </a:rPr>
+              <a:t>polarización</a:t>
+            </a:r>
+            <a:r>
+              <a:rPr lang="en-US" sz="1100" dirty="0">
                 <a:latin typeface="Arial" panose="020B0604020202020204" pitchFamily="34" charset="0"/>
                 <a:cs typeface="Arial" panose="020B0604020202020204" pitchFamily="34" charset="0"/>
               </a:rPr>
               <a:t> </a:t>
             </a:r>
             <a:r>
-              <a:rPr lang="en-US" sz="1200" dirty="0" err="1">
-                <a:latin typeface="Arial" panose="020B0604020202020204" pitchFamily="34" charset="0"/>
-                <a:cs typeface="Arial" panose="020B0604020202020204" pitchFamily="34" charset="0"/>
-              </a:rPr>
-              <a:t>efectivo</a:t>
-            </a:r>
-            <a:r>
-              <a:rPr lang="en-US" sz="1200" dirty="0">
-                <a:latin typeface="Arial" panose="020B0604020202020204" pitchFamily="34" charset="0"/>
-                <a:cs typeface="Arial" panose="020B0604020202020204" pitchFamily="34" charset="0"/>
-              </a:rPr>
-              <a:t> mayor al de </a:t>
-            </a:r>
-            <a:r>
-              <a:rPr lang="en-US" sz="1200" dirty="0" err="1">
-                <a:latin typeface="Arial" panose="020B0604020202020204" pitchFamily="34" charset="0"/>
-                <a:cs typeface="Arial" panose="020B0604020202020204" pitchFamily="34" charset="0"/>
-              </a:rPr>
-              <a:t>el</a:t>
-            </a:r>
-            <a:r>
-              <a:rPr lang="en-US" sz="1200" dirty="0">
-                <a:latin typeface="Arial" panose="020B0604020202020204" pitchFamily="34" charset="0"/>
-                <a:cs typeface="Arial" panose="020B0604020202020204" pitchFamily="34" charset="0"/>
-              </a:rPr>
-              <a:t> cladding (1.44, SiO2). </a:t>
-            </a:r>
-            <a:r>
-              <a:rPr lang="en-US" sz="1200" dirty="0" err="1">
-                <a:latin typeface="Arial" panose="020B0604020202020204" pitchFamily="34" charset="0"/>
-                <a:cs typeface="Arial" panose="020B0604020202020204" pitchFamily="34" charset="0"/>
-              </a:rPr>
-              <a:t>En</a:t>
-            </a:r>
-            <a:r>
-              <a:rPr lang="en-US" sz="1200" dirty="0">
+              <a:rPr lang="en-US" sz="1100" dirty="0" err="1">
+                <a:latin typeface="Arial" panose="020B0604020202020204" pitchFamily="34" charset="0"/>
+                <a:cs typeface="Arial" panose="020B0604020202020204" pitchFamily="34" charset="0"/>
+              </a:rPr>
+              <a:t>pronunciado</a:t>
+            </a:r>
+            <a:r>
+              <a:rPr lang="en-US" sz="1100" dirty="0">
+                <a:latin typeface="Arial" panose="020B0604020202020204" pitchFamily="34" charset="0"/>
+                <a:cs typeface="Arial" panose="020B0604020202020204" pitchFamily="34" charset="0"/>
+              </a:rPr>
+              <a:t> para </a:t>
+            </a:r>
+            <a:r>
+              <a:rPr lang="en-US" sz="1100" dirty="0" err="1">
+                <a:latin typeface="Arial" panose="020B0604020202020204" pitchFamily="34" charset="0"/>
+                <a:cs typeface="Arial" panose="020B0604020202020204" pitchFamily="34" charset="0"/>
+              </a:rPr>
+              <a:t>todos</a:t>
+            </a:r>
+            <a:r>
+              <a:rPr lang="en-US" sz="1100" dirty="0">
                 <a:latin typeface="Arial" panose="020B0604020202020204" pitchFamily="34" charset="0"/>
                 <a:cs typeface="Arial" panose="020B0604020202020204" pitchFamily="34" charset="0"/>
               </a:rPr>
               <a:t> </a:t>
             </a:r>
             <a:r>
-              <a:rPr lang="en-US" sz="1200" dirty="0" err="1">
-                <a:latin typeface="Arial" panose="020B0604020202020204" pitchFamily="34" charset="0"/>
-                <a:cs typeface="Arial" panose="020B0604020202020204" pitchFamily="34" charset="0"/>
-              </a:rPr>
-              <a:t>este</a:t>
-            </a:r>
-            <a:r>
-              <a:rPr lang="en-US" sz="1200" dirty="0">
+              <a:rPr lang="en-US" sz="1100" dirty="0" err="1">
+                <a:latin typeface="Arial" panose="020B0604020202020204" pitchFamily="34" charset="0"/>
+                <a:cs typeface="Arial" panose="020B0604020202020204" pitchFamily="34" charset="0"/>
+              </a:rPr>
+              <a:t>los</a:t>
+            </a:r>
+            <a:r>
+              <a:rPr lang="en-US" sz="1100" dirty="0">
                 <a:latin typeface="Arial" panose="020B0604020202020204" pitchFamily="34" charset="0"/>
                 <a:cs typeface="Arial" panose="020B0604020202020204" pitchFamily="34" charset="0"/>
               </a:rPr>
               <a:t> </a:t>
             </a:r>
             <a:r>
-              <a:rPr lang="en-US" sz="1200" dirty="0" err="1">
-                <a:latin typeface="Arial" panose="020B0604020202020204" pitchFamily="34" charset="0"/>
-                <a:cs typeface="Arial" panose="020B0604020202020204" pitchFamily="34" charset="0"/>
-              </a:rPr>
-              <a:t>caso</a:t>
-            </a:r>
-            <a:r>
-              <a:rPr lang="en-US" sz="1200" dirty="0">
-                <a:latin typeface="Arial" panose="020B0604020202020204" pitchFamily="34" charset="0"/>
-                <a:cs typeface="Arial" panose="020B0604020202020204" pitchFamily="34" charset="0"/>
-              </a:rPr>
-              <a:t>, se </a:t>
-            </a:r>
-            <a:r>
-              <a:rPr lang="en-US" sz="1200" dirty="0" err="1">
-                <a:latin typeface="Arial" panose="020B0604020202020204" pitchFamily="34" charset="0"/>
-                <a:cs typeface="Arial" panose="020B0604020202020204" pitchFamily="34" charset="0"/>
-              </a:rPr>
-              <a:t>puede</a:t>
-            </a:r>
-            <a:r>
-              <a:rPr lang="en-US" sz="1200" dirty="0">
-                <a:latin typeface="Arial" panose="020B0604020202020204" pitchFamily="34" charset="0"/>
-                <a:cs typeface="Arial" panose="020B0604020202020204" pitchFamily="34" charset="0"/>
-              </a:rPr>
-              <a:t> </a:t>
-            </a:r>
-            <a:r>
-              <a:rPr lang="en-US" sz="1200" dirty="0" err="1">
-                <a:latin typeface="Arial" panose="020B0604020202020204" pitchFamily="34" charset="0"/>
-                <a:cs typeface="Arial" panose="020B0604020202020204" pitchFamily="34" charset="0"/>
-              </a:rPr>
-              <a:t>apreciar</a:t>
-            </a:r>
-            <a:r>
-              <a:rPr lang="en-US" sz="1200" dirty="0">
-                <a:latin typeface="Arial" panose="020B0604020202020204" pitchFamily="34" charset="0"/>
-                <a:cs typeface="Arial" panose="020B0604020202020204" pitchFamily="34" charset="0"/>
-              </a:rPr>
-              <a:t> que los </a:t>
-            </a:r>
-            <a:r>
-              <a:rPr lang="en-US" sz="1200" dirty="0" err="1">
-                <a:latin typeface="Arial" panose="020B0604020202020204" pitchFamily="34" charset="0"/>
-                <a:cs typeface="Arial" panose="020B0604020202020204" pitchFamily="34" charset="0"/>
-              </a:rPr>
-              <a:t>los</a:t>
-            </a:r>
-            <a:r>
-              <a:rPr lang="en-US" sz="1200" dirty="0">
-                <a:latin typeface="Arial" panose="020B0604020202020204" pitchFamily="34" charset="0"/>
-                <a:cs typeface="Arial" panose="020B0604020202020204" pitchFamily="34" charset="0"/>
-              </a:rPr>
-              <a:t> </a:t>
-            </a:r>
-            <a:r>
-              <a:rPr lang="en-US" sz="1200" dirty="0" err="1">
-                <a:latin typeface="Arial" panose="020B0604020202020204" pitchFamily="34" charset="0"/>
-                <a:cs typeface="Arial" panose="020B0604020202020204" pitchFamily="34" charset="0"/>
-              </a:rPr>
-              <a:t>únicos</a:t>
-            </a:r>
-            <a:r>
-              <a:rPr lang="en-US" sz="1200" dirty="0">
-                <a:latin typeface="Arial" panose="020B0604020202020204" pitchFamily="34" charset="0"/>
-                <a:cs typeface="Arial" panose="020B0604020202020204" pitchFamily="34" charset="0"/>
-              </a:rPr>
-              <a:t> </a:t>
-            </a:r>
-            <a:r>
-              <a:rPr lang="en-US" sz="1200" dirty="0" err="1">
+              <a:rPr lang="en-US" sz="1100" dirty="0" err="1">
                 <a:latin typeface="Arial" panose="020B0604020202020204" pitchFamily="34" charset="0"/>
                 <a:cs typeface="Arial" panose="020B0604020202020204" pitchFamily="34" charset="0"/>
               </a:rPr>
               <a:t>modos</a:t>
             </a:r>
             <a:r>
-              <a:rPr lang="en-US" sz="1200" dirty="0">
-                <a:latin typeface="Arial" panose="020B0604020202020204" pitchFamily="34" charset="0"/>
-                <a:cs typeface="Arial" panose="020B0604020202020204" pitchFamily="34" charset="0"/>
-              </a:rPr>
-              <a:t> que se </a:t>
-            </a:r>
-            <a:r>
-              <a:rPr lang="en-US" sz="1200" dirty="0" err="1">
-                <a:latin typeface="Arial" panose="020B0604020202020204" pitchFamily="34" charset="0"/>
-                <a:cs typeface="Arial" panose="020B0604020202020204" pitchFamily="34" charset="0"/>
-              </a:rPr>
-              <a:t>propagan</a:t>
-            </a:r>
-            <a:r>
-              <a:rPr lang="en-US" sz="1200" dirty="0">
-                <a:latin typeface="Arial" panose="020B0604020202020204" pitchFamily="34" charset="0"/>
-                <a:cs typeface="Arial" panose="020B0604020202020204" pitchFamily="34" charset="0"/>
-              </a:rPr>
-              <a:t> para </a:t>
-            </a:r>
-            <a:r>
-              <a:rPr lang="en-US" sz="1200" dirty="0" err="1">
-                <a:latin typeface="Arial" panose="020B0604020202020204" pitchFamily="34" charset="0"/>
-                <a:cs typeface="Arial" panose="020B0604020202020204" pitchFamily="34" charset="0"/>
-              </a:rPr>
-              <a:t>todo</a:t>
-            </a:r>
-            <a:r>
-              <a:rPr lang="en-US" sz="1200" dirty="0">
-                <a:latin typeface="Arial" panose="020B0604020202020204" pitchFamily="34" charset="0"/>
-                <a:cs typeface="Arial" panose="020B0604020202020204" pitchFamily="34" charset="0"/>
-              </a:rPr>
-              <a:t> </a:t>
-            </a:r>
-            <a:r>
-              <a:rPr lang="en-US" sz="1200" dirty="0" err="1">
-                <a:latin typeface="Arial" panose="020B0604020202020204" pitchFamily="34" charset="0"/>
-                <a:cs typeface="Arial" panose="020B0604020202020204" pitchFamily="34" charset="0"/>
-              </a:rPr>
-              <a:t>el</a:t>
-            </a:r>
-            <a:r>
-              <a:rPr lang="en-US" sz="1200" dirty="0">
-                <a:latin typeface="Arial" panose="020B0604020202020204" pitchFamily="34" charset="0"/>
-                <a:cs typeface="Arial" panose="020B0604020202020204" pitchFamily="34" charset="0"/>
-              </a:rPr>
-              <a:t> </a:t>
-            </a:r>
-            <a:r>
-              <a:rPr lang="en-US" sz="1200" dirty="0" err="1">
-                <a:latin typeface="Arial" panose="020B0604020202020204" pitchFamily="34" charset="0"/>
-                <a:cs typeface="Arial" panose="020B0604020202020204" pitchFamily="34" charset="0"/>
-              </a:rPr>
-              <a:t>rango</a:t>
-            </a:r>
-            <a:r>
-              <a:rPr lang="en-US" sz="1200" dirty="0">
-                <a:latin typeface="Arial" panose="020B0604020202020204" pitchFamily="34" charset="0"/>
-                <a:cs typeface="Arial" panose="020B0604020202020204" pitchFamily="34" charset="0"/>
-              </a:rPr>
-              <a:t> de </a:t>
-            </a:r>
-            <a:r>
-              <a:rPr lang="en-US" sz="1200" dirty="0" err="1">
-                <a:latin typeface="Arial" panose="020B0604020202020204" pitchFamily="34" charset="0"/>
-                <a:cs typeface="Arial" panose="020B0604020202020204" pitchFamily="34" charset="0"/>
-              </a:rPr>
-              <a:t>anchos</a:t>
-            </a:r>
-            <a:r>
-              <a:rPr lang="en-US" sz="1200" dirty="0">
-                <a:latin typeface="Arial" panose="020B0604020202020204" pitchFamily="34" charset="0"/>
-                <a:cs typeface="Arial" panose="020B0604020202020204" pitchFamily="34" charset="0"/>
-              </a:rPr>
-              <a:t> de </a:t>
-            </a:r>
-            <a:r>
-              <a:rPr lang="en-US" sz="1200" dirty="0" err="1">
-                <a:latin typeface="Arial" panose="020B0604020202020204" pitchFamily="34" charset="0"/>
-                <a:cs typeface="Arial" panose="020B0604020202020204" pitchFamily="34" charset="0"/>
-              </a:rPr>
-              <a:t>guía</a:t>
-            </a:r>
-            <a:r>
-              <a:rPr lang="en-US" sz="1200" dirty="0">
-                <a:latin typeface="Arial" panose="020B0604020202020204" pitchFamily="34" charset="0"/>
-                <a:cs typeface="Arial" panose="020B0604020202020204" pitchFamily="34" charset="0"/>
-              </a:rPr>
-              <a:t> de </a:t>
-            </a:r>
-            <a:r>
-              <a:rPr lang="en-US" sz="1200" dirty="0" err="1">
-                <a:latin typeface="Arial" panose="020B0604020202020204" pitchFamily="34" charset="0"/>
-                <a:cs typeface="Arial" panose="020B0604020202020204" pitchFamily="34" charset="0"/>
-              </a:rPr>
-              <a:t>onda</a:t>
-            </a:r>
-            <a:r>
-              <a:rPr lang="en-US" sz="1200" dirty="0">
-                <a:latin typeface="Arial" panose="020B0604020202020204" pitchFamily="34" charset="0"/>
-                <a:cs typeface="Arial" panose="020B0604020202020204" pitchFamily="34" charset="0"/>
-              </a:rPr>
-              <a:t> son los </a:t>
-            </a:r>
-            <a:r>
-              <a:rPr lang="en-US" sz="1200" dirty="0" err="1">
-                <a:latin typeface="Arial" panose="020B0604020202020204" pitchFamily="34" charset="0"/>
-                <a:cs typeface="Arial" panose="020B0604020202020204" pitchFamily="34" charset="0"/>
-              </a:rPr>
-              <a:t>modos</a:t>
-            </a:r>
-            <a:r>
-              <a:rPr lang="en-US" sz="1200" dirty="0">
-                <a:latin typeface="Arial" panose="020B0604020202020204" pitchFamily="34" charset="0"/>
-                <a:cs typeface="Arial" panose="020B0604020202020204" pitchFamily="34" charset="0"/>
-              </a:rPr>
-              <a:t> 0 y 1, </a:t>
-            </a:r>
-            <a:r>
-              <a:rPr lang="en-US" sz="1200" dirty="0" err="1">
-                <a:latin typeface="Arial" panose="020B0604020202020204" pitchFamily="34" charset="0"/>
-                <a:cs typeface="Arial" panose="020B0604020202020204" pitchFamily="34" charset="0"/>
-              </a:rPr>
-              <a:t>mientras</a:t>
-            </a:r>
-            <a:r>
-              <a:rPr lang="en-US" sz="1200" dirty="0">
-                <a:latin typeface="Arial" panose="020B0604020202020204" pitchFamily="34" charset="0"/>
-                <a:cs typeface="Arial" panose="020B0604020202020204" pitchFamily="34" charset="0"/>
-              </a:rPr>
-              <a:t> que </a:t>
-            </a:r>
-            <a:r>
-              <a:rPr lang="en-US" sz="1200" dirty="0" err="1">
-                <a:latin typeface="Arial" panose="020B0604020202020204" pitchFamily="34" charset="0"/>
-                <a:cs typeface="Arial" panose="020B0604020202020204" pitchFamily="34" charset="0"/>
-              </a:rPr>
-              <a:t>el</a:t>
-            </a:r>
-            <a:r>
-              <a:rPr lang="en-US" sz="1200" dirty="0">
-                <a:latin typeface="Arial" panose="020B0604020202020204" pitchFamily="34" charset="0"/>
-                <a:cs typeface="Arial" panose="020B0604020202020204" pitchFamily="34" charset="0"/>
-              </a:rPr>
-              <a:t> modo 2 </a:t>
-            </a:r>
-            <a:r>
-              <a:rPr lang="en-US" sz="1200" dirty="0" err="1">
-                <a:latin typeface="Arial" panose="020B0604020202020204" pitchFamily="34" charset="0"/>
-                <a:cs typeface="Arial" panose="020B0604020202020204" pitchFamily="34" charset="0"/>
-              </a:rPr>
-              <a:t>empezará</a:t>
-            </a:r>
-            <a:r>
-              <a:rPr lang="en-US" sz="1200" dirty="0">
-                <a:latin typeface="Arial" panose="020B0604020202020204" pitchFamily="34" charset="0"/>
-                <a:cs typeface="Arial" panose="020B0604020202020204" pitchFamily="34" charset="0"/>
-              </a:rPr>
-              <a:t> a </a:t>
-            </a:r>
-            <a:r>
-              <a:rPr lang="en-US" sz="1200" dirty="0" err="1">
-                <a:latin typeface="Arial" panose="020B0604020202020204" pitchFamily="34" charset="0"/>
-                <a:cs typeface="Arial" panose="020B0604020202020204" pitchFamily="34" charset="0"/>
-              </a:rPr>
-              <a:t>propagarse</a:t>
-            </a:r>
-            <a:r>
-              <a:rPr lang="en-US" sz="1200" dirty="0">
-                <a:latin typeface="Arial" panose="020B0604020202020204" pitchFamily="34" charset="0"/>
-                <a:cs typeface="Arial" panose="020B0604020202020204" pitchFamily="34" charset="0"/>
-              </a:rPr>
-              <a:t> para </a:t>
-            </a:r>
-            <a:r>
-              <a:rPr lang="en-US" sz="1200" dirty="0" err="1">
-                <a:latin typeface="Arial" panose="020B0604020202020204" pitchFamily="34" charset="0"/>
-                <a:cs typeface="Arial" panose="020B0604020202020204" pitchFamily="34" charset="0"/>
-              </a:rPr>
-              <a:t>anchos</a:t>
-            </a:r>
-            <a:r>
-              <a:rPr lang="en-US" sz="1200" dirty="0">
-                <a:latin typeface="Arial" panose="020B0604020202020204" pitchFamily="34" charset="0"/>
-                <a:cs typeface="Arial" panose="020B0604020202020204" pitchFamily="34" charset="0"/>
-              </a:rPr>
-              <a:t> de </a:t>
-            </a:r>
-            <a:r>
-              <a:rPr lang="en-US" sz="1200" dirty="0" err="1">
-                <a:latin typeface="Arial" panose="020B0604020202020204" pitchFamily="34" charset="0"/>
-                <a:cs typeface="Arial" panose="020B0604020202020204" pitchFamily="34" charset="0"/>
-              </a:rPr>
-              <a:t>guía</a:t>
-            </a:r>
-            <a:r>
-              <a:rPr lang="en-US" sz="1200" dirty="0">
-                <a:latin typeface="Arial" panose="020B0604020202020204" pitchFamily="34" charset="0"/>
-                <a:cs typeface="Arial" panose="020B0604020202020204" pitchFamily="34" charset="0"/>
-              </a:rPr>
-              <a:t> </a:t>
-            </a:r>
-            <a:r>
-              <a:rPr lang="en-US" sz="1200" dirty="0" err="1">
-                <a:latin typeface="Arial" panose="020B0604020202020204" pitchFamily="34" charset="0"/>
-                <a:cs typeface="Arial" panose="020B0604020202020204" pitchFamily="34" charset="0"/>
-              </a:rPr>
-              <a:t>mayores</a:t>
-            </a:r>
-            <a:r>
-              <a:rPr lang="en-US" sz="1200" dirty="0">
-                <a:latin typeface="Arial" panose="020B0604020202020204" pitchFamily="34" charset="0"/>
-                <a:cs typeface="Arial" panose="020B0604020202020204" pitchFamily="34" charset="0"/>
-              </a:rPr>
-              <a:t> a 1.3 um. Por contra </a:t>
-            </a:r>
-            <a:r>
-              <a:rPr lang="en-US" sz="1200" dirty="0" err="1">
-                <a:latin typeface="Arial" panose="020B0604020202020204" pitchFamily="34" charset="0"/>
-                <a:cs typeface="Arial" panose="020B0604020202020204" pitchFamily="34" charset="0"/>
-              </a:rPr>
-              <a:t>el</a:t>
-            </a:r>
-            <a:r>
-              <a:rPr lang="en-US" sz="1200" dirty="0">
-                <a:latin typeface="Arial" panose="020B0604020202020204" pitchFamily="34" charset="0"/>
-                <a:cs typeface="Arial" panose="020B0604020202020204" pitchFamily="34" charset="0"/>
-              </a:rPr>
-              <a:t> modo 3 no se </a:t>
-            </a:r>
-            <a:r>
-              <a:rPr lang="en-US" sz="1200" dirty="0" err="1">
-                <a:latin typeface="Arial" panose="020B0604020202020204" pitchFamily="34" charset="0"/>
-                <a:cs typeface="Arial" panose="020B0604020202020204" pitchFamily="34" charset="0"/>
-              </a:rPr>
-              <a:t>propagará</a:t>
-            </a:r>
-            <a:r>
-              <a:rPr lang="en-US" sz="1200" dirty="0">
-                <a:latin typeface="Arial" panose="020B0604020202020204" pitchFamily="34" charset="0"/>
-                <a:cs typeface="Arial" panose="020B0604020202020204" pitchFamily="34" charset="0"/>
-              </a:rPr>
-              <a:t> para </a:t>
-            </a:r>
-            <a:r>
-              <a:rPr lang="en-US" sz="1200" dirty="0" err="1">
-                <a:latin typeface="Arial" panose="020B0604020202020204" pitchFamily="34" charset="0"/>
-                <a:cs typeface="Arial" panose="020B0604020202020204" pitchFamily="34" charset="0"/>
-              </a:rPr>
-              <a:t>ningún</a:t>
-            </a:r>
-            <a:r>
-              <a:rPr lang="en-US" sz="1200" dirty="0">
-                <a:latin typeface="Arial" panose="020B0604020202020204" pitchFamily="34" charset="0"/>
-                <a:cs typeface="Arial" panose="020B0604020202020204" pitchFamily="34" charset="0"/>
-              </a:rPr>
-              <a:t> ancho dentro del </a:t>
-            </a:r>
-            <a:r>
-              <a:rPr lang="en-US" sz="1200" dirty="0" err="1">
-                <a:latin typeface="Arial" panose="020B0604020202020204" pitchFamily="34" charset="0"/>
-                <a:cs typeface="Arial" panose="020B0604020202020204" pitchFamily="34" charset="0"/>
-              </a:rPr>
-              <a:t>rango</a:t>
-            </a:r>
-            <a:r>
-              <a:rPr lang="en-US" sz="1200" dirty="0">
-                <a:latin typeface="Arial" panose="020B0604020202020204" pitchFamily="34" charset="0"/>
-                <a:cs typeface="Arial" panose="020B0604020202020204" pitchFamily="34" charset="0"/>
-              </a:rPr>
-              <a:t> </a:t>
-            </a:r>
-            <a:r>
-              <a:rPr lang="en-US" sz="1200" dirty="0" err="1">
-                <a:latin typeface="Arial" panose="020B0604020202020204" pitchFamily="34" charset="0"/>
-                <a:cs typeface="Arial" panose="020B0604020202020204" pitchFamily="34" charset="0"/>
-              </a:rPr>
-              <a:t>propuesto</a:t>
-            </a:r>
-            <a:r>
-              <a:rPr lang="en-US" sz="1200" dirty="0">
-                <a:latin typeface="Arial" panose="020B0604020202020204" pitchFamily="34" charset="0"/>
-                <a:cs typeface="Arial" panose="020B0604020202020204" pitchFamily="34" charset="0"/>
-              </a:rPr>
-              <a:t>, es </a:t>
-            </a:r>
-            <a:r>
-              <a:rPr lang="en-US" sz="1200" dirty="0" err="1">
-                <a:latin typeface="Arial" panose="020B0604020202020204" pitchFamily="34" charset="0"/>
-                <a:cs typeface="Arial" panose="020B0604020202020204" pitchFamily="34" charset="0"/>
-              </a:rPr>
-              <a:t>decir</a:t>
-            </a:r>
-            <a:r>
-              <a:rPr lang="en-US" sz="1200" dirty="0">
-                <a:latin typeface="Arial" panose="020B0604020202020204" pitchFamily="34" charset="0"/>
-                <a:cs typeface="Arial" panose="020B0604020202020204" pitchFamily="34" charset="0"/>
-              </a:rPr>
-              <a:t>, </a:t>
-            </a:r>
-            <a:r>
-              <a:rPr lang="en-US" sz="1200" dirty="0" err="1">
-                <a:latin typeface="Arial" panose="020B0604020202020204" pitchFamily="34" charset="0"/>
-                <a:cs typeface="Arial" panose="020B0604020202020204" pitchFamily="34" charset="0"/>
-              </a:rPr>
-              <a:t>este</a:t>
-            </a:r>
-            <a:r>
-              <a:rPr lang="en-US" sz="1200" dirty="0">
-                <a:latin typeface="Arial" panose="020B0604020202020204" pitchFamily="34" charset="0"/>
-                <a:cs typeface="Arial" panose="020B0604020202020204" pitchFamily="34" charset="0"/>
-              </a:rPr>
-              <a:t> modo </a:t>
-            </a:r>
-            <a:r>
-              <a:rPr lang="en-US" sz="1200" dirty="0" err="1">
-                <a:latin typeface="Arial" panose="020B0604020202020204" pitchFamily="34" charset="0"/>
-                <a:cs typeface="Arial" panose="020B0604020202020204" pitchFamily="34" charset="0"/>
-              </a:rPr>
-              <a:t>está</a:t>
-            </a:r>
-            <a:r>
-              <a:rPr lang="en-US" sz="1200" dirty="0">
-                <a:latin typeface="Arial" panose="020B0604020202020204" pitchFamily="34" charset="0"/>
-                <a:cs typeface="Arial" panose="020B0604020202020204" pitchFamily="34" charset="0"/>
-              </a:rPr>
-              <a:t> </a:t>
-            </a:r>
-            <a:r>
-              <a:rPr lang="en-US" sz="1200" dirty="0" err="1">
-                <a:latin typeface="Arial" panose="020B0604020202020204" pitchFamily="34" charset="0"/>
-                <a:cs typeface="Arial" panose="020B0604020202020204" pitchFamily="34" charset="0"/>
-              </a:rPr>
-              <a:t>en</a:t>
-            </a:r>
-            <a:r>
-              <a:rPr lang="en-US" sz="1200" dirty="0">
-                <a:latin typeface="Arial" panose="020B0604020202020204" pitchFamily="34" charset="0"/>
-                <a:cs typeface="Arial" panose="020B0604020202020204" pitchFamily="34" charset="0"/>
-              </a:rPr>
-              <a:t> </a:t>
-            </a:r>
-            <a:r>
-              <a:rPr lang="en-US" sz="1200" dirty="0" err="1">
-                <a:latin typeface="Arial" panose="020B0604020202020204" pitchFamily="34" charset="0"/>
-                <a:cs typeface="Arial" panose="020B0604020202020204" pitchFamily="34" charset="0"/>
-              </a:rPr>
-              <a:t>corte</a:t>
-            </a:r>
-            <a:r>
-              <a:rPr lang="en-US" sz="1200" dirty="0">
+              <a:rPr lang="en-US" sz="1100" dirty="0">
                 <a:latin typeface="Arial" panose="020B0604020202020204" pitchFamily="34" charset="0"/>
                 <a:cs typeface="Arial" panose="020B0604020202020204" pitchFamily="34" charset="0"/>
               </a:rPr>
@@ -6466,7 +6067,7 @@
           </a:p>
           <a:p>
             <a:pPr algn="just"/>
-            <a:endParaRPr lang="en-US" sz="1200" dirty="0">
+            <a:endParaRPr lang="en-US" sz="1100" dirty="0">
               <a:latin typeface="Arial" panose="020B0604020202020204" pitchFamily="34" charset="0"/>
               <a:cs typeface="Arial" panose="020B0604020202020204" pitchFamily="34" charset="0"/>
             </a:endParaRPr>
@@ -6474,532 +6075,1259 @@
           <a:p>
             <a:pPr algn="just"/>
             <a:r>
-              <a:rPr lang="en-US" sz="1200" dirty="0" err="1">
-                <a:latin typeface="Arial" panose="020B0604020202020204" pitchFamily="34" charset="0"/>
-                <a:cs typeface="Arial" panose="020B0604020202020204" pitchFamily="34" charset="0"/>
-              </a:rPr>
-              <a:t>También</a:t>
-            </a:r>
-            <a:r>
-              <a:rPr lang="en-US" sz="1200" dirty="0">
+              <a:rPr lang="en-US" sz="1100" dirty="0">
+                <a:latin typeface="Arial" panose="020B0604020202020204" pitchFamily="34" charset="0"/>
+                <a:cs typeface="Arial" panose="020B0604020202020204" pitchFamily="34" charset="0"/>
+              </a:rPr>
+              <a:t>Por </a:t>
+            </a:r>
+            <a:r>
+              <a:rPr lang="en-US" sz="1100" dirty="0" err="1">
+                <a:latin typeface="Arial" panose="020B0604020202020204" pitchFamily="34" charset="0"/>
+                <a:cs typeface="Arial" panose="020B0604020202020204" pitchFamily="34" charset="0"/>
+              </a:rPr>
+              <a:t>otro</a:t>
+            </a:r>
+            <a:r>
+              <a:rPr lang="en-US" sz="1100" dirty="0">
                 <a:latin typeface="Arial" panose="020B0604020202020204" pitchFamily="34" charset="0"/>
                 <a:cs typeface="Arial" panose="020B0604020202020204" pitchFamily="34" charset="0"/>
               </a:rPr>
               <a:t> </a:t>
             </a:r>
             <a:r>
-              <a:rPr lang="en-US" sz="1200" dirty="0" err="1">
-                <a:latin typeface="Arial" panose="020B0604020202020204" pitchFamily="34" charset="0"/>
-                <a:cs typeface="Arial" panose="020B0604020202020204" pitchFamily="34" charset="0"/>
-              </a:rPr>
-              <a:t>podemos</a:t>
-            </a:r>
-            <a:r>
-              <a:rPr lang="en-US" sz="1200" dirty="0">
-                <a:latin typeface="Arial" panose="020B0604020202020204" pitchFamily="34" charset="0"/>
-                <a:cs typeface="Arial" panose="020B0604020202020204" pitchFamily="34" charset="0"/>
-              </a:rPr>
-              <a:t> observer que </a:t>
-            </a:r>
-            <a:r>
-              <a:rPr lang="en-US" sz="1200" dirty="0" err="1">
+              <a:rPr lang="en-US" sz="1100" dirty="0" err="1">
+                <a:latin typeface="Arial" panose="020B0604020202020204" pitchFamily="34" charset="0"/>
+                <a:cs typeface="Arial" panose="020B0604020202020204" pitchFamily="34" charset="0"/>
+              </a:rPr>
+              <a:t>lado</a:t>
+            </a:r>
+            <a:r>
+              <a:rPr lang="en-US" sz="1100" dirty="0">
+                <a:latin typeface="Arial" panose="020B0604020202020204" pitchFamily="34" charset="0"/>
+                <a:cs typeface="Arial" panose="020B0604020202020204" pitchFamily="34" charset="0"/>
+              </a:rPr>
+              <a:t>, para saber </a:t>
+            </a:r>
+            <a:r>
+              <a:rPr lang="en-US" sz="1100" dirty="0" err="1">
+                <a:latin typeface="Arial" panose="020B0604020202020204" pitchFamily="34" charset="0"/>
+                <a:cs typeface="Arial" panose="020B0604020202020204" pitchFamily="34" charset="0"/>
+              </a:rPr>
+              <a:t>si</a:t>
+            </a:r>
+            <a:r>
+              <a:rPr lang="en-US" sz="1100" dirty="0">
+                <a:latin typeface="Arial" panose="020B0604020202020204" pitchFamily="34" charset="0"/>
+                <a:cs typeface="Arial" panose="020B0604020202020204" pitchFamily="34" charset="0"/>
+              </a:rPr>
+              <a:t> un modo se </a:t>
+            </a:r>
+            <a:r>
+              <a:rPr lang="en-US" sz="1100" dirty="0" err="1">
+                <a:latin typeface="Arial" panose="020B0604020202020204" pitchFamily="34" charset="0"/>
+                <a:cs typeface="Arial" panose="020B0604020202020204" pitchFamily="34" charset="0"/>
+              </a:rPr>
+              <a:t>propaga</a:t>
+            </a:r>
+            <a:r>
+              <a:rPr lang="en-US" sz="1100" dirty="0">
+                <a:latin typeface="Arial" panose="020B0604020202020204" pitchFamily="34" charset="0"/>
+                <a:cs typeface="Arial" panose="020B0604020202020204" pitchFamily="34" charset="0"/>
+              </a:rPr>
+              <a:t> o no </a:t>
+            </a:r>
+            <a:r>
+              <a:rPr lang="en-US" sz="1100" dirty="0" err="1">
+                <a:latin typeface="Arial" panose="020B0604020202020204" pitchFamily="34" charset="0"/>
+                <a:cs typeface="Arial" panose="020B0604020202020204" pitchFamily="34" charset="0"/>
+              </a:rPr>
+              <a:t>en</a:t>
+            </a:r>
+            <a:r>
+              <a:rPr lang="en-US" sz="1100" dirty="0">
+                <a:latin typeface="Arial" panose="020B0604020202020204" pitchFamily="34" charset="0"/>
+                <a:cs typeface="Arial" panose="020B0604020202020204" pitchFamily="34" charset="0"/>
+              </a:rPr>
+              <a:t> una </a:t>
+            </a:r>
+            <a:r>
+              <a:rPr lang="en-US" sz="1100" dirty="0" err="1">
+                <a:latin typeface="Arial" panose="020B0604020202020204" pitchFamily="34" charset="0"/>
+                <a:cs typeface="Arial" panose="020B0604020202020204" pitchFamily="34" charset="0"/>
+              </a:rPr>
+              <a:t>guía</a:t>
+            </a:r>
+            <a:r>
+              <a:rPr lang="en-US" sz="1100" dirty="0">
+                <a:latin typeface="Arial" panose="020B0604020202020204" pitchFamily="34" charset="0"/>
+                <a:cs typeface="Arial" panose="020B0604020202020204" pitchFamily="34" charset="0"/>
+              </a:rPr>
+              <a:t> de </a:t>
+            </a:r>
+            <a:r>
+              <a:rPr lang="en-US" sz="1100" dirty="0" err="1">
+                <a:latin typeface="Arial" panose="020B0604020202020204" pitchFamily="34" charset="0"/>
+                <a:cs typeface="Arial" panose="020B0604020202020204" pitchFamily="34" charset="0"/>
+              </a:rPr>
+              <a:t>onda</a:t>
+            </a:r>
+            <a:r>
+              <a:rPr lang="en-US" sz="1100" dirty="0">
+                <a:latin typeface="Arial" panose="020B0604020202020204" pitchFamily="34" charset="0"/>
+                <a:cs typeface="Arial" panose="020B0604020202020204" pitchFamily="34" charset="0"/>
+              </a:rPr>
+              <a:t>, </a:t>
+            </a:r>
+            <a:r>
+              <a:rPr lang="en-US" sz="1100" dirty="0" err="1">
+                <a:latin typeface="Arial" panose="020B0604020202020204" pitchFamily="34" charset="0"/>
+                <a:cs typeface="Arial" panose="020B0604020202020204" pitchFamily="34" charset="0"/>
+              </a:rPr>
+              <a:t>tiene</a:t>
+            </a:r>
+            <a:r>
+              <a:rPr lang="en-US" sz="1100" dirty="0">
+                <a:latin typeface="Arial" panose="020B0604020202020204" pitchFamily="34" charset="0"/>
+                <a:cs typeface="Arial" panose="020B0604020202020204" pitchFamily="34" charset="0"/>
+              </a:rPr>
+              <a:t> que </a:t>
+            </a:r>
+            <a:r>
+              <a:rPr lang="en-US" sz="1100" dirty="0" err="1">
+                <a:latin typeface="Arial" panose="020B0604020202020204" pitchFamily="34" charset="0"/>
+                <a:cs typeface="Arial" panose="020B0604020202020204" pitchFamily="34" charset="0"/>
+              </a:rPr>
+              <a:t>tener</a:t>
+            </a:r>
+            <a:r>
+              <a:rPr lang="en-US" sz="1100" dirty="0">
+                <a:latin typeface="Arial" panose="020B0604020202020204" pitchFamily="34" charset="0"/>
+                <a:cs typeface="Arial" panose="020B0604020202020204" pitchFamily="34" charset="0"/>
+              </a:rPr>
+              <a:t> un </a:t>
+            </a:r>
+            <a:r>
+              <a:rPr lang="en-US" sz="1100" dirty="0" err="1">
+                <a:latin typeface="Arial" panose="020B0604020202020204" pitchFamily="34" charset="0"/>
+                <a:cs typeface="Arial" panose="020B0604020202020204" pitchFamily="34" charset="0"/>
+              </a:rPr>
+              <a:t>índice</a:t>
+            </a:r>
+            <a:r>
+              <a:rPr lang="en-US" sz="1100" dirty="0">
+                <a:latin typeface="Arial" panose="020B0604020202020204" pitchFamily="34" charset="0"/>
+                <a:cs typeface="Arial" panose="020B0604020202020204" pitchFamily="34" charset="0"/>
+              </a:rPr>
+              <a:t> </a:t>
+            </a:r>
+            <a:r>
+              <a:rPr lang="en-US" sz="1100" dirty="0" err="1">
+                <a:latin typeface="Arial" panose="020B0604020202020204" pitchFamily="34" charset="0"/>
+                <a:cs typeface="Arial" panose="020B0604020202020204" pitchFamily="34" charset="0"/>
+              </a:rPr>
+              <a:t>efectivo</a:t>
+            </a:r>
+            <a:r>
+              <a:rPr lang="en-US" sz="1100" dirty="0">
+                <a:latin typeface="Arial" panose="020B0604020202020204" pitchFamily="34" charset="0"/>
+                <a:cs typeface="Arial" panose="020B0604020202020204" pitchFamily="34" charset="0"/>
+              </a:rPr>
+              <a:t> mayor al del cladding (1.44, SiO2). </a:t>
+            </a:r>
+            <a:r>
+              <a:rPr lang="en-US" sz="1100" dirty="0" err="1">
+                <a:latin typeface="Arial" panose="020B0604020202020204" pitchFamily="34" charset="0"/>
+                <a:cs typeface="Arial" panose="020B0604020202020204" pitchFamily="34" charset="0"/>
+              </a:rPr>
+              <a:t>En</a:t>
+            </a:r>
+            <a:r>
+              <a:rPr lang="en-US" sz="1100" dirty="0">
+                <a:latin typeface="Arial" panose="020B0604020202020204" pitchFamily="34" charset="0"/>
+                <a:cs typeface="Arial" panose="020B0604020202020204" pitchFamily="34" charset="0"/>
+              </a:rPr>
+              <a:t> </a:t>
+            </a:r>
+            <a:r>
+              <a:rPr lang="en-US" sz="1100" dirty="0" err="1">
+                <a:latin typeface="Arial" panose="020B0604020202020204" pitchFamily="34" charset="0"/>
+                <a:cs typeface="Arial" panose="020B0604020202020204" pitchFamily="34" charset="0"/>
+              </a:rPr>
+              <a:t>este</a:t>
+            </a:r>
+            <a:r>
+              <a:rPr lang="en-US" sz="1100" dirty="0">
+                <a:latin typeface="Arial" panose="020B0604020202020204" pitchFamily="34" charset="0"/>
+                <a:cs typeface="Arial" panose="020B0604020202020204" pitchFamily="34" charset="0"/>
+              </a:rPr>
+              <a:t> </a:t>
+            </a:r>
+            <a:r>
+              <a:rPr lang="en-US" sz="1100" dirty="0" err="1">
+                <a:latin typeface="Arial" panose="020B0604020202020204" pitchFamily="34" charset="0"/>
+                <a:cs typeface="Arial" panose="020B0604020202020204" pitchFamily="34" charset="0"/>
+              </a:rPr>
+              <a:t>caso</a:t>
+            </a:r>
+            <a:r>
+              <a:rPr lang="en-US" sz="1100" dirty="0">
+                <a:latin typeface="Arial" panose="020B0604020202020204" pitchFamily="34" charset="0"/>
+                <a:cs typeface="Arial" panose="020B0604020202020204" pitchFamily="34" charset="0"/>
+              </a:rPr>
+              <a:t>, se </a:t>
+            </a:r>
+            <a:r>
+              <a:rPr lang="en-US" sz="1100" dirty="0" err="1">
+                <a:latin typeface="Arial" panose="020B0604020202020204" pitchFamily="34" charset="0"/>
+                <a:cs typeface="Arial" panose="020B0604020202020204" pitchFamily="34" charset="0"/>
+              </a:rPr>
+              <a:t>puede</a:t>
+            </a:r>
+            <a:r>
+              <a:rPr lang="en-US" sz="1100" dirty="0">
+                <a:latin typeface="Arial" panose="020B0604020202020204" pitchFamily="34" charset="0"/>
+                <a:cs typeface="Arial" panose="020B0604020202020204" pitchFamily="34" charset="0"/>
+              </a:rPr>
+              <a:t> </a:t>
+            </a:r>
+            <a:r>
+              <a:rPr lang="en-US" sz="1100" dirty="0" err="1">
+                <a:latin typeface="Arial" panose="020B0604020202020204" pitchFamily="34" charset="0"/>
+                <a:cs typeface="Arial" panose="020B0604020202020204" pitchFamily="34" charset="0"/>
+              </a:rPr>
+              <a:t>apreciar</a:t>
+            </a:r>
+            <a:r>
+              <a:rPr lang="en-US" sz="1100" dirty="0">
+                <a:latin typeface="Arial" panose="020B0604020202020204" pitchFamily="34" charset="0"/>
+                <a:cs typeface="Arial" panose="020B0604020202020204" pitchFamily="34" charset="0"/>
+              </a:rPr>
+              <a:t> que los </a:t>
+            </a:r>
+            <a:r>
+              <a:rPr lang="en-US" sz="1100" dirty="0" err="1">
+                <a:latin typeface="Arial" panose="020B0604020202020204" pitchFamily="34" charset="0"/>
+                <a:cs typeface="Arial" panose="020B0604020202020204" pitchFamily="34" charset="0"/>
+              </a:rPr>
+              <a:t>los</a:t>
+            </a:r>
+            <a:r>
+              <a:rPr lang="en-US" sz="1100" dirty="0">
+                <a:latin typeface="Arial" panose="020B0604020202020204" pitchFamily="34" charset="0"/>
+                <a:cs typeface="Arial" panose="020B0604020202020204" pitchFamily="34" charset="0"/>
+              </a:rPr>
+              <a:t> </a:t>
+            </a:r>
+            <a:r>
+              <a:rPr lang="en-US" sz="1100" dirty="0" err="1">
+                <a:latin typeface="Arial" panose="020B0604020202020204" pitchFamily="34" charset="0"/>
+                <a:cs typeface="Arial" panose="020B0604020202020204" pitchFamily="34" charset="0"/>
+              </a:rPr>
+              <a:t>únicos</a:t>
+            </a:r>
+            <a:r>
+              <a:rPr lang="en-US" sz="1100" dirty="0">
+                <a:latin typeface="Arial" panose="020B0604020202020204" pitchFamily="34" charset="0"/>
+                <a:cs typeface="Arial" panose="020B0604020202020204" pitchFamily="34" charset="0"/>
+              </a:rPr>
+              <a:t> </a:t>
+            </a:r>
+            <a:r>
+              <a:rPr lang="en-US" sz="1100" dirty="0" err="1">
+                <a:latin typeface="Arial" panose="020B0604020202020204" pitchFamily="34" charset="0"/>
+                <a:cs typeface="Arial" panose="020B0604020202020204" pitchFamily="34" charset="0"/>
+              </a:rPr>
+              <a:t>modos</a:t>
+            </a:r>
+            <a:r>
+              <a:rPr lang="en-US" sz="1100" dirty="0">
+                <a:latin typeface="Arial" panose="020B0604020202020204" pitchFamily="34" charset="0"/>
+                <a:cs typeface="Arial" panose="020B0604020202020204" pitchFamily="34" charset="0"/>
+              </a:rPr>
+              <a:t> que se </a:t>
+            </a:r>
+            <a:r>
+              <a:rPr lang="en-US" sz="1100" dirty="0" err="1">
+                <a:latin typeface="Arial" panose="020B0604020202020204" pitchFamily="34" charset="0"/>
+                <a:cs typeface="Arial" panose="020B0604020202020204" pitchFamily="34" charset="0"/>
+              </a:rPr>
+              <a:t>propagan</a:t>
+            </a:r>
+            <a:r>
+              <a:rPr lang="en-US" sz="1100" dirty="0">
+                <a:latin typeface="Arial" panose="020B0604020202020204" pitchFamily="34" charset="0"/>
+                <a:cs typeface="Arial" panose="020B0604020202020204" pitchFamily="34" charset="0"/>
+              </a:rPr>
+              <a:t> para </a:t>
+            </a:r>
+            <a:r>
+              <a:rPr lang="en-US" sz="1100" dirty="0" err="1">
+                <a:latin typeface="Arial" panose="020B0604020202020204" pitchFamily="34" charset="0"/>
+                <a:cs typeface="Arial" panose="020B0604020202020204" pitchFamily="34" charset="0"/>
+              </a:rPr>
+              <a:t>todo</a:t>
+            </a:r>
+            <a:r>
+              <a:rPr lang="en-US" sz="1100" dirty="0">
+                <a:latin typeface="Arial" panose="020B0604020202020204" pitchFamily="34" charset="0"/>
+                <a:cs typeface="Arial" panose="020B0604020202020204" pitchFamily="34" charset="0"/>
+              </a:rPr>
+              <a:t> </a:t>
+            </a:r>
+            <a:r>
+              <a:rPr lang="en-US" sz="1100" dirty="0" err="1">
                 <a:latin typeface="Arial" panose="020B0604020202020204" pitchFamily="34" charset="0"/>
                 <a:cs typeface="Arial" panose="020B0604020202020204" pitchFamily="34" charset="0"/>
               </a:rPr>
               <a:t>el</a:t>
             </a:r>
             <a:r>
-              <a:rPr lang="en-US" sz="1200" dirty="0">
+              <a:rPr lang="en-US" sz="1100" dirty="0">
                 <a:latin typeface="Arial" panose="020B0604020202020204" pitchFamily="34" charset="0"/>
                 <a:cs typeface="Arial" panose="020B0604020202020204" pitchFamily="34" charset="0"/>
               </a:rPr>
               <a:t> </a:t>
             </a:r>
             <a:r>
-              <a:rPr lang="en-US" sz="1200" dirty="0" err="1">
+              <a:rPr lang="en-US" sz="1100" dirty="0" err="1">
+                <a:latin typeface="Arial" panose="020B0604020202020204" pitchFamily="34" charset="0"/>
+                <a:cs typeface="Arial" panose="020B0604020202020204" pitchFamily="34" charset="0"/>
+              </a:rPr>
+              <a:t>rango</a:t>
+            </a:r>
+            <a:r>
+              <a:rPr lang="en-US" sz="1100" dirty="0">
+                <a:latin typeface="Arial" panose="020B0604020202020204" pitchFamily="34" charset="0"/>
+                <a:cs typeface="Arial" panose="020B0604020202020204" pitchFamily="34" charset="0"/>
+              </a:rPr>
+              <a:t> de </a:t>
+            </a:r>
+            <a:r>
+              <a:rPr lang="en-US" sz="1100" dirty="0" err="1">
+                <a:latin typeface="Arial" panose="020B0604020202020204" pitchFamily="34" charset="0"/>
+                <a:cs typeface="Arial" panose="020B0604020202020204" pitchFamily="34" charset="0"/>
+              </a:rPr>
+              <a:t>anchos</a:t>
+            </a:r>
+            <a:r>
+              <a:rPr lang="en-US" sz="1100" dirty="0">
+                <a:latin typeface="Arial" panose="020B0604020202020204" pitchFamily="34" charset="0"/>
+                <a:cs typeface="Arial" panose="020B0604020202020204" pitchFamily="34" charset="0"/>
+              </a:rPr>
+              <a:t> de </a:t>
+            </a:r>
+            <a:r>
+              <a:rPr lang="en-US" sz="1100" dirty="0" err="1">
+                <a:latin typeface="Arial" panose="020B0604020202020204" pitchFamily="34" charset="0"/>
+                <a:cs typeface="Arial" panose="020B0604020202020204" pitchFamily="34" charset="0"/>
+              </a:rPr>
+              <a:t>guía</a:t>
+            </a:r>
+            <a:r>
+              <a:rPr lang="en-US" sz="1100" dirty="0">
+                <a:latin typeface="Arial" panose="020B0604020202020204" pitchFamily="34" charset="0"/>
+                <a:cs typeface="Arial" panose="020B0604020202020204" pitchFamily="34" charset="0"/>
+              </a:rPr>
+              <a:t> de </a:t>
+            </a:r>
+            <a:r>
+              <a:rPr lang="en-US" sz="1100" dirty="0" err="1">
+                <a:latin typeface="Arial" panose="020B0604020202020204" pitchFamily="34" charset="0"/>
+                <a:cs typeface="Arial" panose="020B0604020202020204" pitchFamily="34" charset="0"/>
+              </a:rPr>
+              <a:t>onda</a:t>
+            </a:r>
+            <a:r>
+              <a:rPr lang="en-US" sz="1100" dirty="0">
+                <a:latin typeface="Arial" panose="020B0604020202020204" pitchFamily="34" charset="0"/>
+                <a:cs typeface="Arial" panose="020B0604020202020204" pitchFamily="34" charset="0"/>
+              </a:rPr>
+              <a:t> son los </a:t>
+            </a:r>
+            <a:r>
+              <a:rPr lang="en-US" sz="1100" dirty="0" err="1">
+                <a:latin typeface="Arial" panose="020B0604020202020204" pitchFamily="34" charset="0"/>
+                <a:cs typeface="Arial" panose="020B0604020202020204" pitchFamily="34" charset="0"/>
+              </a:rPr>
+              <a:t>modos</a:t>
+            </a:r>
+            <a:r>
+              <a:rPr lang="en-US" sz="1100" dirty="0">
+                <a:latin typeface="Arial" panose="020B0604020202020204" pitchFamily="34" charset="0"/>
+                <a:cs typeface="Arial" panose="020B0604020202020204" pitchFamily="34" charset="0"/>
+              </a:rPr>
+              <a:t> 0 y 1, </a:t>
+            </a:r>
+            <a:r>
+              <a:rPr lang="en-US" sz="1100" dirty="0" err="1">
+                <a:latin typeface="Arial" panose="020B0604020202020204" pitchFamily="34" charset="0"/>
+                <a:cs typeface="Arial" panose="020B0604020202020204" pitchFamily="34" charset="0"/>
+              </a:rPr>
+              <a:t>mientras</a:t>
+            </a:r>
+            <a:r>
+              <a:rPr lang="en-US" sz="1100" dirty="0">
+                <a:latin typeface="Arial" panose="020B0604020202020204" pitchFamily="34" charset="0"/>
+                <a:cs typeface="Arial" panose="020B0604020202020204" pitchFamily="34" charset="0"/>
+              </a:rPr>
+              <a:t> que </a:t>
+            </a:r>
+            <a:r>
+              <a:rPr lang="en-US" sz="1100" dirty="0" err="1">
+                <a:latin typeface="Arial" panose="020B0604020202020204" pitchFamily="34" charset="0"/>
+                <a:cs typeface="Arial" panose="020B0604020202020204" pitchFamily="34" charset="0"/>
+              </a:rPr>
+              <a:t>el</a:t>
+            </a:r>
+            <a:r>
+              <a:rPr lang="en-US" sz="1100" dirty="0">
+                <a:latin typeface="Arial" panose="020B0604020202020204" pitchFamily="34" charset="0"/>
+                <a:cs typeface="Arial" panose="020B0604020202020204" pitchFamily="34" charset="0"/>
+              </a:rPr>
+              <a:t> modo 2 </a:t>
+            </a:r>
+            <a:r>
+              <a:rPr lang="en-US" sz="1100" dirty="0" err="1">
+                <a:latin typeface="Arial" panose="020B0604020202020204" pitchFamily="34" charset="0"/>
+                <a:cs typeface="Arial" panose="020B0604020202020204" pitchFamily="34" charset="0"/>
+              </a:rPr>
+              <a:t>empezará</a:t>
+            </a:r>
+            <a:r>
+              <a:rPr lang="en-US" sz="1100" dirty="0">
+                <a:latin typeface="Arial" panose="020B0604020202020204" pitchFamily="34" charset="0"/>
+                <a:cs typeface="Arial" panose="020B0604020202020204" pitchFamily="34" charset="0"/>
+              </a:rPr>
+              <a:t> a </a:t>
+            </a:r>
+            <a:r>
+              <a:rPr lang="en-US" sz="1100" dirty="0" err="1">
+                <a:latin typeface="Arial" panose="020B0604020202020204" pitchFamily="34" charset="0"/>
+                <a:cs typeface="Arial" panose="020B0604020202020204" pitchFamily="34" charset="0"/>
+              </a:rPr>
+              <a:t>propagarse</a:t>
+            </a:r>
+            <a:r>
+              <a:rPr lang="en-US" sz="1100" dirty="0">
+                <a:latin typeface="Arial" panose="020B0604020202020204" pitchFamily="34" charset="0"/>
+                <a:cs typeface="Arial" panose="020B0604020202020204" pitchFamily="34" charset="0"/>
+              </a:rPr>
+              <a:t> para </a:t>
+            </a:r>
+            <a:r>
+              <a:rPr lang="en-US" sz="1100" dirty="0" err="1">
+                <a:latin typeface="Arial" panose="020B0604020202020204" pitchFamily="34" charset="0"/>
+                <a:cs typeface="Arial" panose="020B0604020202020204" pitchFamily="34" charset="0"/>
+              </a:rPr>
+              <a:t>anchos</a:t>
+            </a:r>
+            <a:r>
+              <a:rPr lang="en-US" sz="1100" dirty="0">
+                <a:latin typeface="Arial" panose="020B0604020202020204" pitchFamily="34" charset="0"/>
+                <a:cs typeface="Arial" panose="020B0604020202020204" pitchFamily="34" charset="0"/>
+              </a:rPr>
+              <a:t> de </a:t>
+            </a:r>
+            <a:r>
+              <a:rPr lang="en-US" sz="1100" dirty="0" err="1">
+                <a:latin typeface="Arial" panose="020B0604020202020204" pitchFamily="34" charset="0"/>
+                <a:cs typeface="Arial" panose="020B0604020202020204" pitchFamily="34" charset="0"/>
+              </a:rPr>
+              <a:t>guía</a:t>
+            </a:r>
+            <a:r>
+              <a:rPr lang="en-US" sz="1100" dirty="0">
+                <a:latin typeface="Arial" panose="020B0604020202020204" pitchFamily="34" charset="0"/>
+                <a:cs typeface="Arial" panose="020B0604020202020204" pitchFamily="34" charset="0"/>
+              </a:rPr>
+              <a:t> </a:t>
+            </a:r>
+            <a:r>
+              <a:rPr lang="en-US" sz="1100" dirty="0" err="1">
+                <a:latin typeface="Arial" panose="020B0604020202020204" pitchFamily="34" charset="0"/>
+                <a:cs typeface="Arial" panose="020B0604020202020204" pitchFamily="34" charset="0"/>
+              </a:rPr>
+              <a:t>mayores</a:t>
+            </a:r>
+            <a:r>
+              <a:rPr lang="en-US" sz="1100" dirty="0">
+                <a:latin typeface="Arial" panose="020B0604020202020204" pitchFamily="34" charset="0"/>
+                <a:cs typeface="Arial" panose="020B0604020202020204" pitchFamily="34" charset="0"/>
+              </a:rPr>
+              <a:t> a 1.3 um. Por contra, </a:t>
+            </a:r>
+            <a:r>
+              <a:rPr lang="en-US" sz="1100" dirty="0" err="1">
+                <a:latin typeface="Arial" panose="020B0604020202020204" pitchFamily="34" charset="0"/>
+                <a:cs typeface="Arial" panose="020B0604020202020204" pitchFamily="34" charset="0"/>
+              </a:rPr>
+              <a:t>el</a:t>
+            </a:r>
+            <a:r>
+              <a:rPr lang="en-US" sz="1100" dirty="0">
+                <a:latin typeface="Arial" panose="020B0604020202020204" pitchFamily="34" charset="0"/>
+                <a:cs typeface="Arial" panose="020B0604020202020204" pitchFamily="34" charset="0"/>
+              </a:rPr>
+              <a:t> modo 3 no se </a:t>
+            </a:r>
+            <a:r>
+              <a:rPr lang="en-US" sz="1100" dirty="0" err="1">
+                <a:latin typeface="Arial" panose="020B0604020202020204" pitchFamily="34" charset="0"/>
+                <a:cs typeface="Arial" panose="020B0604020202020204" pitchFamily="34" charset="0"/>
+              </a:rPr>
+              <a:t>propagará</a:t>
+            </a:r>
+            <a:r>
+              <a:rPr lang="en-US" sz="1100" dirty="0">
+                <a:latin typeface="Arial" panose="020B0604020202020204" pitchFamily="34" charset="0"/>
+                <a:cs typeface="Arial" panose="020B0604020202020204" pitchFamily="34" charset="0"/>
+              </a:rPr>
+              <a:t> para </a:t>
+            </a:r>
+            <a:r>
+              <a:rPr lang="en-US" sz="1100" dirty="0" err="1">
+                <a:latin typeface="Arial" panose="020B0604020202020204" pitchFamily="34" charset="0"/>
+                <a:cs typeface="Arial" panose="020B0604020202020204" pitchFamily="34" charset="0"/>
+              </a:rPr>
+              <a:t>ningún</a:t>
+            </a:r>
+            <a:r>
+              <a:rPr lang="en-US" sz="1100" dirty="0">
+                <a:latin typeface="Arial" panose="020B0604020202020204" pitchFamily="34" charset="0"/>
+                <a:cs typeface="Arial" panose="020B0604020202020204" pitchFamily="34" charset="0"/>
+              </a:rPr>
+              <a:t> ancho dentro del </a:t>
+            </a:r>
+            <a:r>
+              <a:rPr lang="en-US" sz="1100" dirty="0" err="1">
+                <a:latin typeface="Arial" panose="020B0604020202020204" pitchFamily="34" charset="0"/>
+                <a:cs typeface="Arial" panose="020B0604020202020204" pitchFamily="34" charset="0"/>
+              </a:rPr>
+              <a:t>rango</a:t>
+            </a:r>
+            <a:r>
+              <a:rPr lang="en-US" sz="1100" dirty="0">
+                <a:latin typeface="Arial" panose="020B0604020202020204" pitchFamily="34" charset="0"/>
+                <a:cs typeface="Arial" panose="020B0604020202020204" pitchFamily="34" charset="0"/>
+              </a:rPr>
+              <a:t> </a:t>
+            </a:r>
+            <a:r>
+              <a:rPr lang="en-US" sz="1100" dirty="0" err="1">
+                <a:latin typeface="Arial" panose="020B0604020202020204" pitchFamily="34" charset="0"/>
+                <a:cs typeface="Arial" panose="020B0604020202020204" pitchFamily="34" charset="0"/>
+              </a:rPr>
+              <a:t>propuesto</a:t>
+            </a:r>
+            <a:r>
+              <a:rPr lang="en-US" sz="1100" dirty="0">
+                <a:latin typeface="Arial" panose="020B0604020202020204" pitchFamily="34" charset="0"/>
+                <a:cs typeface="Arial" panose="020B0604020202020204" pitchFamily="34" charset="0"/>
+              </a:rPr>
+              <a:t>, es </a:t>
+            </a:r>
+            <a:r>
+              <a:rPr lang="en-US" sz="1100" dirty="0" err="1">
+                <a:latin typeface="Arial" panose="020B0604020202020204" pitchFamily="34" charset="0"/>
+                <a:cs typeface="Arial" panose="020B0604020202020204" pitchFamily="34" charset="0"/>
+              </a:rPr>
+              <a:t>decir</a:t>
+            </a:r>
+            <a:r>
+              <a:rPr lang="en-US" sz="1100" dirty="0">
+                <a:latin typeface="Arial" panose="020B0604020202020204" pitchFamily="34" charset="0"/>
+                <a:cs typeface="Arial" panose="020B0604020202020204" pitchFamily="34" charset="0"/>
+              </a:rPr>
+              <a:t>, </a:t>
+            </a:r>
+            <a:r>
+              <a:rPr lang="en-US" sz="1100" dirty="0" err="1">
+                <a:latin typeface="Arial" panose="020B0604020202020204" pitchFamily="34" charset="0"/>
+                <a:cs typeface="Arial" panose="020B0604020202020204" pitchFamily="34" charset="0"/>
+              </a:rPr>
+              <a:t>este</a:t>
+            </a:r>
+            <a:r>
+              <a:rPr lang="en-US" sz="1100" dirty="0">
+                <a:latin typeface="Arial" panose="020B0604020202020204" pitchFamily="34" charset="0"/>
+                <a:cs typeface="Arial" panose="020B0604020202020204" pitchFamily="34" charset="0"/>
+              </a:rPr>
+              <a:t> modo </a:t>
+            </a:r>
+            <a:r>
+              <a:rPr lang="en-US" sz="1100" dirty="0" err="1">
+                <a:latin typeface="Arial" panose="020B0604020202020204" pitchFamily="34" charset="0"/>
+                <a:cs typeface="Arial" panose="020B0604020202020204" pitchFamily="34" charset="0"/>
+              </a:rPr>
+              <a:t>está</a:t>
+            </a:r>
+            <a:r>
+              <a:rPr lang="en-US" sz="1100" dirty="0">
+                <a:latin typeface="Arial" panose="020B0604020202020204" pitchFamily="34" charset="0"/>
+                <a:cs typeface="Arial" panose="020B0604020202020204" pitchFamily="34" charset="0"/>
+              </a:rPr>
+              <a:t> </a:t>
+            </a:r>
+            <a:r>
+              <a:rPr lang="en-US" sz="1100" dirty="0" err="1">
+                <a:latin typeface="Arial" panose="020B0604020202020204" pitchFamily="34" charset="0"/>
+                <a:cs typeface="Arial" panose="020B0604020202020204" pitchFamily="34" charset="0"/>
+              </a:rPr>
+              <a:t>en</a:t>
+            </a:r>
+            <a:r>
+              <a:rPr lang="en-US" sz="1100" dirty="0">
+                <a:latin typeface="Arial" panose="020B0604020202020204" pitchFamily="34" charset="0"/>
+                <a:cs typeface="Arial" panose="020B0604020202020204" pitchFamily="34" charset="0"/>
+              </a:rPr>
+              <a:t> corte.</a:t>
+            </a:r>
+          </a:p>
+          <a:p>
+            <a:pPr algn="just"/>
+            <a:endParaRPr lang="en-US" sz="1100" dirty="0">
+              <a:latin typeface="Arial" panose="020B0604020202020204" pitchFamily="34" charset="0"/>
+              <a:cs typeface="Arial" panose="020B0604020202020204" pitchFamily="34" charset="0"/>
+            </a:endParaRPr>
+          </a:p>
+          <a:p>
+            <a:pPr algn="just"/>
+            <a:r>
+              <a:rPr lang="en-US" sz="1100" dirty="0">
+                <a:latin typeface="Arial" panose="020B0604020202020204" pitchFamily="34" charset="0"/>
+                <a:cs typeface="Arial" panose="020B0604020202020204" pitchFamily="34" charset="0"/>
+              </a:rPr>
+              <a:t>También se </a:t>
+            </a:r>
+            <a:r>
+              <a:rPr lang="en-US" sz="1100" dirty="0" err="1">
+                <a:latin typeface="Arial" panose="020B0604020202020204" pitchFamily="34" charset="0"/>
+                <a:cs typeface="Arial" panose="020B0604020202020204" pitchFamily="34" charset="0"/>
+              </a:rPr>
+              <a:t>observa</a:t>
+            </a:r>
+            <a:r>
+              <a:rPr lang="en-US" sz="1100" dirty="0">
+                <a:latin typeface="Arial" panose="020B0604020202020204" pitchFamily="34" charset="0"/>
+                <a:cs typeface="Arial" panose="020B0604020202020204" pitchFamily="34" charset="0"/>
+              </a:rPr>
+              <a:t> que </a:t>
+            </a:r>
+            <a:r>
+              <a:rPr lang="en-US" sz="1100" dirty="0" err="1">
+                <a:latin typeface="Arial" panose="020B0604020202020204" pitchFamily="34" charset="0"/>
+                <a:cs typeface="Arial" panose="020B0604020202020204" pitchFamily="34" charset="0"/>
+              </a:rPr>
+              <a:t>el</a:t>
+            </a:r>
+            <a:r>
+              <a:rPr lang="en-US" sz="1100" dirty="0">
+                <a:latin typeface="Arial" panose="020B0604020202020204" pitchFamily="34" charset="0"/>
+                <a:cs typeface="Arial" panose="020B0604020202020204" pitchFamily="34" charset="0"/>
+              </a:rPr>
+              <a:t> </a:t>
+            </a:r>
+            <a:r>
+              <a:rPr lang="en-US" sz="1100" dirty="0" err="1">
                 <a:latin typeface="Arial" panose="020B0604020202020204" pitchFamily="34" charset="0"/>
                 <a:cs typeface="Arial" panose="020B0604020202020204" pitchFamily="34" charset="0"/>
               </a:rPr>
               <a:t>índice</a:t>
             </a:r>
             <a:r>
-              <a:rPr lang="en-US" sz="1200" dirty="0">
+              <a:rPr lang="en-US" sz="1100" dirty="0">
                 <a:latin typeface="Arial" panose="020B0604020202020204" pitchFamily="34" charset="0"/>
                 <a:cs typeface="Arial" panose="020B0604020202020204" pitchFamily="34" charset="0"/>
               </a:rPr>
               <a:t> </a:t>
             </a:r>
             <a:r>
-              <a:rPr lang="en-US" sz="1200" dirty="0" err="1">
+              <a:rPr lang="en-US" sz="1100" dirty="0" err="1">
                 <a:latin typeface="Arial" panose="020B0604020202020204" pitchFamily="34" charset="0"/>
                 <a:cs typeface="Arial" panose="020B0604020202020204" pitchFamily="34" charset="0"/>
               </a:rPr>
               <a:t>efectivo</a:t>
             </a:r>
             <a:r>
-              <a:rPr lang="en-US" sz="1200" dirty="0">
+              <a:rPr lang="en-US" sz="1100" dirty="0">
                 <a:latin typeface="Arial" panose="020B0604020202020204" pitchFamily="34" charset="0"/>
                 <a:cs typeface="Arial" panose="020B0604020202020204" pitchFamily="34" charset="0"/>
               </a:rPr>
               <a:t> </a:t>
             </a:r>
             <a:r>
-              <a:rPr lang="en-US" sz="1200" dirty="0" err="1">
-                <a:latin typeface="Arial" panose="020B0604020202020204" pitchFamily="34" charset="0"/>
-                <a:cs typeface="Arial" panose="020B0604020202020204" pitchFamily="34" charset="0"/>
-              </a:rPr>
-              <a:t>va</a:t>
-            </a:r>
-            <a:r>
-              <a:rPr lang="en-US" sz="1200" dirty="0">
+              <a:rPr lang="en-US" sz="1100" dirty="0" err="1">
+                <a:latin typeface="Arial" panose="020B0604020202020204" pitchFamily="34" charset="0"/>
+                <a:cs typeface="Arial" panose="020B0604020202020204" pitchFamily="34" charset="0"/>
+              </a:rPr>
+              <a:t>aumenta</a:t>
+            </a:r>
+            <a:r>
+              <a:rPr lang="en-US" sz="1100" dirty="0">
+                <a:latin typeface="Arial" panose="020B0604020202020204" pitchFamily="34" charset="0"/>
+                <a:cs typeface="Arial" panose="020B0604020202020204" pitchFamily="34" charset="0"/>
+              </a:rPr>
+              <a:t> a </a:t>
+            </a:r>
+            <a:r>
+              <a:rPr lang="en-US" sz="1100" dirty="0" err="1">
+                <a:latin typeface="Arial" panose="020B0604020202020204" pitchFamily="34" charset="0"/>
+                <a:cs typeface="Arial" panose="020B0604020202020204" pitchFamily="34" charset="0"/>
+              </a:rPr>
+              <a:t>medida</a:t>
+            </a:r>
+            <a:r>
+              <a:rPr lang="en-US" sz="1100" dirty="0">
+                <a:latin typeface="Arial" panose="020B0604020202020204" pitchFamily="34" charset="0"/>
+                <a:cs typeface="Arial" panose="020B0604020202020204" pitchFamily="34" charset="0"/>
+              </a:rPr>
+              <a:t> que </a:t>
+            </a:r>
+            <a:r>
+              <a:rPr lang="en-US" sz="1100" dirty="0" err="1">
+                <a:latin typeface="Arial" panose="020B0604020202020204" pitchFamily="34" charset="0"/>
+                <a:cs typeface="Arial" panose="020B0604020202020204" pitchFamily="34" charset="0"/>
+              </a:rPr>
+              <a:t>ensanchamos</a:t>
+            </a:r>
+            <a:r>
+              <a:rPr lang="en-US" sz="1100" dirty="0">
+                <a:latin typeface="Arial" panose="020B0604020202020204" pitchFamily="34" charset="0"/>
+                <a:cs typeface="Arial" panose="020B0604020202020204" pitchFamily="34" charset="0"/>
+              </a:rPr>
+              <a:t> la </a:t>
+            </a:r>
+            <a:r>
+              <a:rPr lang="en-US" sz="1100" dirty="0" err="1">
+                <a:latin typeface="Arial" panose="020B0604020202020204" pitchFamily="34" charset="0"/>
+                <a:cs typeface="Arial" panose="020B0604020202020204" pitchFamily="34" charset="0"/>
+              </a:rPr>
+              <a:t>guía</a:t>
+            </a:r>
+            <a:r>
+              <a:rPr lang="en-US" sz="1100" dirty="0">
+                <a:latin typeface="Arial" panose="020B0604020202020204" pitchFamily="34" charset="0"/>
+                <a:cs typeface="Arial" panose="020B0604020202020204" pitchFamily="34" charset="0"/>
+              </a:rPr>
+              <a:t> de </a:t>
+            </a:r>
+            <a:r>
+              <a:rPr lang="en-US" sz="1100" dirty="0" err="1">
+                <a:latin typeface="Arial" panose="020B0604020202020204" pitchFamily="34" charset="0"/>
+                <a:cs typeface="Arial" panose="020B0604020202020204" pitchFamily="34" charset="0"/>
+              </a:rPr>
+              <a:t>onda</a:t>
+            </a:r>
+            <a:r>
+              <a:rPr lang="en-US" sz="1100" dirty="0">
+                <a:latin typeface="Arial" panose="020B0604020202020204" pitchFamily="34" charset="0"/>
+                <a:cs typeface="Arial" panose="020B0604020202020204" pitchFamily="34" charset="0"/>
+              </a:rPr>
+              <a:t>. Esto es </a:t>
+            </a:r>
+            <a:r>
+              <a:rPr lang="en-US" sz="1100" dirty="0" err="1">
+                <a:latin typeface="Arial" panose="020B0604020202020204" pitchFamily="34" charset="0"/>
+                <a:cs typeface="Arial" panose="020B0604020202020204" pitchFamily="34" charset="0"/>
+              </a:rPr>
+              <a:t>debido</a:t>
+            </a:r>
+            <a:r>
+              <a:rPr lang="en-US" sz="1100" dirty="0">
+                <a:latin typeface="Arial" panose="020B0604020202020204" pitchFamily="34" charset="0"/>
+                <a:cs typeface="Arial" panose="020B0604020202020204" pitchFamily="34" charset="0"/>
+              </a:rPr>
+              <a:t> a que </a:t>
+            </a:r>
+            <a:r>
+              <a:rPr lang="en-US" sz="1100" dirty="0" err="1">
+                <a:latin typeface="Arial" panose="020B0604020202020204" pitchFamily="34" charset="0"/>
+                <a:cs typeface="Arial" panose="020B0604020202020204" pitchFamily="34" charset="0"/>
+              </a:rPr>
+              <a:t>el</a:t>
+            </a:r>
+            <a:r>
+              <a:rPr lang="en-US" sz="1100" dirty="0">
+                <a:latin typeface="Arial" panose="020B0604020202020204" pitchFamily="34" charset="0"/>
+                <a:cs typeface="Arial" panose="020B0604020202020204" pitchFamily="34" charset="0"/>
+              </a:rPr>
+              <a:t> modo </a:t>
+            </a:r>
+            <a:r>
+              <a:rPr lang="en-US" sz="1100" dirty="0" err="1">
+                <a:latin typeface="Arial" panose="020B0604020202020204" pitchFamily="34" charset="0"/>
+                <a:cs typeface="Arial" panose="020B0604020202020204" pitchFamily="34" charset="0"/>
+              </a:rPr>
+              <a:t>óptico</a:t>
+            </a:r>
+            <a:r>
+              <a:rPr lang="en-US" sz="1100" dirty="0">
                 <a:latin typeface="Arial" panose="020B0604020202020204" pitchFamily="34" charset="0"/>
                 <a:cs typeface="Arial" panose="020B0604020202020204" pitchFamily="34" charset="0"/>
               </a:rPr>
               <a:t> </a:t>
             </a:r>
             <a:r>
-              <a:rPr lang="en-US" sz="1200" dirty="0" err="1">
-                <a:latin typeface="Arial" panose="020B0604020202020204" pitchFamily="34" charset="0"/>
-                <a:cs typeface="Arial" panose="020B0604020202020204" pitchFamily="34" charset="0"/>
-              </a:rPr>
-              <a:t>aumentando</a:t>
-            </a:r>
-            <a:r>
-              <a:rPr lang="en-US" sz="1200" dirty="0">
-                <a:latin typeface="Arial" panose="020B0604020202020204" pitchFamily="34" charset="0"/>
-                <a:cs typeface="Arial" panose="020B0604020202020204" pitchFamily="34" charset="0"/>
-              </a:rPr>
-              <a:t> a </a:t>
-            </a:r>
-            <a:r>
-              <a:rPr lang="en-US" sz="1200" dirty="0" err="1">
-                <a:latin typeface="Arial" panose="020B0604020202020204" pitchFamily="34" charset="0"/>
-                <a:cs typeface="Arial" panose="020B0604020202020204" pitchFamily="34" charset="0"/>
-              </a:rPr>
-              <a:t>medida</a:t>
-            </a:r>
-            <a:r>
-              <a:rPr lang="en-US" sz="1200" dirty="0">
-                <a:latin typeface="Arial" panose="020B0604020202020204" pitchFamily="34" charset="0"/>
-                <a:cs typeface="Arial" panose="020B0604020202020204" pitchFamily="34" charset="0"/>
-              </a:rPr>
-              <a:t> que </a:t>
-            </a:r>
-            <a:r>
-              <a:rPr lang="en-US" sz="1200" dirty="0" err="1">
-                <a:latin typeface="Arial" panose="020B0604020202020204" pitchFamily="34" charset="0"/>
-                <a:cs typeface="Arial" panose="020B0604020202020204" pitchFamily="34" charset="0"/>
-              </a:rPr>
-              <a:t>aumenta</a:t>
-            </a:r>
-            <a:r>
-              <a:rPr lang="en-US" sz="1200" dirty="0">
+              <a:rPr lang="en-US" sz="1100" dirty="0" err="1">
+                <a:latin typeface="Arial" panose="020B0604020202020204" pitchFamily="34" charset="0"/>
+                <a:cs typeface="Arial" panose="020B0604020202020204" pitchFamily="34" charset="0"/>
+              </a:rPr>
+              <a:t>queda</a:t>
+            </a:r>
+            <a:r>
+              <a:rPr lang="en-US" sz="1100" dirty="0">
                 <a:latin typeface="Arial" panose="020B0604020202020204" pitchFamily="34" charset="0"/>
                 <a:cs typeface="Arial" panose="020B0604020202020204" pitchFamily="34" charset="0"/>
               </a:rPr>
               <a:t> </a:t>
             </a:r>
             <a:r>
-              <a:rPr lang="en-US" sz="1200" dirty="0" err="1">
+              <a:rPr lang="en-US" sz="1100" dirty="0" err="1">
+                <a:latin typeface="Arial" panose="020B0604020202020204" pitchFamily="34" charset="0"/>
+                <a:cs typeface="Arial" panose="020B0604020202020204" pitchFamily="34" charset="0"/>
+              </a:rPr>
+              <a:t>mejor</a:t>
+            </a:r>
+            <a:r>
+              <a:rPr lang="en-US" sz="1100" dirty="0">
+                <a:latin typeface="Arial" panose="020B0604020202020204" pitchFamily="34" charset="0"/>
+                <a:cs typeface="Arial" panose="020B0604020202020204" pitchFamily="34" charset="0"/>
+              </a:rPr>
+              <a:t> </a:t>
+            </a:r>
+            <a:r>
+              <a:rPr lang="en-US" sz="1100" dirty="0" err="1">
+                <a:latin typeface="Arial" panose="020B0604020202020204" pitchFamily="34" charset="0"/>
+                <a:cs typeface="Arial" panose="020B0604020202020204" pitchFamily="34" charset="0"/>
+              </a:rPr>
+              <a:t>confinado</a:t>
+            </a:r>
+            <a:r>
+              <a:rPr lang="en-US" sz="1100" dirty="0">
+                <a:latin typeface="Arial" panose="020B0604020202020204" pitchFamily="34" charset="0"/>
+                <a:cs typeface="Arial" panose="020B0604020202020204" pitchFamily="34" charset="0"/>
+              </a:rPr>
+              <a:t>, y al </a:t>
+            </a:r>
+            <a:r>
+              <a:rPr lang="en-US" sz="1100" dirty="0" err="1">
+                <a:latin typeface="Arial" panose="020B0604020202020204" pitchFamily="34" charset="0"/>
+                <a:cs typeface="Arial" panose="020B0604020202020204" pitchFamily="34" charset="0"/>
+              </a:rPr>
+              <a:t>viajar</a:t>
+            </a:r>
+            <a:r>
+              <a:rPr lang="en-US" sz="1100" dirty="0">
+                <a:latin typeface="Arial" panose="020B0604020202020204" pitchFamily="34" charset="0"/>
+                <a:cs typeface="Arial" panose="020B0604020202020204" pitchFamily="34" charset="0"/>
+              </a:rPr>
+              <a:t> </a:t>
+            </a:r>
+            <a:r>
+              <a:rPr lang="en-US" sz="1100" dirty="0" err="1">
+                <a:latin typeface="Arial" panose="020B0604020202020204" pitchFamily="34" charset="0"/>
+                <a:cs typeface="Arial" panose="020B0604020202020204" pitchFamily="34" charset="0"/>
+              </a:rPr>
+              <a:t>una</a:t>
+            </a:r>
+            <a:r>
+              <a:rPr lang="en-US" sz="1100" dirty="0">
+                <a:latin typeface="Arial" panose="020B0604020202020204" pitchFamily="34" charset="0"/>
+                <a:cs typeface="Arial" panose="020B0604020202020204" pitchFamily="34" charset="0"/>
+              </a:rPr>
+              <a:t> mayor </a:t>
+            </a:r>
+            <a:r>
+              <a:rPr lang="en-US" sz="1100" dirty="0" err="1">
+                <a:latin typeface="Arial" panose="020B0604020202020204" pitchFamily="34" charset="0"/>
+                <a:cs typeface="Arial" panose="020B0604020202020204" pitchFamily="34" charset="0"/>
+              </a:rPr>
+              <a:t>fracción</a:t>
+            </a:r>
+            <a:r>
+              <a:rPr lang="en-US" sz="1100" dirty="0">
+                <a:latin typeface="Arial" panose="020B0604020202020204" pitchFamily="34" charset="0"/>
+                <a:cs typeface="Arial" panose="020B0604020202020204" pitchFamily="34" charset="0"/>
+              </a:rPr>
+              <a:t> de luz </a:t>
+            </a:r>
+            <a:r>
+              <a:rPr lang="en-US" sz="1100" dirty="0" err="1">
+                <a:latin typeface="Arial" panose="020B0604020202020204" pitchFamily="34" charset="0"/>
+                <a:cs typeface="Arial" panose="020B0604020202020204" pitchFamily="34" charset="0"/>
+              </a:rPr>
+              <a:t>por</a:t>
+            </a:r>
+            <a:r>
+              <a:rPr lang="en-US" sz="1100" dirty="0">
+                <a:latin typeface="Arial" panose="020B0604020202020204" pitchFamily="34" charset="0"/>
+                <a:cs typeface="Arial" panose="020B0604020202020204" pitchFamily="34" charset="0"/>
+              </a:rPr>
+              <a:t> </a:t>
+            </a:r>
+            <a:r>
+              <a:rPr lang="en-US" sz="1100" dirty="0" err="1">
                 <a:latin typeface="Arial" panose="020B0604020202020204" pitchFamily="34" charset="0"/>
                 <a:cs typeface="Arial" panose="020B0604020202020204" pitchFamily="34" charset="0"/>
               </a:rPr>
               <a:t>el</a:t>
             </a:r>
             <a:r>
-              <a:rPr lang="en-US" sz="1200" dirty="0">
-                <a:latin typeface="Arial" panose="020B0604020202020204" pitchFamily="34" charset="0"/>
-                <a:cs typeface="Arial" panose="020B0604020202020204" pitchFamily="34" charset="0"/>
-              </a:rPr>
-              <a:t> ancho de la </a:t>
-            </a:r>
-            <a:r>
-              <a:rPr lang="en-US" sz="1200" dirty="0" err="1">
+              <a:rPr lang="en-US" sz="1100" dirty="0">
+                <a:latin typeface="Arial" panose="020B0604020202020204" pitchFamily="34" charset="0"/>
+                <a:cs typeface="Arial" panose="020B0604020202020204" pitchFamily="34" charset="0"/>
+              </a:rPr>
+              <a:t> </a:t>
+            </a:r>
+            <a:r>
+              <a:rPr lang="en-US" sz="1100" dirty="0" err="1">
+                <a:latin typeface="Arial" panose="020B0604020202020204" pitchFamily="34" charset="0"/>
+                <a:cs typeface="Arial" panose="020B0604020202020204" pitchFamily="34" charset="0"/>
+              </a:rPr>
+              <a:t>núcleo</a:t>
+            </a:r>
+            <a:r>
+              <a:rPr lang="en-US" sz="1100" dirty="0">
+                <a:latin typeface="Arial" panose="020B0604020202020204" pitchFamily="34" charset="0"/>
+                <a:cs typeface="Arial" panose="020B0604020202020204" pitchFamily="34" charset="0"/>
+              </a:rPr>
+              <a:t> (</a:t>
+            </a:r>
+            <a:r>
+              <a:rPr lang="en-US" sz="1100" dirty="0" err="1">
+                <a:latin typeface="Arial" panose="020B0604020202020204" pitchFamily="34" charset="0"/>
+                <a:cs typeface="Arial" panose="020B0604020202020204" pitchFamily="34" charset="0"/>
+              </a:rPr>
+              <a:t>cuyo</a:t>
+            </a:r>
+            <a:r>
+              <a:rPr lang="en-US" sz="1100" dirty="0">
+                <a:latin typeface="Arial" panose="020B0604020202020204" pitchFamily="34" charset="0"/>
+                <a:cs typeface="Arial" panose="020B0604020202020204" pitchFamily="34" charset="0"/>
+              </a:rPr>
+              <a:t> </a:t>
+            </a:r>
+            <a:r>
+              <a:rPr lang="en-US" sz="1100" dirty="0" err="1">
+                <a:latin typeface="Arial" panose="020B0604020202020204" pitchFamily="34" charset="0"/>
+                <a:cs typeface="Arial" panose="020B0604020202020204" pitchFamily="34" charset="0"/>
+              </a:rPr>
+              <a:t>índice</a:t>
+            </a:r>
+            <a:r>
+              <a:rPr lang="en-US" sz="1100" dirty="0">
+                <a:latin typeface="Arial" panose="020B0604020202020204" pitchFamily="34" charset="0"/>
+                <a:cs typeface="Arial" panose="020B0604020202020204" pitchFamily="34" charset="0"/>
+              </a:rPr>
+              <a:t> de </a:t>
+            </a:r>
+            <a:r>
+              <a:rPr lang="en-US" sz="1100" dirty="0" err="1">
+                <a:latin typeface="Arial" panose="020B0604020202020204" pitchFamily="34" charset="0"/>
+                <a:cs typeface="Arial" panose="020B0604020202020204" pitchFamily="34" charset="0"/>
+              </a:rPr>
+              <a:t>refracción</a:t>
+            </a:r>
+            <a:r>
+              <a:rPr lang="en-US" sz="1100" dirty="0">
+                <a:latin typeface="Arial" panose="020B0604020202020204" pitchFamily="34" charset="0"/>
+                <a:cs typeface="Arial" panose="020B0604020202020204" pitchFamily="34" charset="0"/>
+              </a:rPr>
+              <a:t> es </a:t>
+            </a:r>
+            <a:r>
+              <a:rPr lang="en-US" sz="1100" dirty="0" err="1">
+                <a:latin typeface="Arial" panose="020B0604020202020204" pitchFamily="34" charset="0"/>
+                <a:cs typeface="Arial" panose="020B0604020202020204" pitchFamily="34" charset="0"/>
+              </a:rPr>
+              <a:t>más</a:t>
+            </a:r>
+            <a:r>
+              <a:rPr lang="en-US" sz="1100" dirty="0">
+                <a:latin typeface="Arial" panose="020B0604020202020204" pitchFamily="34" charset="0"/>
+                <a:cs typeface="Arial" panose="020B0604020202020204" pitchFamily="34" charset="0"/>
+              </a:rPr>
+              <a:t> alto), </a:t>
+            </a:r>
+            <a:r>
+              <a:rPr lang="en-US" sz="1100" dirty="0" err="1">
+                <a:latin typeface="Arial" panose="020B0604020202020204" pitchFamily="34" charset="0"/>
+                <a:cs typeface="Arial" panose="020B0604020202020204" pitchFamily="34" charset="0"/>
+              </a:rPr>
+              <a:t>el</a:t>
+            </a:r>
+            <a:r>
+              <a:rPr lang="en-US" sz="1100" dirty="0">
+                <a:latin typeface="Arial" panose="020B0604020202020204" pitchFamily="34" charset="0"/>
+                <a:cs typeface="Arial" panose="020B0604020202020204" pitchFamily="34" charset="0"/>
+              </a:rPr>
+              <a:t> </a:t>
+            </a:r>
+            <a:r>
+              <a:rPr lang="en-US" sz="1100" dirty="0" err="1">
+                <a:latin typeface="Arial" panose="020B0604020202020204" pitchFamily="34" charset="0"/>
+                <a:cs typeface="Arial" panose="020B0604020202020204" pitchFamily="34" charset="0"/>
+              </a:rPr>
+              <a:t>índice</a:t>
+            </a:r>
+            <a:r>
+              <a:rPr lang="en-US" sz="1100" dirty="0">
+                <a:latin typeface="Arial" panose="020B0604020202020204" pitchFamily="34" charset="0"/>
+                <a:cs typeface="Arial" panose="020B0604020202020204" pitchFamily="34" charset="0"/>
+              </a:rPr>
+              <a:t> </a:t>
+            </a:r>
+            <a:r>
+              <a:rPr lang="en-US" sz="1100" dirty="0" err="1">
+                <a:latin typeface="Arial" panose="020B0604020202020204" pitchFamily="34" charset="0"/>
+                <a:cs typeface="Arial" panose="020B0604020202020204" pitchFamily="34" charset="0"/>
+              </a:rPr>
+              <a:t>efectivo</a:t>
+            </a:r>
+            <a:r>
+              <a:rPr lang="en-US" sz="1100" dirty="0">
+                <a:latin typeface="Arial" panose="020B0604020202020204" pitchFamily="34" charset="0"/>
+                <a:cs typeface="Arial" panose="020B0604020202020204" pitchFamily="34" charset="0"/>
+              </a:rPr>
+              <a:t> global del modo se </a:t>
+            </a:r>
+            <a:r>
+              <a:rPr lang="en-US" sz="1100" dirty="0" err="1">
+                <a:latin typeface="Arial" panose="020B0604020202020204" pitchFamily="34" charset="0"/>
+                <a:cs typeface="Arial" panose="020B0604020202020204" pitchFamily="34" charset="0"/>
+              </a:rPr>
+              <a:t>incrementa</a:t>
+            </a:r>
+            <a:r>
+              <a:rPr lang="en-US" sz="1100" dirty="0">
+                <a:latin typeface="Arial" panose="020B0604020202020204" pitchFamily="34" charset="0"/>
+                <a:cs typeface="Arial" panose="020B0604020202020204" pitchFamily="34" charset="0"/>
+              </a:rPr>
+              <a:t>. </a:t>
+            </a:r>
+          </a:p>
+          <a:p>
+            <a:pPr algn="just"/>
+            <a:r>
+              <a:rPr lang="en-US" sz="1100" dirty="0" err="1">
+                <a:latin typeface="Arial" panose="020B0604020202020204" pitchFamily="34" charset="0"/>
+                <a:cs typeface="Arial" panose="020B0604020202020204" pitchFamily="34" charset="0"/>
+              </a:rPr>
+              <a:t>Además</a:t>
+            </a:r>
+            <a:r>
+              <a:rPr lang="en-US" sz="1100" dirty="0">
+                <a:latin typeface="Arial" panose="020B0604020202020204" pitchFamily="34" charset="0"/>
+                <a:cs typeface="Arial" panose="020B0604020202020204" pitchFamily="34" charset="0"/>
+              </a:rPr>
+              <a:t>, con </a:t>
+            </a:r>
+            <a:r>
+              <a:rPr lang="en-US" sz="1100" dirty="0" err="1">
+                <a:latin typeface="Arial" panose="020B0604020202020204" pitchFamily="34" charset="0"/>
+                <a:cs typeface="Arial" panose="020B0604020202020204" pitchFamily="34" charset="0"/>
+              </a:rPr>
+              <a:t>el</a:t>
+            </a:r>
+            <a:r>
+              <a:rPr lang="en-US" sz="1100" dirty="0">
+                <a:latin typeface="Arial" panose="020B0604020202020204" pitchFamily="34" charset="0"/>
+                <a:cs typeface="Arial" panose="020B0604020202020204" pitchFamily="34" charset="0"/>
+              </a:rPr>
+              <a:t> </a:t>
+            </a:r>
+            <a:r>
+              <a:rPr lang="en-US" sz="1100" dirty="0" err="1">
+                <a:latin typeface="Arial" panose="020B0604020202020204" pitchFamily="34" charset="0"/>
+                <a:cs typeface="Arial" panose="020B0604020202020204" pitchFamily="34" charset="0"/>
+              </a:rPr>
+              <a:t>aumento</a:t>
+            </a:r>
+            <a:r>
+              <a:rPr lang="en-US" sz="1100" dirty="0">
+                <a:latin typeface="Arial" panose="020B0604020202020204" pitchFamily="34" charset="0"/>
+                <a:cs typeface="Arial" panose="020B0604020202020204" pitchFamily="34" charset="0"/>
+              </a:rPr>
+              <a:t> del ancho de la </a:t>
+            </a:r>
+            <a:r>
+              <a:rPr lang="en-US" sz="1100" dirty="0" err="1">
                 <a:latin typeface="Arial" panose="020B0604020202020204" pitchFamily="34" charset="0"/>
                 <a:cs typeface="Arial" panose="020B0604020202020204" pitchFamily="34" charset="0"/>
               </a:rPr>
               <a:t>guía</a:t>
             </a:r>
             <a:r>
-              <a:rPr lang="en-US" sz="1200" dirty="0">
-                <a:latin typeface="Arial" panose="020B0604020202020204" pitchFamily="34" charset="0"/>
-                <a:cs typeface="Arial" panose="020B0604020202020204" pitchFamily="34" charset="0"/>
-              </a:rPr>
-              <a:t> de </a:t>
-            </a:r>
-            <a:r>
-              <a:rPr lang="en-US" sz="1200" dirty="0" err="1">
-                <a:latin typeface="Arial" panose="020B0604020202020204" pitchFamily="34" charset="0"/>
-                <a:cs typeface="Arial" panose="020B0604020202020204" pitchFamily="34" charset="0"/>
-              </a:rPr>
-              <a:t>onda</a:t>
-            </a:r>
-            <a:r>
-              <a:rPr lang="en-US" sz="1200" dirty="0">
-                <a:latin typeface="Arial" panose="020B0604020202020204" pitchFamily="34" charset="0"/>
-                <a:cs typeface="Arial" panose="020B0604020202020204" pitchFamily="34" charset="0"/>
-              </a:rPr>
-              <a:t>, </a:t>
-            </a:r>
-            <a:r>
-              <a:rPr lang="en-US" sz="1200" dirty="0" err="1">
-                <a:latin typeface="Arial" panose="020B0604020202020204" pitchFamily="34" charset="0"/>
-                <a:cs typeface="Arial" panose="020B0604020202020204" pitchFamily="34" charset="0"/>
-              </a:rPr>
-              <a:t>esto</a:t>
-            </a:r>
-            <a:r>
-              <a:rPr lang="en-US" sz="1200" dirty="0">
-                <a:latin typeface="Arial" panose="020B0604020202020204" pitchFamily="34" charset="0"/>
-                <a:cs typeface="Arial" panose="020B0604020202020204" pitchFamily="34" charset="0"/>
-              </a:rPr>
-              <a:t> es </a:t>
-            </a:r>
-            <a:r>
-              <a:rPr lang="en-US" sz="1200" dirty="0" err="1">
-                <a:latin typeface="Arial" panose="020B0604020202020204" pitchFamily="34" charset="0"/>
-                <a:cs typeface="Arial" panose="020B0604020202020204" pitchFamily="34" charset="0"/>
-              </a:rPr>
-              <a:t>debido</a:t>
-            </a:r>
-            <a:r>
-              <a:rPr lang="en-US" sz="1200" dirty="0">
-                <a:latin typeface="Arial" panose="020B0604020202020204" pitchFamily="34" charset="0"/>
-                <a:cs typeface="Arial" panose="020B0604020202020204" pitchFamily="34" charset="0"/>
-              </a:rPr>
-              <a:t> a que </a:t>
-            </a:r>
-            <a:r>
-              <a:rPr lang="en-US" sz="1200" dirty="0" err="1">
-                <a:latin typeface="Arial" panose="020B0604020202020204" pitchFamily="34" charset="0"/>
-                <a:cs typeface="Arial" panose="020B0604020202020204" pitchFamily="34" charset="0"/>
-              </a:rPr>
-              <a:t>el</a:t>
-            </a:r>
-            <a:r>
-              <a:rPr lang="en-US" sz="1200" dirty="0">
-                <a:latin typeface="Arial" panose="020B0604020202020204" pitchFamily="34" charset="0"/>
-                <a:cs typeface="Arial" panose="020B0604020202020204" pitchFamily="34" charset="0"/>
-              </a:rPr>
-              <a:t> modo </a:t>
-            </a:r>
-            <a:r>
-              <a:rPr lang="en-US" sz="1200" dirty="0" err="1">
-                <a:latin typeface="Arial" panose="020B0604020202020204" pitchFamily="34" charset="0"/>
-                <a:cs typeface="Arial" panose="020B0604020202020204" pitchFamily="34" charset="0"/>
-              </a:rPr>
-              <a:t>está</a:t>
-            </a:r>
-            <a:r>
-              <a:rPr lang="en-US" sz="1200" dirty="0">
+              <a:rPr lang="en-US" sz="1100" dirty="0">
+                <a:latin typeface="Arial" panose="020B0604020202020204" pitchFamily="34" charset="0"/>
+                <a:cs typeface="Arial" panose="020B0604020202020204" pitchFamily="34" charset="0"/>
+              </a:rPr>
+              <a:t> también hay un </a:t>
+            </a:r>
+            <a:r>
+              <a:rPr lang="en-US" sz="1100" dirty="0" err="1">
+                <a:latin typeface="Arial" panose="020B0604020202020204" pitchFamily="34" charset="0"/>
+                <a:cs typeface="Arial" panose="020B0604020202020204" pitchFamily="34" charset="0"/>
+              </a:rPr>
+              <a:t>aumento</a:t>
+            </a:r>
+            <a:r>
+              <a:rPr lang="en-US" sz="1100" dirty="0">
+                <a:latin typeface="Arial" panose="020B0604020202020204" pitchFamily="34" charset="0"/>
+                <a:cs typeface="Arial" panose="020B0604020202020204" pitchFamily="34" charset="0"/>
+              </a:rPr>
+              <a:t> de los </a:t>
+            </a:r>
+            <a:r>
+              <a:rPr lang="en-US" sz="1100" dirty="0" err="1">
+                <a:latin typeface="Arial" panose="020B0604020202020204" pitchFamily="34" charset="0"/>
+                <a:cs typeface="Arial" panose="020B0604020202020204" pitchFamily="34" charset="0"/>
+              </a:rPr>
+              <a:t>modos</a:t>
+            </a:r>
+            <a:r>
+              <a:rPr lang="en-US" sz="1100" dirty="0">
                 <a:latin typeface="Arial" panose="020B0604020202020204" pitchFamily="34" charset="0"/>
                 <a:cs typeface="Arial" panose="020B0604020202020204" pitchFamily="34" charset="0"/>
               </a:rPr>
               <a:t> </a:t>
             </a:r>
             <a:r>
-              <a:rPr lang="en-US" sz="1200" dirty="0" err="1">
+              <a:rPr lang="en-US" sz="1100" dirty="0" err="1">
+                <a:latin typeface="Arial" panose="020B0604020202020204" pitchFamily="34" charset="0"/>
+                <a:cs typeface="Arial" panose="020B0604020202020204" pitchFamily="34" charset="0"/>
+              </a:rPr>
+              <a:t>propagados</a:t>
+            </a:r>
+            <a:r>
+              <a:rPr lang="en-US" sz="1100" dirty="0">
+                <a:latin typeface="Arial" panose="020B0604020202020204" pitchFamily="34" charset="0"/>
+                <a:cs typeface="Arial" panose="020B0604020202020204" pitchFamily="34" charset="0"/>
+              </a:rPr>
+              <a:t> </a:t>
+            </a:r>
+            <a:r>
+              <a:rPr lang="en-US" sz="1100" dirty="0" err="1">
+                <a:latin typeface="Arial" panose="020B0604020202020204" pitchFamily="34" charset="0"/>
+                <a:cs typeface="Arial" panose="020B0604020202020204" pitchFamily="34" charset="0"/>
+              </a:rPr>
+              <a:t>ya</a:t>
+            </a:r>
+            <a:r>
+              <a:rPr lang="en-US" sz="1100" dirty="0">
+                <a:latin typeface="Arial" panose="020B0604020202020204" pitchFamily="34" charset="0"/>
+                <a:cs typeface="Arial" panose="020B0604020202020204" pitchFamily="34" charset="0"/>
+              </a:rPr>
+              <a:t> que la luz </a:t>
+            </a:r>
+            <a:r>
+              <a:rPr lang="en-US" sz="1100" dirty="0" err="1">
+                <a:latin typeface="Arial" panose="020B0604020202020204" pitchFamily="34" charset="0"/>
+                <a:cs typeface="Arial" panose="020B0604020202020204" pitchFamily="34" charset="0"/>
+              </a:rPr>
+              <a:t>tiene</a:t>
+            </a:r>
+            <a:r>
+              <a:rPr lang="en-US" sz="1100" dirty="0">
+                <a:latin typeface="Arial" panose="020B0604020202020204" pitchFamily="34" charset="0"/>
+                <a:cs typeface="Arial" panose="020B0604020202020204" pitchFamily="34" charset="0"/>
+              </a:rPr>
+              <a:t> </a:t>
+            </a:r>
+            <a:r>
+              <a:rPr lang="en-US" sz="1100" dirty="0" err="1">
                 <a:latin typeface="Arial" panose="020B0604020202020204" pitchFamily="34" charset="0"/>
                 <a:cs typeface="Arial" panose="020B0604020202020204" pitchFamily="34" charset="0"/>
               </a:rPr>
               <a:t>más</a:t>
             </a:r>
             <a:r>
-              <a:rPr lang="en-US" sz="1200" dirty="0">
+              <a:rPr lang="en-US" sz="1100" dirty="0">
                 <a:latin typeface="Arial" panose="020B0604020202020204" pitchFamily="34" charset="0"/>
                 <a:cs typeface="Arial" panose="020B0604020202020204" pitchFamily="34" charset="0"/>
               </a:rPr>
               <a:t> </a:t>
             </a:r>
             <a:r>
-              <a:rPr lang="en-US" sz="1200" dirty="0" err="1">
-                <a:latin typeface="Arial" panose="020B0604020202020204" pitchFamily="34" charset="0"/>
-                <a:cs typeface="Arial" panose="020B0604020202020204" pitchFamily="34" charset="0"/>
-              </a:rPr>
-              <a:t>confinado</a:t>
-            </a:r>
-            <a:r>
-              <a:rPr lang="en-US" sz="1200" dirty="0">
+              <a:rPr lang="en-US" sz="1100" dirty="0" err="1">
+                <a:latin typeface="Arial" panose="020B0604020202020204" pitchFamily="34" charset="0"/>
+                <a:cs typeface="Arial" panose="020B0604020202020204" pitchFamily="34" charset="0"/>
+              </a:rPr>
+              <a:t>espacio</a:t>
+            </a:r>
+            <a:r>
+              <a:rPr lang="en-US" sz="1100" dirty="0">
+                <a:latin typeface="Arial" panose="020B0604020202020204" pitchFamily="34" charset="0"/>
+                <a:cs typeface="Arial" panose="020B0604020202020204" pitchFamily="34" charset="0"/>
+              </a:rPr>
+              <a:t> para </a:t>
+            </a:r>
+            <a:r>
+              <a:rPr lang="en-US" sz="1100" dirty="0" err="1">
+                <a:latin typeface="Arial" panose="020B0604020202020204" pitchFamily="34" charset="0"/>
+                <a:cs typeface="Arial" panose="020B0604020202020204" pitchFamily="34" charset="0"/>
+              </a:rPr>
+              <a:t>poder</a:t>
+            </a:r>
+            <a:r>
+              <a:rPr lang="en-US" sz="1100" dirty="0">
                 <a:latin typeface="Arial" panose="020B0604020202020204" pitchFamily="34" charset="0"/>
                 <a:cs typeface="Arial" panose="020B0604020202020204" pitchFamily="34" charset="0"/>
               </a:rPr>
               <a:t> </a:t>
             </a:r>
             <a:r>
-              <a:rPr lang="en-US" sz="1200" dirty="0" err="1">
-                <a:latin typeface="Arial" panose="020B0604020202020204" pitchFamily="34" charset="0"/>
-                <a:cs typeface="Arial" panose="020B0604020202020204" pitchFamily="34" charset="0"/>
-              </a:rPr>
-              <a:t>en</a:t>
-            </a:r>
-            <a:r>
-              <a:rPr lang="en-US" sz="1200" dirty="0">
+              <a:rPr lang="en-US" sz="1100" dirty="0" err="1">
+                <a:latin typeface="Arial" panose="020B0604020202020204" pitchFamily="34" charset="0"/>
+                <a:cs typeface="Arial" panose="020B0604020202020204" pitchFamily="34" charset="0"/>
+              </a:rPr>
+              <a:t>albergar</a:t>
+            </a:r>
+            <a:r>
+              <a:rPr lang="en-US" sz="1100" dirty="0">
                 <a:latin typeface="Arial" panose="020B0604020202020204" pitchFamily="34" charset="0"/>
                 <a:cs typeface="Arial" panose="020B0604020202020204" pitchFamily="34" charset="0"/>
               </a:rPr>
               <a:t> </a:t>
             </a:r>
             <a:r>
-              <a:rPr lang="en-US" sz="1200" dirty="0" err="1">
-                <a:latin typeface="Arial" panose="020B0604020202020204" pitchFamily="34" charset="0"/>
-                <a:cs typeface="Arial" panose="020B0604020202020204" pitchFamily="34" charset="0"/>
-              </a:rPr>
-              <a:t>el</a:t>
-            </a:r>
-            <a:r>
-              <a:rPr lang="en-US" sz="1200" dirty="0">
+              <a:rPr lang="en-US" sz="1100" dirty="0" err="1">
+                <a:latin typeface="Arial" panose="020B0604020202020204" pitchFamily="34" charset="0"/>
+                <a:cs typeface="Arial" panose="020B0604020202020204" pitchFamily="34" charset="0"/>
+              </a:rPr>
+              <a:t>mayores</a:t>
+            </a:r>
+            <a:r>
+              <a:rPr lang="en-US" sz="1100" dirty="0">
                 <a:latin typeface="Arial" panose="020B0604020202020204" pitchFamily="34" charset="0"/>
                 <a:cs typeface="Arial" panose="020B0604020202020204" pitchFamily="34" charset="0"/>
               </a:rPr>
               <a:t> </a:t>
             </a:r>
             <a:r>
-              <a:rPr lang="en-US" sz="1200" dirty="0" err="1">
-                <a:latin typeface="Arial" panose="020B0604020202020204" pitchFamily="34" charset="0"/>
-                <a:cs typeface="Arial" panose="020B0604020202020204" pitchFamily="34" charset="0"/>
-              </a:rPr>
-              <a:t>núcleo</a:t>
-            </a:r>
-            <a:r>
-              <a:rPr lang="en-US" sz="1200" dirty="0">
-                <a:latin typeface="Arial" panose="020B0604020202020204" pitchFamily="34" charset="0"/>
-                <a:cs typeface="Arial" panose="020B0604020202020204" pitchFamily="34" charset="0"/>
-              </a:rPr>
-              <a:t>. </a:t>
-            </a:r>
-            <a:r>
-              <a:rPr lang="en-US" sz="1200" dirty="0" err="1">
-                <a:latin typeface="Arial" panose="020B0604020202020204" pitchFamily="34" charset="0"/>
-                <a:cs typeface="Arial" panose="020B0604020202020204" pitchFamily="34" charset="0"/>
-              </a:rPr>
-              <a:t>Además</a:t>
-            </a:r>
-            <a:r>
-              <a:rPr lang="en-US" sz="1200" dirty="0">
-                <a:latin typeface="Arial" panose="020B0604020202020204" pitchFamily="34" charset="0"/>
-                <a:cs typeface="Arial" panose="020B0604020202020204" pitchFamily="34" charset="0"/>
-              </a:rPr>
-              <a:t>, con </a:t>
-            </a:r>
-            <a:r>
-              <a:rPr lang="en-US" sz="1200" dirty="0" err="1">
-                <a:latin typeface="Arial" panose="020B0604020202020204" pitchFamily="34" charset="0"/>
-                <a:cs typeface="Arial" panose="020B0604020202020204" pitchFamily="34" charset="0"/>
-              </a:rPr>
-              <a:t>el</a:t>
-            </a:r>
-            <a:r>
-              <a:rPr lang="en-US" sz="1200" dirty="0">
-                <a:latin typeface="Arial" panose="020B0604020202020204" pitchFamily="34" charset="0"/>
-                <a:cs typeface="Arial" panose="020B0604020202020204" pitchFamily="34" charset="0"/>
-              </a:rPr>
-              <a:t> </a:t>
-            </a:r>
-            <a:r>
-              <a:rPr lang="en-US" sz="1200" dirty="0" err="1">
-                <a:latin typeface="Arial" panose="020B0604020202020204" pitchFamily="34" charset="0"/>
-                <a:cs typeface="Arial" panose="020B0604020202020204" pitchFamily="34" charset="0"/>
-              </a:rPr>
-              <a:t>aumento</a:t>
-            </a:r>
-            <a:r>
-              <a:rPr lang="en-US" sz="1200" dirty="0">
-                <a:latin typeface="Arial" panose="020B0604020202020204" pitchFamily="34" charset="0"/>
-                <a:cs typeface="Arial" panose="020B0604020202020204" pitchFamily="34" charset="0"/>
-              </a:rPr>
-              <a:t> del ancho de la </a:t>
-            </a:r>
-            <a:r>
-              <a:rPr lang="en-US" sz="1200" dirty="0" err="1">
-                <a:latin typeface="Arial" panose="020B0604020202020204" pitchFamily="34" charset="0"/>
-                <a:cs typeface="Arial" panose="020B0604020202020204" pitchFamily="34" charset="0"/>
-              </a:rPr>
-              <a:t>guía</a:t>
-            </a:r>
-            <a:r>
-              <a:rPr lang="en-US" sz="1200" dirty="0">
-                <a:latin typeface="Arial" panose="020B0604020202020204" pitchFamily="34" charset="0"/>
-                <a:cs typeface="Arial" panose="020B0604020202020204" pitchFamily="34" charset="0"/>
-              </a:rPr>
-              <a:t> </a:t>
-            </a:r>
-            <a:r>
-              <a:rPr lang="en-US" sz="1200" dirty="0" err="1">
-                <a:latin typeface="Arial" panose="020B0604020202020204" pitchFamily="34" charset="0"/>
-                <a:cs typeface="Arial" panose="020B0604020202020204" pitchFamily="34" charset="0"/>
-              </a:rPr>
-              <a:t>también</a:t>
-            </a:r>
-            <a:r>
-              <a:rPr lang="en-US" sz="1200" dirty="0">
-                <a:latin typeface="Arial" panose="020B0604020202020204" pitchFamily="34" charset="0"/>
-                <a:cs typeface="Arial" panose="020B0604020202020204" pitchFamily="34" charset="0"/>
-              </a:rPr>
-              <a:t> hay un </a:t>
-            </a:r>
-            <a:r>
-              <a:rPr lang="en-US" sz="1200" dirty="0" err="1">
-                <a:latin typeface="Arial" panose="020B0604020202020204" pitchFamily="34" charset="0"/>
-                <a:cs typeface="Arial" panose="020B0604020202020204" pitchFamily="34" charset="0"/>
-              </a:rPr>
-              <a:t>aumento</a:t>
-            </a:r>
-            <a:r>
-              <a:rPr lang="en-US" sz="1200" dirty="0">
-                <a:latin typeface="Arial" panose="020B0604020202020204" pitchFamily="34" charset="0"/>
-                <a:cs typeface="Arial" panose="020B0604020202020204" pitchFamily="34" charset="0"/>
-              </a:rPr>
-              <a:t> de los </a:t>
-            </a:r>
-            <a:r>
-              <a:rPr lang="en-US" sz="1200" dirty="0" err="1">
-                <a:latin typeface="Arial" panose="020B0604020202020204" pitchFamily="34" charset="0"/>
-                <a:cs typeface="Arial" panose="020B0604020202020204" pitchFamily="34" charset="0"/>
-              </a:rPr>
-              <a:t>modos</a:t>
-            </a:r>
-            <a:r>
-              <a:rPr lang="en-US" sz="1200" dirty="0">
-                <a:latin typeface="Arial" panose="020B0604020202020204" pitchFamily="34" charset="0"/>
-                <a:cs typeface="Arial" panose="020B0604020202020204" pitchFamily="34" charset="0"/>
-              </a:rPr>
-              <a:t> </a:t>
-            </a:r>
-            <a:r>
-              <a:rPr lang="en-US" sz="1200" dirty="0" err="1">
-                <a:latin typeface="Arial" panose="020B0604020202020204" pitchFamily="34" charset="0"/>
-                <a:cs typeface="Arial" panose="020B0604020202020204" pitchFamily="34" charset="0"/>
-              </a:rPr>
-              <a:t>propagados</a:t>
-            </a:r>
-            <a:r>
-              <a:rPr lang="en-US" sz="1200" dirty="0">
-                <a:latin typeface="Arial" panose="020B0604020202020204" pitchFamily="34" charset="0"/>
-                <a:cs typeface="Arial" panose="020B0604020202020204" pitchFamily="34" charset="0"/>
-              </a:rPr>
-              <a:t> </a:t>
-            </a:r>
-            <a:r>
-              <a:rPr lang="en-US" sz="1200" dirty="0" err="1">
-                <a:latin typeface="Arial" panose="020B0604020202020204" pitchFamily="34" charset="0"/>
-                <a:cs typeface="Arial" panose="020B0604020202020204" pitchFamily="34" charset="0"/>
-              </a:rPr>
-              <a:t>ya</a:t>
-            </a:r>
-            <a:r>
-              <a:rPr lang="en-US" sz="1200" dirty="0">
-                <a:latin typeface="Arial" panose="020B0604020202020204" pitchFamily="34" charset="0"/>
-                <a:cs typeface="Arial" panose="020B0604020202020204" pitchFamily="34" charset="0"/>
-              </a:rPr>
-              <a:t> que la luz </a:t>
-            </a:r>
-            <a:r>
-              <a:rPr lang="en-US" sz="1200" dirty="0" err="1">
-                <a:latin typeface="Arial" panose="020B0604020202020204" pitchFamily="34" charset="0"/>
-                <a:cs typeface="Arial" panose="020B0604020202020204" pitchFamily="34" charset="0"/>
-              </a:rPr>
-              <a:t>tiene</a:t>
-            </a:r>
-            <a:r>
-              <a:rPr lang="en-US" sz="1200" dirty="0">
-                <a:latin typeface="Arial" panose="020B0604020202020204" pitchFamily="34" charset="0"/>
-                <a:cs typeface="Arial" panose="020B0604020202020204" pitchFamily="34" charset="0"/>
-              </a:rPr>
-              <a:t> </a:t>
-            </a:r>
-            <a:r>
-              <a:rPr lang="en-US" sz="1200" dirty="0" err="1">
-                <a:latin typeface="Arial" panose="020B0604020202020204" pitchFamily="34" charset="0"/>
-                <a:cs typeface="Arial" panose="020B0604020202020204" pitchFamily="34" charset="0"/>
-              </a:rPr>
-              <a:t>más</a:t>
-            </a:r>
-            <a:r>
-              <a:rPr lang="en-US" sz="1200" dirty="0">
-                <a:latin typeface="Arial" panose="020B0604020202020204" pitchFamily="34" charset="0"/>
-                <a:cs typeface="Arial" panose="020B0604020202020204" pitchFamily="34" charset="0"/>
-              </a:rPr>
-              <a:t> </a:t>
-            </a:r>
-            <a:r>
-              <a:rPr lang="en-US" sz="1200" dirty="0" err="1">
-                <a:latin typeface="Arial" panose="020B0604020202020204" pitchFamily="34" charset="0"/>
-                <a:cs typeface="Arial" panose="020B0604020202020204" pitchFamily="34" charset="0"/>
-              </a:rPr>
-              <a:t>espacio</a:t>
-            </a:r>
-            <a:r>
-              <a:rPr lang="en-US" sz="1200" dirty="0">
-                <a:latin typeface="Arial" panose="020B0604020202020204" pitchFamily="34" charset="0"/>
-                <a:cs typeface="Arial" panose="020B0604020202020204" pitchFamily="34" charset="0"/>
-              </a:rPr>
-              <a:t> para </a:t>
-            </a:r>
-            <a:r>
-              <a:rPr lang="en-US" sz="1200" dirty="0" err="1">
-                <a:latin typeface="Arial" panose="020B0604020202020204" pitchFamily="34" charset="0"/>
-                <a:cs typeface="Arial" panose="020B0604020202020204" pitchFamily="34" charset="0"/>
-              </a:rPr>
-              <a:t>poder</a:t>
-            </a:r>
-            <a:r>
-              <a:rPr lang="en-US" sz="1200" dirty="0">
-                <a:latin typeface="Arial" panose="020B0604020202020204" pitchFamily="34" charset="0"/>
-                <a:cs typeface="Arial" panose="020B0604020202020204" pitchFamily="34" charset="0"/>
-              </a:rPr>
-              <a:t> </a:t>
-            </a:r>
-            <a:r>
-              <a:rPr lang="en-US" sz="1200" dirty="0" err="1">
-                <a:latin typeface="Arial" panose="020B0604020202020204" pitchFamily="34" charset="0"/>
-                <a:cs typeface="Arial" panose="020B0604020202020204" pitchFamily="34" charset="0"/>
-              </a:rPr>
-              <a:t>albergar</a:t>
-            </a:r>
-            <a:r>
-              <a:rPr lang="en-US" sz="1200" dirty="0">
-                <a:latin typeface="Arial" panose="020B0604020202020204" pitchFamily="34" charset="0"/>
-                <a:cs typeface="Arial" panose="020B0604020202020204" pitchFamily="34" charset="0"/>
-              </a:rPr>
-              <a:t> </a:t>
-            </a:r>
-            <a:r>
-              <a:rPr lang="en-US" sz="1200" dirty="0" err="1">
-                <a:latin typeface="Arial" panose="020B0604020202020204" pitchFamily="34" charset="0"/>
-                <a:cs typeface="Arial" panose="020B0604020202020204" pitchFamily="34" charset="0"/>
-              </a:rPr>
-              <a:t>mayores</a:t>
-            </a:r>
-            <a:r>
-              <a:rPr lang="en-US" sz="1200" dirty="0">
-                <a:latin typeface="Arial" panose="020B0604020202020204" pitchFamily="34" charset="0"/>
-                <a:cs typeface="Arial" panose="020B0604020202020204" pitchFamily="34" charset="0"/>
-              </a:rPr>
-              <a:t> </a:t>
-            </a:r>
-            <a:r>
-              <a:rPr lang="en-US" sz="1200" dirty="0" err="1">
+              <a:rPr lang="en-US" sz="1100" dirty="0" err="1">
                 <a:latin typeface="Arial" panose="020B0604020202020204" pitchFamily="34" charset="0"/>
                 <a:cs typeface="Arial" panose="020B0604020202020204" pitchFamily="34" charset="0"/>
               </a:rPr>
               <a:t>patrones</a:t>
             </a:r>
             <a:r>
-              <a:rPr lang="en-US" sz="1200" dirty="0">
+              <a:rPr lang="en-US" sz="1100" dirty="0">
                 <a:latin typeface="Arial" panose="020B0604020202020204" pitchFamily="34" charset="0"/>
                 <a:cs typeface="Arial" panose="020B0604020202020204" pitchFamily="34" charset="0"/>
               </a:rPr>
               <a:t> de luz </a:t>
             </a:r>
             <a:r>
-              <a:rPr lang="en-US" sz="1200" dirty="0" err="1">
+              <a:rPr lang="en-US" sz="1100" dirty="0" err="1">
                 <a:latin typeface="Arial" panose="020B0604020202020204" pitchFamily="34" charset="0"/>
                 <a:cs typeface="Arial" panose="020B0604020202020204" pitchFamily="34" charset="0"/>
               </a:rPr>
               <a:t>permitidos</a:t>
             </a:r>
             <a:r>
-              <a:rPr lang="en-US" sz="1200" dirty="0">
+              <a:rPr lang="en-US" sz="1100" dirty="0">
                 <a:latin typeface="Arial" panose="020B0604020202020204" pitchFamily="34" charset="0"/>
                 <a:cs typeface="Arial" panose="020B0604020202020204" pitchFamily="34" charset="0"/>
               </a:rPr>
@@ -7023,7 +7351,7 @@
         <p:spPr>
           <a:xfrm>
             <a:off x="609600" y="1219200"/>
-            <a:ext cx="11199971" cy="3306028"/>
+            <a:ext cx="11199971" cy="3053573"/>
           </a:xfrm>
           <a:prstGeom prst="rect">
             <a:avLst/>
@@ -7133,8 +7461,8 @@
         </p:blipFill>
         <p:spPr>
           <a:xfrm>
-            <a:off x="3488291" y="1313726"/>
-            <a:ext cx="5389746" cy="3137602"/>
+            <a:off x="3656362" y="1313726"/>
+            <a:ext cx="4978173" cy="2898008"/>
           </a:xfrm>
           <a:prstGeom prst="rect">
             <a:avLst/>
@@ -7668,7 +7996,7 @@
             <p:spPr>
               <a:xfrm>
                 <a:off x="609441" y="4860334"/>
-                <a:ext cx="11198542" cy="3402855"/>
+                <a:ext cx="11198542" cy="1294072"/>
               </a:xfrm>
               <a:prstGeom prst="rect">
                 <a:avLst/>
@@ -8107,500 +8435,6 @@
                   <a:t>Comment on the results found for the TE0 and TM0 for both deep and shallow waveguides. </a:t>
                 </a:r>
               </a:p>
-              <a:p>
-                <a:pPr algn="just"/>
-                <a:endParaRPr lang="en-US" sz="1200" dirty="0">
-                  <a:latin typeface="Arial" panose="020B0604020202020204" pitchFamily="34" charset="0"/>
-                  <a:cs typeface="Arial" panose="020B0604020202020204" pitchFamily="34" charset="0"/>
-                </a:endParaRPr>
-              </a:p>
-              <a:p>
-                <a:pPr algn="just"/>
-                <a:endParaRPr lang="en-US" sz="1200" dirty="0">
-                  <a:latin typeface="Arial" panose="020B0604020202020204" pitchFamily="34" charset="0"/>
-                  <a:cs typeface="Arial" panose="020B0604020202020204" pitchFamily="34" charset="0"/>
-                </a:endParaRPr>
-              </a:p>
-              <a:p>
-                <a:pPr algn="just"/>
-                <a:r>
-                  <a:rPr lang="en-US" sz="1200" dirty="0">
-                    <a:latin typeface="Arial" panose="020B0604020202020204" pitchFamily="34" charset="0"/>
-                    <a:cs typeface="Arial" panose="020B0604020202020204" pitchFamily="34" charset="0"/>
-                  </a:rPr>
-                  <a:t>Los </a:t>
-                </a:r>
-                <a:r>
-                  <a:rPr lang="en-US" sz="1200" dirty="0" err="1">
-                    <a:latin typeface="Arial" panose="020B0604020202020204" pitchFamily="34" charset="0"/>
-                    <a:cs typeface="Arial" panose="020B0604020202020204" pitchFamily="34" charset="0"/>
-                  </a:rPr>
-                  <a:t>índices</a:t>
-                </a:r>
-                <a:r>
-                  <a:rPr lang="en-US" sz="1200" dirty="0">
-                    <a:latin typeface="Arial" panose="020B0604020202020204" pitchFamily="34" charset="0"/>
-                    <a:cs typeface="Arial" panose="020B0604020202020204" pitchFamily="34" charset="0"/>
-                  </a:rPr>
-                  <a:t> </a:t>
-                </a:r>
-                <a:r>
-                  <a:rPr lang="en-US" sz="1200" dirty="0" err="1">
-                    <a:latin typeface="Arial" panose="020B0604020202020204" pitchFamily="34" charset="0"/>
-                    <a:cs typeface="Arial" panose="020B0604020202020204" pitchFamily="34" charset="0"/>
-                  </a:rPr>
-                  <a:t>efectivos</a:t>
-                </a:r>
-                <a:r>
-                  <a:rPr lang="en-US" sz="1200" dirty="0">
-                    <a:latin typeface="Arial" panose="020B0604020202020204" pitchFamily="34" charset="0"/>
-                    <a:cs typeface="Arial" panose="020B0604020202020204" pitchFamily="34" charset="0"/>
-                  </a:rPr>
-                  <a:t> para la </a:t>
-                </a:r>
-                <a:r>
-                  <a:rPr lang="en-US" sz="1200" dirty="0" err="1">
-                    <a:latin typeface="Arial" panose="020B0604020202020204" pitchFamily="34" charset="0"/>
-                    <a:cs typeface="Arial" panose="020B0604020202020204" pitchFamily="34" charset="0"/>
-                  </a:rPr>
-                  <a:t>guía</a:t>
-                </a:r>
-                <a:r>
-                  <a:rPr lang="en-US" sz="1200" dirty="0">
-                    <a:latin typeface="Arial" panose="020B0604020202020204" pitchFamily="34" charset="0"/>
-                    <a:cs typeface="Arial" panose="020B0604020202020204" pitchFamily="34" charset="0"/>
-                  </a:rPr>
-                  <a:t> deep son </a:t>
-                </a:r>
-                <a:r>
-                  <a:rPr lang="en-US" sz="1200" dirty="0" err="1">
-                    <a:latin typeface="Arial" panose="020B0604020202020204" pitchFamily="34" charset="0"/>
-                    <a:cs typeface="Arial" panose="020B0604020202020204" pitchFamily="34" charset="0"/>
-                  </a:rPr>
-                  <a:t>mayores</a:t>
-                </a:r>
-                <a:r>
-                  <a:rPr lang="en-US" sz="1200" dirty="0">
-                    <a:latin typeface="Arial" panose="020B0604020202020204" pitchFamily="34" charset="0"/>
-                    <a:cs typeface="Arial" panose="020B0604020202020204" pitchFamily="34" charset="0"/>
-                  </a:rPr>
-                  <a:t> que para </a:t>
-                </a:r>
-                <a:r>
-                  <a:rPr lang="en-US" sz="1200" dirty="0" err="1">
-                    <a:latin typeface="Arial" panose="020B0604020202020204" pitchFamily="34" charset="0"/>
-                    <a:cs typeface="Arial" panose="020B0604020202020204" pitchFamily="34" charset="0"/>
-                  </a:rPr>
-                  <a:t>el</a:t>
-                </a:r>
-                <a:r>
-                  <a:rPr lang="en-US" sz="1200" dirty="0">
-                    <a:latin typeface="Arial" panose="020B0604020202020204" pitchFamily="34" charset="0"/>
-                    <a:cs typeface="Arial" panose="020B0604020202020204" pitchFamily="34" charset="0"/>
-                  </a:rPr>
-                  <a:t> </a:t>
-                </a:r>
-              </a:p>
-              <a:p>
-                <a:pPr algn="just"/>
-                <a:endParaRPr lang="en-US" sz="1200" dirty="0">
-                  <a:latin typeface="Arial" panose="020B0604020202020204" pitchFamily="34" charset="0"/>
-                  <a:cs typeface="Arial" panose="020B0604020202020204" pitchFamily="34" charset="0"/>
-                </a:endParaRPr>
-              </a:p>
-              <a:p>
-                <a:pPr algn="just"/>
-                <a:r>
-                  <a:rPr lang="en-US" sz="1200" dirty="0">
-                    <a:latin typeface="Arial" panose="020B0604020202020204" pitchFamily="34" charset="0"/>
-                    <a:cs typeface="Arial" panose="020B0604020202020204" pitchFamily="34" charset="0"/>
-                  </a:rPr>
-                  <a:t>La </a:t>
-                </a:r>
-                <a:r>
-                  <a:rPr lang="en-US" sz="1200" dirty="0" err="1">
-                    <a:latin typeface="Arial" panose="020B0604020202020204" pitchFamily="34" charset="0"/>
-                    <a:cs typeface="Arial" panose="020B0604020202020204" pitchFamily="34" charset="0"/>
-                  </a:rPr>
-                  <a:t>guía</a:t>
-                </a:r>
-                <a:r>
-                  <a:rPr lang="en-US" sz="1200" dirty="0">
-                    <a:latin typeface="Arial" panose="020B0604020202020204" pitchFamily="34" charset="0"/>
-                    <a:cs typeface="Arial" panose="020B0604020202020204" pitchFamily="34" charset="0"/>
-                  </a:rPr>
-                  <a:t> deep </a:t>
-                </a:r>
-                <a:r>
-                  <a:rPr lang="en-US" sz="1200" dirty="0" err="1">
-                    <a:latin typeface="Arial" panose="020B0604020202020204" pitchFamily="34" charset="0"/>
-                    <a:cs typeface="Arial" panose="020B0604020202020204" pitchFamily="34" charset="0"/>
-                  </a:rPr>
-                  <a:t>está</a:t>
-                </a:r>
-                <a:r>
-                  <a:rPr lang="en-US" sz="1200" dirty="0">
-                    <a:latin typeface="Arial" panose="020B0604020202020204" pitchFamily="34" charset="0"/>
-                    <a:cs typeface="Arial" panose="020B0604020202020204" pitchFamily="34" charset="0"/>
-                  </a:rPr>
-                  <a:t> </a:t>
-                </a:r>
-                <a:r>
-                  <a:rPr lang="en-US" sz="1200" dirty="0" err="1">
-                    <a:latin typeface="Arial" panose="020B0604020202020204" pitchFamily="34" charset="0"/>
-                    <a:cs typeface="Arial" panose="020B0604020202020204" pitchFamily="34" charset="0"/>
-                  </a:rPr>
-                  <a:t>más</a:t>
-                </a:r>
-                <a:r>
-                  <a:rPr lang="en-US" sz="1200" dirty="0">
-                    <a:latin typeface="Arial" panose="020B0604020202020204" pitchFamily="34" charset="0"/>
-                    <a:cs typeface="Arial" panose="020B0604020202020204" pitchFamily="34" charset="0"/>
-                  </a:rPr>
-                  <a:t> </a:t>
-                </a:r>
-              </a:p>
-              <a:p>
-                <a:pPr algn="just"/>
-                <a:endParaRPr lang="en-US" sz="1200" dirty="0">
-                  <a:latin typeface="Arial" panose="020B0604020202020204" pitchFamily="34" charset="0"/>
-                  <a:cs typeface="Arial" panose="020B0604020202020204" pitchFamily="34" charset="0"/>
-                </a:endParaRPr>
-              </a:p>
-              <a:p>
-                <a:pPr algn="just"/>
-                <a:r>
-                  <a:rPr lang="en-US" sz="1200" dirty="0">
-                    <a:latin typeface="Arial" panose="020B0604020202020204" pitchFamily="34" charset="0"/>
-                    <a:cs typeface="Arial" panose="020B0604020202020204" pitchFamily="34" charset="0"/>
-                  </a:rPr>
-                  <a:t>Los </a:t>
-                </a:r>
-                <a:r>
-                  <a:rPr lang="en-US" sz="1200" dirty="0" err="1">
-                    <a:latin typeface="Arial" panose="020B0604020202020204" pitchFamily="34" charset="0"/>
-                    <a:cs typeface="Arial" panose="020B0604020202020204" pitchFamily="34" charset="0"/>
-                  </a:rPr>
-                  <a:t>modos</a:t>
-                </a:r>
-                <a:r>
-                  <a:rPr lang="en-US" sz="1200" dirty="0">
-                    <a:latin typeface="Arial" panose="020B0604020202020204" pitchFamily="34" charset="0"/>
-                    <a:cs typeface="Arial" panose="020B0604020202020204" pitchFamily="34" charset="0"/>
-                  </a:rPr>
-                  <a:t> TE </a:t>
-                </a:r>
-              </a:p>
-              <a:p>
-                <a:pPr algn="just"/>
-                <a:endParaRPr lang="en-US" sz="1200" dirty="0">
-                  <a:latin typeface="Arial" panose="020B0604020202020204" pitchFamily="34" charset="0"/>
-                  <a:cs typeface="Arial" panose="020B0604020202020204" pitchFamily="34" charset="0"/>
-                </a:endParaRPr>
-              </a:p>
-              <a:p>
-                <a:pPr algn="just"/>
-                <a:r>
-                  <a:rPr lang="en-US" sz="1200" dirty="0">
-                    <a:highlight>
-                      <a:srgbClr val="FFFF00"/>
-                    </a:highlight>
-                    <a:latin typeface="Arial" panose="020B0604020202020204" pitchFamily="34" charset="0"/>
-                    <a:cs typeface="Arial" panose="020B0604020202020204" pitchFamily="34" charset="0"/>
-                  </a:rPr>
-                  <a:t>El </a:t>
-                </a:r>
-                <a:r>
-                  <a:rPr lang="en-US" sz="1200" dirty="0" err="1">
-                    <a:highlight>
-                      <a:srgbClr val="FFFF00"/>
-                    </a:highlight>
-                    <a:latin typeface="Arial" panose="020B0604020202020204" pitchFamily="34" charset="0"/>
-                    <a:cs typeface="Arial" panose="020B0604020202020204" pitchFamily="34" charset="0"/>
-                  </a:rPr>
-                  <a:t>índice</a:t>
-                </a:r>
-                <a:r>
-                  <a:rPr lang="en-US" sz="1200" dirty="0">
-                    <a:highlight>
-                      <a:srgbClr val="FFFF00"/>
-                    </a:highlight>
-                    <a:latin typeface="Arial" panose="020B0604020202020204" pitchFamily="34" charset="0"/>
-                    <a:cs typeface="Arial" panose="020B0604020202020204" pitchFamily="34" charset="0"/>
-                  </a:rPr>
-                  <a:t> de </a:t>
-                </a:r>
-                <a:r>
-                  <a:rPr lang="en-US" sz="1200" dirty="0" err="1">
-                    <a:highlight>
-                      <a:srgbClr val="FFFF00"/>
-                    </a:highlight>
-                    <a:latin typeface="Arial" panose="020B0604020202020204" pitchFamily="34" charset="0"/>
-                    <a:cs typeface="Arial" panose="020B0604020202020204" pitchFamily="34" charset="0"/>
-                  </a:rPr>
-                  <a:t>grupo</a:t>
-                </a:r>
-                <a:r>
-                  <a:rPr lang="en-US" sz="1200" dirty="0">
-                    <a:highlight>
-                      <a:srgbClr val="FFFF00"/>
-                    </a:highlight>
-                    <a:latin typeface="Arial" panose="020B0604020202020204" pitchFamily="34" charset="0"/>
-                    <a:cs typeface="Arial" panose="020B0604020202020204" pitchFamily="34" charset="0"/>
-                  </a:rPr>
-                  <a:t> debe de ser </a:t>
-                </a:r>
-                <a:r>
-                  <a:rPr lang="en-US" sz="1200" dirty="0" err="1">
-                    <a:highlight>
-                      <a:srgbClr val="FFFF00"/>
-                    </a:highlight>
-                    <a:latin typeface="Arial" panose="020B0604020202020204" pitchFamily="34" charset="0"/>
-                    <a:cs typeface="Arial" panose="020B0604020202020204" pitchFamily="34" charset="0"/>
-                  </a:rPr>
-                  <a:t>cercano</a:t>
-                </a:r>
-                <a:r>
-                  <a:rPr lang="en-US" sz="1200" dirty="0">
-                    <a:highlight>
-                      <a:srgbClr val="FFFF00"/>
-                    </a:highlight>
-                    <a:latin typeface="Arial" panose="020B0604020202020204" pitchFamily="34" charset="0"/>
-                    <a:cs typeface="Arial" panose="020B0604020202020204" pitchFamily="34" charset="0"/>
-                  </a:rPr>
-                  <a:t> a 2 </a:t>
-                </a:r>
-                <a:r>
-                  <a:rPr lang="en-US" sz="1200" dirty="0" err="1">
-                    <a:highlight>
-                      <a:srgbClr val="FFFF00"/>
-                    </a:highlight>
-                    <a:latin typeface="Arial" panose="020B0604020202020204" pitchFamily="34" charset="0"/>
-                    <a:cs typeface="Arial" panose="020B0604020202020204" pitchFamily="34" charset="0"/>
-                  </a:rPr>
-                  <a:t>en</a:t>
-                </a:r>
-                <a:r>
-                  <a:rPr lang="en-US" sz="1200" dirty="0">
-                    <a:highlight>
-                      <a:srgbClr val="FFFF00"/>
-                    </a:highlight>
-                    <a:latin typeface="Arial" panose="020B0604020202020204" pitchFamily="34" charset="0"/>
-                    <a:cs typeface="Arial" panose="020B0604020202020204" pitchFamily="34" charset="0"/>
-                  </a:rPr>
-                  <a:t> deep waveguide. De 1.8 </a:t>
-                </a:r>
-                <a:r>
-                  <a:rPr lang="en-US" sz="1200" dirty="0" err="1">
-                    <a:highlight>
-                      <a:srgbClr val="FFFF00"/>
-                    </a:highlight>
-                    <a:latin typeface="Arial" panose="020B0604020202020204" pitchFamily="34" charset="0"/>
-                    <a:cs typeface="Arial" panose="020B0604020202020204" pitchFamily="34" charset="0"/>
-                  </a:rPr>
-                  <a:t>en</a:t>
-                </a:r>
-                <a:r>
-                  <a:rPr lang="en-US" sz="1200" dirty="0">
-                    <a:highlight>
-                      <a:srgbClr val="FFFF00"/>
-                    </a:highlight>
-                    <a:latin typeface="Arial" panose="020B0604020202020204" pitchFamily="34" charset="0"/>
-                    <a:cs typeface="Arial" panose="020B0604020202020204" pitchFamily="34" charset="0"/>
-                  </a:rPr>
-                  <a:t> …</a:t>
-                </a:r>
-              </a:p>
-              <a:p>
-                <a:pPr algn="just"/>
-                <a:r>
-                  <a:rPr lang="en-US" sz="1200" dirty="0">
-                    <a:highlight>
-                      <a:srgbClr val="FFFF00"/>
-                    </a:highlight>
-                    <a:latin typeface="Arial" panose="020B0604020202020204" pitchFamily="34" charset="0"/>
-                    <a:cs typeface="Arial" panose="020B0604020202020204" pitchFamily="34" charset="0"/>
-                  </a:rPr>
-                  <a:t>Hablar de la </a:t>
-                </a:r>
-                <a:r>
-                  <a:rPr lang="en-US" sz="1200" dirty="0" err="1">
-                    <a:highlight>
-                      <a:srgbClr val="FFFF00"/>
-                    </a:highlight>
-                    <a:latin typeface="Arial" panose="020B0604020202020204" pitchFamily="34" charset="0"/>
-                    <a:cs typeface="Arial" panose="020B0604020202020204" pitchFamily="34" charset="0"/>
-                  </a:rPr>
-                  <a:t>dispersión</a:t>
-                </a:r>
-                <a:r>
-                  <a:rPr lang="en-US" sz="1200" dirty="0">
-                    <a:highlight>
-                      <a:srgbClr val="FFFF00"/>
-                    </a:highlight>
-                    <a:latin typeface="Arial" panose="020B0604020202020204" pitchFamily="34" charset="0"/>
-                    <a:cs typeface="Arial" panose="020B0604020202020204" pitchFamily="34" charset="0"/>
-                  </a:rPr>
-                  <a:t> , … Si n2 es </a:t>
-                </a:r>
-                <a:r>
-                  <a:rPr lang="en-US" sz="1200" dirty="0" err="1">
-                    <a:highlight>
-                      <a:srgbClr val="FFFF00"/>
-                    </a:highlight>
-                    <a:latin typeface="Arial" panose="020B0604020202020204" pitchFamily="34" charset="0"/>
-                    <a:cs typeface="Arial" panose="020B0604020202020204" pitchFamily="34" charset="0"/>
-                  </a:rPr>
-                  <a:t>muy</a:t>
-                </a:r>
-                <a:r>
-                  <a:rPr lang="en-US" sz="1200" dirty="0">
-                    <a:highlight>
-                      <a:srgbClr val="FFFF00"/>
-                    </a:highlight>
-                    <a:latin typeface="Arial" panose="020B0604020202020204" pitchFamily="34" charset="0"/>
-                    <a:cs typeface="Arial" panose="020B0604020202020204" pitchFamily="34" charset="0"/>
-                  </a:rPr>
-                  <a:t> negative</a:t>
-                </a:r>
-              </a:p>
-              <a:p>
-                <a:pPr algn="just"/>
-                <a:r>
-                  <a:rPr lang="en-US" sz="1200" dirty="0">
-                    <a:highlight>
-                      <a:srgbClr val="FFFF00"/>
-                    </a:highlight>
-                    <a:latin typeface="Arial" panose="020B0604020202020204" pitchFamily="34" charset="0"/>
-                    <a:cs typeface="Arial" panose="020B0604020202020204" pitchFamily="34" charset="0"/>
-                  </a:rPr>
-                  <a:t>A mayor </a:t>
-                </a:r>
-                <a:r>
-                  <a:rPr lang="en-US" sz="1200" dirty="0" err="1">
-                    <a:highlight>
-                      <a:srgbClr val="FFFF00"/>
-                    </a:highlight>
-                    <a:latin typeface="Arial" panose="020B0604020202020204" pitchFamily="34" charset="0"/>
-                    <a:cs typeface="Arial" panose="020B0604020202020204" pitchFamily="34" charset="0"/>
-                  </a:rPr>
-                  <a:t>variabilidad</a:t>
-                </a:r>
-                <a:r>
-                  <a:rPr lang="en-US" sz="1200" dirty="0">
-                    <a:highlight>
-                      <a:srgbClr val="FFFF00"/>
-                    </a:highlight>
-                    <a:latin typeface="Arial" panose="020B0604020202020204" pitchFamily="34" charset="0"/>
-                    <a:cs typeface="Arial" panose="020B0604020202020204" pitchFamily="34" charset="0"/>
-                  </a:rPr>
-                  <a:t> </a:t>
-                </a:r>
-                <a:r>
-                  <a:rPr lang="en-US" sz="1200" dirty="0" err="1">
-                    <a:highlight>
-                      <a:srgbClr val="FFFF00"/>
-                    </a:highlight>
-                    <a:latin typeface="Arial" panose="020B0604020202020204" pitchFamily="34" charset="0"/>
-                    <a:cs typeface="Arial" panose="020B0604020202020204" pitchFamily="34" charset="0"/>
-                  </a:rPr>
-                  <a:t>en</a:t>
-                </a:r>
-                <a:r>
-                  <a:rPr lang="en-US" sz="1200" dirty="0">
-                    <a:highlight>
-                      <a:srgbClr val="FFFF00"/>
-                    </a:highlight>
-                    <a:latin typeface="Arial" panose="020B0604020202020204" pitchFamily="34" charset="0"/>
-                    <a:cs typeface="Arial" panose="020B0604020202020204" pitchFamily="34" charset="0"/>
-                  </a:rPr>
-                  <a:t> longitude de </a:t>
-                </a:r>
-                <a:r>
-                  <a:rPr lang="en-US" sz="1200" dirty="0" err="1">
-                    <a:highlight>
-                      <a:srgbClr val="FFFF00"/>
-                    </a:highlight>
-                    <a:latin typeface="Arial" panose="020B0604020202020204" pitchFamily="34" charset="0"/>
-                    <a:cs typeface="Arial" panose="020B0604020202020204" pitchFamily="34" charset="0"/>
-                  </a:rPr>
-                  <a:t>onda</a:t>
-                </a:r>
-                <a:r>
-                  <a:rPr lang="en-US" sz="1200" dirty="0">
-                    <a:highlight>
-                      <a:srgbClr val="FFFF00"/>
-                    </a:highlight>
-                    <a:latin typeface="Arial" panose="020B0604020202020204" pitchFamily="34" charset="0"/>
-                    <a:cs typeface="Arial" panose="020B0604020202020204" pitchFamily="34" charset="0"/>
-                  </a:rPr>
-                  <a:t>, mayor es </a:t>
-                </a:r>
-                <a:r>
-                  <a:rPr lang="en-US" sz="1200" dirty="0" err="1">
-                    <a:highlight>
-                      <a:srgbClr val="FFFF00"/>
-                    </a:highlight>
-                    <a:latin typeface="Arial" panose="020B0604020202020204" pitchFamily="34" charset="0"/>
-                    <a:cs typeface="Arial" panose="020B0604020202020204" pitchFamily="34" charset="0"/>
-                  </a:rPr>
-                  <a:t>el</a:t>
-                </a:r>
-                <a:r>
-                  <a:rPr lang="en-US" sz="1200" dirty="0">
-                    <a:highlight>
-                      <a:srgbClr val="FFFF00"/>
-                    </a:highlight>
-                    <a:latin typeface="Arial" panose="020B0604020202020204" pitchFamily="34" charset="0"/>
-                    <a:cs typeface="Arial" panose="020B0604020202020204" pitchFamily="34" charset="0"/>
-                  </a:rPr>
-                  <a:t> </a:t>
-                </a:r>
-                <a:r>
-                  <a:rPr lang="en-US" sz="1200" dirty="0" err="1">
-                    <a:highlight>
-                      <a:srgbClr val="FFFF00"/>
-                    </a:highlight>
-                    <a:latin typeface="Arial" panose="020B0604020202020204" pitchFamily="34" charset="0"/>
-                    <a:cs typeface="Arial" panose="020B0604020202020204" pitchFamily="34" charset="0"/>
-                  </a:rPr>
-                  <a:t>índice</a:t>
-                </a:r>
-                <a:r>
-                  <a:rPr lang="en-US" sz="1200" dirty="0">
-                    <a:highlight>
-                      <a:srgbClr val="FFFF00"/>
-                    </a:highlight>
-                    <a:latin typeface="Arial" panose="020B0604020202020204" pitchFamily="34" charset="0"/>
-                    <a:cs typeface="Arial" panose="020B0604020202020204" pitchFamily="34" charset="0"/>
-                  </a:rPr>
-                  <a:t> de </a:t>
-                </a:r>
-                <a:r>
-                  <a:rPr lang="en-US" sz="1200" dirty="0" err="1">
-                    <a:highlight>
-                      <a:srgbClr val="FFFF00"/>
-                    </a:highlight>
-                    <a:latin typeface="Arial" panose="020B0604020202020204" pitchFamily="34" charset="0"/>
-                    <a:cs typeface="Arial" panose="020B0604020202020204" pitchFamily="34" charset="0"/>
-                  </a:rPr>
-                  <a:t>grupo</a:t>
-                </a:r>
-                <a:endParaRPr lang="en-US" sz="1200" dirty="0">
-                  <a:highlight>
-                    <a:srgbClr val="FFFF00"/>
-                  </a:highlight>
-                  <a:latin typeface="Arial" panose="020B0604020202020204" pitchFamily="34" charset="0"/>
-                  <a:cs typeface="Arial" panose="020B0604020202020204" pitchFamily="34" charset="0"/>
-                </a:endParaRPr>
-              </a:p>
-              <a:p>
-                <a:pPr algn="just"/>
-                <a:endParaRPr lang="en-US" sz="1200" dirty="0">
-                  <a:latin typeface="Arial" panose="020B0604020202020204" pitchFamily="34" charset="0"/>
-                  <a:cs typeface="Arial" panose="020B0604020202020204" pitchFamily="34" charset="0"/>
-                </a:endParaRPr>
-              </a:p>
             </p:txBody>
           </p:sp>
         </mc:Choice>
@@ -8622,7 +8456,7 @@
             <p:spPr>
               <a:xfrm>
                 <a:off x="609441" y="4860334"/>
-                <a:ext cx="11198542" cy="3402855"/>
+                <a:ext cx="11198542" cy="1294072"/>
               </a:xfrm>
               <a:prstGeom prst="rect">
                 <a:avLst/>
@@ -8630,7 +8464,7 @@
               <a:blipFill>
                 <a:blip r:embed="rId6"/>
                 <a:stretch>
-                  <a:fillRect/>
+                  <a:fillRect b="-943"/>
                 </a:stretch>
               </a:blipFill>
               <a:ln w="28575">
@@ -9117,6 +8951,418 @@
   <p:cSld>
     <p:spTree>
       <p:nvGrpSpPr>
+        <p:cNvPr id="1" name=""/>
+        <p:cNvGrpSpPr/>
+        <p:nvPr/>
+      </p:nvGrpSpPr>
+      <p:grpSpPr>
+        <a:xfrm>
+          <a:off x="0" y="0"/>
+          <a:ext cx="0" cy="0"/>
+          <a:chOff x="0" y="0"/>
+          <a:chExt cx="0" cy="0"/>
+        </a:xfrm>
+      </p:grpSpPr>
+      <p:sp>
+        <p:nvSpPr>
+          <p:cNvPr id="2" name="Título 1">
+            <a:extLst>
+              <a:ext uri="{FF2B5EF4-FFF2-40B4-BE49-F238E27FC236}">
+                <a16:creationId xmlns:a16="http://schemas.microsoft.com/office/drawing/2014/main" id="{29ECAC86-693D-5AA1-319E-7BDC814F998A}"/>
+              </a:ext>
+            </a:extLst>
+          </p:cNvPr>
+          <p:cNvSpPr>
+            <a:spLocks noGrp="1"/>
+          </p:cNvSpPr>
+          <p:nvPr>
+            <p:ph type="title"/>
+          </p:nvPr>
+        </p:nvSpPr>
+        <p:spPr>
+          <a:xfrm>
+            <a:off x="590550" y="206752"/>
+            <a:ext cx="10991850" cy="369332"/>
+          </a:xfrm>
+        </p:spPr>
+        <p:txBody>
+          <a:bodyPr/>
+          <a:lstStyle/>
+          <a:p>
+            <a:r>
+              <a:rPr lang="en-US" sz="2400" dirty="0"/>
+              <a:t>Learning outcome #3 – Waveguide compact model</a:t>
+            </a:r>
+            <a:endParaRPr lang="es-ES" sz="2400" dirty="0"/>
+          </a:p>
+        </p:txBody>
+      </p:sp>
+      <p:sp>
+        <p:nvSpPr>
+          <p:cNvPr id="3" name="Marcador de texto 2">
+            <a:extLst>
+              <a:ext uri="{FF2B5EF4-FFF2-40B4-BE49-F238E27FC236}">
+                <a16:creationId xmlns:a16="http://schemas.microsoft.com/office/drawing/2014/main" id="{07C6FD61-A8A7-0DF1-CBCD-0AFE8E50AF48}"/>
+              </a:ext>
+            </a:extLst>
+          </p:cNvPr>
+          <p:cNvSpPr>
+            <a:spLocks noGrp="1"/>
+          </p:cNvSpPr>
+          <p:nvPr>
+            <p:ph type="body" idx="1"/>
+          </p:nvPr>
+        </p:nvSpPr>
+        <p:spPr>
+          <a:xfrm>
+            <a:off x="628650" y="4509438"/>
+            <a:ext cx="10972800" cy="1661993"/>
+          </a:xfrm>
+        </p:spPr>
+        <p:txBody>
+          <a:bodyPr/>
+          <a:lstStyle/>
+          <a:p>
+            <a:pPr algn="just"/>
+            <a:r>
+              <a:rPr lang="es-ES_tradnl" sz="1200" dirty="0">
+                <a:latin typeface="Arial" panose="020B0604020202020204" pitchFamily="34" charset="0"/>
+                <a:cs typeface="Arial" panose="020B0604020202020204" pitchFamily="34" charset="0"/>
+              </a:rPr>
+              <a:t>En las guías </a:t>
+            </a:r>
+            <a:r>
+              <a:rPr lang="es-ES_tradnl" sz="1200" dirty="0" err="1">
+                <a:latin typeface="Arial" panose="020B0604020202020204" pitchFamily="34" charset="0"/>
+                <a:cs typeface="Arial" panose="020B0604020202020204" pitchFamily="34" charset="0"/>
+              </a:rPr>
+              <a:t>deep</a:t>
+            </a:r>
+            <a:r>
+              <a:rPr lang="es-ES_tradnl" sz="1200" dirty="0">
+                <a:latin typeface="Arial" panose="020B0604020202020204" pitchFamily="34" charset="0"/>
+                <a:cs typeface="Arial" panose="020B0604020202020204" pitchFamily="34" charset="0"/>
+              </a:rPr>
+              <a:t>, los índices de grupo son ligeramente superiores a las </a:t>
+            </a:r>
+            <a:r>
+              <a:rPr lang="es-ES_tradnl" sz="1200" dirty="0" err="1">
+                <a:latin typeface="Arial" panose="020B0604020202020204" pitchFamily="34" charset="0"/>
+                <a:cs typeface="Arial" panose="020B0604020202020204" pitchFamily="34" charset="0"/>
+              </a:rPr>
+              <a:t>shallow</a:t>
+            </a:r>
+            <a:r>
+              <a:rPr lang="es-ES_tradnl" sz="1200" dirty="0">
+                <a:latin typeface="Arial" panose="020B0604020202020204" pitchFamily="34" charset="0"/>
+                <a:cs typeface="Arial" panose="020B0604020202020204" pitchFamily="34" charset="0"/>
+              </a:rPr>
+              <a:t> para los dos modos. Esto se debe a que en las guías </a:t>
+            </a:r>
+            <a:r>
+              <a:rPr lang="es-ES_tradnl" sz="1200" dirty="0" err="1">
+                <a:latin typeface="Arial" panose="020B0604020202020204" pitchFamily="34" charset="0"/>
+                <a:cs typeface="Arial" panose="020B0604020202020204" pitchFamily="34" charset="0"/>
+              </a:rPr>
+              <a:t>deep</a:t>
+            </a:r>
+            <a:r>
+              <a:rPr lang="es-ES_tradnl" sz="1200" dirty="0">
+                <a:latin typeface="Arial" panose="020B0604020202020204" pitchFamily="34" charset="0"/>
+                <a:cs typeface="Arial" panose="020B0604020202020204" pitchFamily="34" charset="0"/>
+              </a:rPr>
+              <a:t> hay un mayor confinamiento en el núcleo ya que las paredes laterales están totalmente grabadas. Por otro lado, en ambos tipos de guía se puede observar que hay un mayor índice de grupo en los modos TE que en los TM. Esto es porque el modo TE viaja más lento debido a que tiene una mayor interacción con la geometría del núcleo, ya que tiene componente en la dirección del ancho de la guía, donde hay más cantidad de material de guía.</a:t>
+            </a:r>
+          </a:p>
+          <a:p>
+            <a:pPr algn="just"/>
+            <a:endParaRPr lang="es-ES_tradnl" sz="1200" dirty="0">
+              <a:latin typeface="Arial" panose="020B0604020202020204" pitchFamily="34" charset="0"/>
+              <a:cs typeface="Arial" panose="020B0604020202020204" pitchFamily="34" charset="0"/>
+            </a:endParaRPr>
+          </a:p>
+          <a:p>
+            <a:pPr algn="just"/>
+            <a:r>
+              <a:rPr lang="es-ES_tradnl" sz="1200" dirty="0">
+                <a:latin typeface="Arial" panose="020B0604020202020204" pitchFamily="34" charset="0"/>
+                <a:cs typeface="Arial" panose="020B0604020202020204" pitchFamily="34" charset="0"/>
+              </a:rPr>
+              <a:t>Respecto a la dispersión, la guía </a:t>
+            </a:r>
+            <a:r>
+              <a:rPr lang="es-ES_tradnl" sz="1200" dirty="0" err="1">
+                <a:latin typeface="Arial" panose="020B0604020202020204" pitchFamily="34" charset="0"/>
+                <a:cs typeface="Arial" panose="020B0604020202020204" pitchFamily="34" charset="0"/>
+              </a:rPr>
+              <a:t>deep</a:t>
+            </a:r>
+            <a:r>
+              <a:rPr lang="es-ES_tradnl" sz="1200" dirty="0">
+                <a:latin typeface="Arial" panose="020B0604020202020204" pitchFamily="34" charset="0"/>
+                <a:cs typeface="Arial" panose="020B0604020202020204" pitchFamily="34" charset="0"/>
+              </a:rPr>
+              <a:t> tiene una D más negativa que la </a:t>
+            </a:r>
+            <a:r>
+              <a:rPr lang="es-ES_tradnl" sz="1200" dirty="0" err="1">
+                <a:latin typeface="Arial" panose="020B0604020202020204" pitchFamily="34" charset="0"/>
+                <a:cs typeface="Arial" panose="020B0604020202020204" pitchFamily="34" charset="0"/>
+              </a:rPr>
+              <a:t>shallow</a:t>
+            </a:r>
+            <a:r>
+              <a:rPr lang="es-ES_tradnl" sz="1200" dirty="0">
+                <a:latin typeface="Arial" panose="020B0604020202020204" pitchFamily="34" charset="0"/>
+                <a:cs typeface="Arial" panose="020B0604020202020204" pitchFamily="34" charset="0"/>
+              </a:rPr>
+              <a:t>. Esto se debe a que el grabado total de las paredes laterales de la guía </a:t>
+            </a:r>
+            <a:r>
+              <a:rPr lang="es-ES_tradnl" sz="1200" dirty="0" err="1">
+                <a:latin typeface="Arial" panose="020B0604020202020204" pitchFamily="34" charset="0"/>
+                <a:cs typeface="Arial" panose="020B0604020202020204" pitchFamily="34" charset="0"/>
+              </a:rPr>
+              <a:t>deep</a:t>
+            </a:r>
+            <a:r>
+              <a:rPr lang="es-ES_tradnl" sz="1200" dirty="0">
+                <a:latin typeface="Arial" panose="020B0604020202020204" pitchFamily="34" charset="0"/>
+                <a:cs typeface="Arial" panose="020B0604020202020204" pitchFamily="34" charset="0"/>
+              </a:rPr>
+              <a:t> hace que aumente la dispersión geometría, y como consecuencia aumenta la dispersión. Por otra parte, la guía </a:t>
+            </a:r>
+            <a:r>
+              <a:rPr lang="es-ES_tradnl" sz="1200" dirty="0" err="1">
+                <a:latin typeface="Arial" panose="020B0604020202020204" pitchFamily="34" charset="0"/>
+                <a:cs typeface="Arial" panose="020B0604020202020204" pitchFamily="34" charset="0"/>
+              </a:rPr>
+              <a:t>shallow</a:t>
+            </a:r>
+            <a:r>
+              <a:rPr lang="es-ES_tradnl" sz="1200" dirty="0">
+                <a:latin typeface="Arial" panose="020B0604020202020204" pitchFamily="34" charset="0"/>
+                <a:cs typeface="Arial" panose="020B0604020202020204" pitchFamily="34" charset="0"/>
+              </a:rPr>
+              <a:t>, al tener un </a:t>
+            </a:r>
+            <a:r>
+              <a:rPr lang="es-ES_tradnl" sz="1200" dirty="0" err="1">
+                <a:latin typeface="Arial" panose="020B0604020202020204" pitchFamily="34" charset="0"/>
+                <a:cs typeface="Arial" panose="020B0604020202020204" pitchFamily="34" charset="0"/>
+              </a:rPr>
+              <a:t>slab</a:t>
+            </a:r>
+            <a:r>
+              <a:rPr lang="es-ES_tradnl" sz="1200" dirty="0">
+                <a:latin typeface="Arial" panose="020B0604020202020204" pitchFamily="34" charset="0"/>
+                <a:cs typeface="Arial" panose="020B0604020202020204" pitchFamily="34" charset="0"/>
+              </a:rPr>
+              <a:t>, tiene una dispersión un poco más pequeña, ya que el </a:t>
+            </a:r>
+            <a:r>
+              <a:rPr lang="es-ES_tradnl" sz="1200" dirty="0" err="1">
+                <a:latin typeface="Arial" panose="020B0604020202020204" pitchFamily="34" charset="0"/>
+                <a:cs typeface="Arial" panose="020B0604020202020204" pitchFamily="34" charset="0"/>
+              </a:rPr>
+              <a:t>slab</a:t>
+            </a:r>
+            <a:r>
+              <a:rPr lang="es-ES_tradnl" sz="1200" dirty="0">
+                <a:latin typeface="Arial" panose="020B0604020202020204" pitchFamily="34" charset="0"/>
+                <a:cs typeface="Arial" panose="020B0604020202020204" pitchFamily="34" charset="0"/>
+              </a:rPr>
+              <a:t> hace que parte del campo se extienda lateralmente. Como consecuencia, la variación de índice efectivo se suaviza con la longitud de onda.</a:t>
+            </a:r>
+          </a:p>
+        </p:txBody>
+      </p:sp>
+      <p:sp>
+        <p:nvSpPr>
+          <p:cNvPr id="4" name="Marcador de pie de página 3">
+            <a:extLst>
+              <a:ext uri="{FF2B5EF4-FFF2-40B4-BE49-F238E27FC236}">
+                <a16:creationId xmlns:a16="http://schemas.microsoft.com/office/drawing/2014/main" id="{7E37F831-37DE-EC4E-C80A-AD5641BF89E7}"/>
+              </a:ext>
+            </a:extLst>
+          </p:cNvPr>
+          <p:cNvSpPr>
+            <a:spLocks noGrp="1"/>
+          </p:cNvSpPr>
+          <p:nvPr>
+            <p:ph type="ftr" sz="quarter" idx="5"/>
+          </p:nvPr>
+        </p:nvSpPr>
+        <p:spPr/>
+        <p:txBody>
+          <a:bodyPr/>
+          <a:lstStyle/>
+          <a:p>
+            <a:pPr marL="12700">
+              <a:spcBef>
+                <a:spcPts val="15"/>
+              </a:spcBef>
+            </a:pPr>
+            <a:r>
+              <a:rPr lang="es-ES" spc="-5"/>
+              <a:t>LAB 1.0. WAVEGUIDES</a:t>
+            </a:r>
+            <a:endParaRPr lang="es-ES" spc="-5" dirty="0"/>
+          </a:p>
+        </p:txBody>
+      </p:sp>
+      <p:sp>
+        <p:nvSpPr>
+          <p:cNvPr id="5" name="Marcador de número de diapositiva 4">
+            <a:extLst>
+              <a:ext uri="{FF2B5EF4-FFF2-40B4-BE49-F238E27FC236}">
+                <a16:creationId xmlns:a16="http://schemas.microsoft.com/office/drawing/2014/main" id="{2333D34F-D87A-D3B6-EACD-EAF65EB069AB}"/>
+              </a:ext>
+            </a:extLst>
+          </p:cNvPr>
+          <p:cNvSpPr>
+            <a:spLocks noGrp="1"/>
+          </p:cNvSpPr>
+          <p:nvPr>
+            <p:ph type="sldNum" sz="quarter" idx="7"/>
+          </p:nvPr>
+        </p:nvSpPr>
+        <p:spPr/>
+        <p:txBody>
+          <a:bodyPr/>
+          <a:lstStyle/>
+          <a:p>
+            <a:fld id="{B6F15528-21DE-4FAA-801E-634DDDAF4B2B}" type="slidenum">
+              <a:rPr lang="es-ES" smtClean="0"/>
+              <a:t>6</a:t>
+            </a:fld>
+            <a:endParaRPr lang="es-ES"/>
+          </a:p>
+        </p:txBody>
+      </p:sp>
+      <p:pic>
+        <p:nvPicPr>
+          <p:cNvPr id="6" name="Imagen 5">
+            <a:extLst>
+              <a:ext uri="{FF2B5EF4-FFF2-40B4-BE49-F238E27FC236}">
+                <a16:creationId xmlns:a16="http://schemas.microsoft.com/office/drawing/2014/main" id="{2788F4D0-5351-B696-8717-38FA725F5F91}"/>
+              </a:ext>
+            </a:extLst>
+          </p:cNvPr>
+          <p:cNvPicPr>
+            <a:picLocks noChangeAspect="1"/>
+          </p:cNvPicPr>
+          <p:nvPr/>
+        </p:nvPicPr>
+        <p:blipFill>
+          <a:blip r:embed="rId2"/>
+          <a:srcRect t="1103" b="55150"/>
+          <a:stretch/>
+        </p:blipFill>
+        <p:spPr>
+          <a:xfrm>
+            <a:off x="762000" y="3677557"/>
+            <a:ext cx="4800600" cy="627731"/>
+          </a:xfrm>
+          <a:prstGeom prst="rect">
+            <a:avLst/>
+          </a:prstGeom>
+        </p:spPr>
+      </p:pic>
+      <p:pic>
+        <p:nvPicPr>
+          <p:cNvPr id="7" name="Imagen 6">
+            <a:extLst>
+              <a:ext uri="{FF2B5EF4-FFF2-40B4-BE49-F238E27FC236}">
+                <a16:creationId xmlns:a16="http://schemas.microsoft.com/office/drawing/2014/main" id="{FF976AA6-C02E-0ECD-3228-6E427C90DA13}"/>
+              </a:ext>
+            </a:extLst>
+          </p:cNvPr>
+          <p:cNvPicPr>
+            <a:picLocks noChangeAspect="1"/>
+          </p:cNvPicPr>
+          <p:nvPr/>
+        </p:nvPicPr>
+        <p:blipFill>
+          <a:blip r:embed="rId2"/>
+          <a:srcRect t="47704"/>
+          <a:stretch/>
+        </p:blipFill>
+        <p:spPr>
+          <a:xfrm>
+            <a:off x="6309341" y="3609823"/>
+            <a:ext cx="4800600" cy="750405"/>
+          </a:xfrm>
+          <a:prstGeom prst="rect">
+            <a:avLst/>
+          </a:prstGeom>
+        </p:spPr>
+      </p:pic>
+      <p:pic>
+        <p:nvPicPr>
+          <p:cNvPr id="1026" name="Picture 2">
+            <a:extLst>
+              <a:ext uri="{FF2B5EF4-FFF2-40B4-BE49-F238E27FC236}">
+                <a16:creationId xmlns:a16="http://schemas.microsoft.com/office/drawing/2014/main" id="{983B254C-7F47-E79E-7E50-51DAB25BFECA}"/>
+              </a:ext>
+            </a:extLst>
+          </p:cNvPr>
+          <p:cNvPicPr>
+            <a:picLocks noChangeAspect="1" noChangeArrowheads="1"/>
+          </p:cNvPicPr>
+          <p:nvPr/>
+        </p:nvPicPr>
+        <p:blipFill>
+          <a:blip r:embed="rId3">
+            <a:extLst>
+              <a:ext uri="{28A0092B-C50C-407E-A947-70E740481C1C}">
+                <a14:useLocalDpi xmlns:a14="http://schemas.microsoft.com/office/drawing/2010/main" val="0"/>
+              </a:ext>
+            </a:extLst>
+          </a:blip>
+          <a:srcRect/>
+          <a:stretch>
+            <a:fillRect/>
+          </a:stretch>
+        </p:blipFill>
+        <p:spPr bwMode="auto">
+          <a:xfrm>
+            <a:off x="3733800" y="725294"/>
+            <a:ext cx="3657600" cy="2899548"/>
+          </a:xfrm>
+          <a:prstGeom prst="rect">
+            <a:avLst/>
+          </a:prstGeom>
+          <a:noFill/>
+          <a:extLst>
+            <a:ext uri="{909E8E84-426E-40DD-AFC4-6F175D3DCCD1}">
+              <a14:hiddenFill xmlns:a14="http://schemas.microsoft.com/office/drawing/2010/main">
+                <a:solidFill>
+                  <a:srgbClr val="FFFFFF"/>
+                </a:solidFill>
+              </a14:hiddenFill>
+            </a:ext>
+          </a:extLst>
+        </p:spPr>
+      </p:pic>
+    </p:spTree>
+    <p:extLst>
+      <p:ext uri="{BB962C8B-B14F-4D97-AF65-F5344CB8AC3E}">
+        <p14:creationId xmlns:p14="http://schemas.microsoft.com/office/powerpoint/2010/main" val="1670541848"/>
+      </p:ext>
+    </p:extLst>
+  </p:cSld>
+  <p:clrMapOvr>
+    <a:masterClrMapping/>
+  </p:clrMapOvr>
+</p:sld>
+</file>
+
+<file path=ppt/slides/slide7.xml><?xml version="1.0" encoding="utf-8"?>
+<p:sld xmlns:a="http://schemas.openxmlformats.org/drawingml/2006/main" xmlns:r="http://schemas.openxmlformats.org/officeDocument/2006/relationships" xmlns:p="http://schemas.openxmlformats.org/presentationml/2006/main">
+  <p:cSld>
+    <p:spTree>
+      <p:nvGrpSpPr>
         <p:cNvPr id="1" name="">
           <a:extLst>
             <a:ext uri="{FF2B5EF4-FFF2-40B4-BE49-F238E27FC236}">
@@ -9262,7 +9508,7 @@
           <a:p>
             <a:fld id="{B6F15528-21DE-4FAA-801E-634DDDAF4B2B}" type="slidenum">
               <a:rPr lang="es-ES" smtClean="0"/>
-              <a:t>6</a:t>
+              <a:t>7</a:t>
             </a:fld>
             <a:endParaRPr lang="es-ES"/>
           </a:p>
@@ -9734,7 +9980,7 @@
 </p:sld>
 </file>
 
-<file path=ppt/slides/slide7.xml><?xml version="1.0" encoding="utf-8"?>
+<file path=ppt/slides/slide8.xml><?xml version="1.0" encoding="utf-8"?>
 <p:sld xmlns:a="http://schemas.openxmlformats.org/drawingml/2006/main" xmlns:r="http://schemas.openxmlformats.org/officeDocument/2006/relationships" xmlns:p="http://schemas.openxmlformats.org/presentationml/2006/main">
   <p:cSld>
     <p:spTree>
@@ -9873,7 +10119,7 @@
           <a:p>
             <a:fld id="{B6F15528-21DE-4FAA-801E-634DDDAF4B2B}" type="slidenum">
               <a:rPr lang="es-ES" smtClean="0"/>
-              <a:t>7</a:t>
+              <a:t>8</a:t>
             </a:fld>
             <a:endParaRPr lang="es-ES"/>
           </a:p>

--- a/LabBook_10.pptx
+++ b/LabBook_10.pptx
@@ -5,10 +5,10 @@
     <p:sldMasterId id="2147483648" r:id="rId1"/>
   </p:sldMasterIdLst>
   <p:notesMasterIdLst>
-    <p:notesMasterId r:id="rId10"/>
+    <p:notesMasterId r:id="rId16"/>
   </p:notesMasterIdLst>
   <p:handoutMasterIdLst>
-    <p:handoutMasterId r:id="rId11"/>
+    <p:handoutMasterId r:id="rId17"/>
   </p:handoutMasterIdLst>
   <p:sldIdLst>
     <p:sldId id="256" r:id="rId2"/>
@@ -18,7 +18,13 @@
     <p:sldId id="297" r:id="rId6"/>
     <p:sldId id="298" r:id="rId7"/>
     <p:sldId id="293" r:id="rId8"/>
-    <p:sldId id="288" r:id="rId9"/>
+    <p:sldId id="299" r:id="rId9"/>
+    <p:sldId id="300" r:id="rId10"/>
+    <p:sldId id="301" r:id="rId11"/>
+    <p:sldId id="302" r:id="rId12"/>
+    <p:sldId id="303" r:id="rId13"/>
+    <p:sldId id="304" r:id="rId14"/>
+    <p:sldId id="288" r:id="rId15"/>
   </p:sldIdLst>
   <p:sldSz cx="12192000" cy="6858000"/>
   <p:notesSz cx="12192000" cy="6858000"/>
@@ -393,7 +399,7 @@
           <a:p>
             <a:fld id="{8438F8DC-35B0-48E6-A86E-42F1F08DD00F}" type="datetimeFigureOut">
               <a:rPr lang="es-ES" smtClean="0"/>
-              <a:t>23/2/26</a:t>
+              <a:t>04/03/2026</a:t>
             </a:fld>
             <a:endParaRPr lang="es-ES"/>
           </a:p>
@@ -570,7 +576,7 @@
           <a:p>
             <a:fld id="{FACBDC12-F39B-4B97-8F4D-6734F9D366FF}" type="datetimeFigureOut">
               <a:rPr lang="es-ES" smtClean="0"/>
-              <a:t>23/2/26</a:t>
+              <a:t>04/03/2026</a:t>
             </a:fld>
             <a:endParaRPr lang="es-ES"/>
           </a:p>
@@ -2824,6 +2830,1921 @@
             <a:fld id="{B6F15528-21DE-4FAA-801E-634DDDAF4B2B}" type="slidenum">
               <a:rPr lang="es-ES" smtClean="0"/>
               <a:t>1</a:t>
+            </a:fld>
+            <a:endParaRPr lang="es-ES"/>
+          </a:p>
+        </p:txBody>
+      </p:sp>
+    </p:spTree>
+  </p:cSld>
+  <p:clrMapOvr>
+    <a:masterClrMapping/>
+  </p:clrMapOvr>
+</p:sld>
+</file>
+
+<file path=ppt/slides/slide10.xml><?xml version="1.0" encoding="utf-8"?>
+<p:sld xmlns:a="http://schemas.openxmlformats.org/drawingml/2006/main" xmlns:r="http://schemas.openxmlformats.org/officeDocument/2006/relationships" xmlns:p="http://schemas.openxmlformats.org/presentationml/2006/main">
+  <p:cSld>
+    <p:spTree>
+      <p:nvGrpSpPr>
+        <p:cNvPr id="1" name=""/>
+        <p:cNvGrpSpPr/>
+        <p:nvPr/>
+      </p:nvGrpSpPr>
+      <p:grpSpPr>
+        <a:xfrm>
+          <a:off x="0" y="0"/>
+          <a:ext cx="0" cy="0"/>
+          <a:chOff x="0" y="0"/>
+          <a:chExt cx="0" cy="0"/>
+        </a:xfrm>
+      </p:grpSpPr>
+      <p:sp>
+        <p:nvSpPr>
+          <p:cNvPr id="2" name="Título 1">
+            <a:extLst>
+              <a:ext uri="{FF2B5EF4-FFF2-40B4-BE49-F238E27FC236}">
+                <a16:creationId xmlns:a16="http://schemas.microsoft.com/office/drawing/2014/main" id="{53DF7315-348C-4DEC-B0BE-A6990045DA6D}"/>
+              </a:ext>
+            </a:extLst>
+          </p:cNvPr>
+          <p:cNvSpPr>
+            <a:spLocks noGrp="1"/>
+          </p:cNvSpPr>
+          <p:nvPr>
+            <p:ph type="title"/>
+          </p:nvPr>
+        </p:nvSpPr>
+        <p:spPr>
+          <a:xfrm>
+            <a:off x="590550" y="206752"/>
+            <a:ext cx="10991850" cy="307777"/>
+          </a:xfrm>
+        </p:spPr>
+        <p:txBody>
+          <a:bodyPr/>
+          <a:lstStyle/>
+          <a:p>
+            <a:r>
+              <a:rPr lang="en-US" u="sng" dirty="0"/>
+              <a:t>EXTRA EXERCISES</a:t>
+            </a:r>
+            <a:endParaRPr lang="es-ES" u="sng" dirty="0"/>
+          </a:p>
+        </p:txBody>
+      </p:sp>
+      <p:sp>
+        <p:nvSpPr>
+          <p:cNvPr id="4" name="Marcador de pie de página 3">
+            <a:extLst>
+              <a:ext uri="{FF2B5EF4-FFF2-40B4-BE49-F238E27FC236}">
+                <a16:creationId xmlns:a16="http://schemas.microsoft.com/office/drawing/2014/main" id="{7CB309BB-93C1-466F-B99A-12BF31408A91}"/>
+              </a:ext>
+            </a:extLst>
+          </p:cNvPr>
+          <p:cNvSpPr>
+            <a:spLocks noGrp="1"/>
+          </p:cNvSpPr>
+          <p:nvPr>
+            <p:ph type="ftr" sz="quarter" idx="5"/>
+          </p:nvPr>
+        </p:nvSpPr>
+        <p:spPr/>
+        <p:txBody>
+          <a:bodyPr/>
+          <a:lstStyle/>
+          <a:p>
+            <a:pPr marL="12700">
+              <a:spcBef>
+                <a:spcPts val="15"/>
+              </a:spcBef>
+            </a:pPr>
+            <a:r>
+              <a:rPr lang="es-ES" spc="-5"/>
+              <a:t>LAB 1.0. WAVEGUIDES</a:t>
+            </a:r>
+            <a:endParaRPr lang="es-ES" spc="-5" dirty="0"/>
+          </a:p>
+        </p:txBody>
+      </p:sp>
+      <p:sp>
+        <p:nvSpPr>
+          <p:cNvPr id="5" name="Marcador de número de diapositiva 4">
+            <a:extLst>
+              <a:ext uri="{FF2B5EF4-FFF2-40B4-BE49-F238E27FC236}">
+                <a16:creationId xmlns:a16="http://schemas.microsoft.com/office/drawing/2014/main" id="{9C197467-2935-49B4-A909-C9E9BFEE333E}"/>
+              </a:ext>
+            </a:extLst>
+          </p:cNvPr>
+          <p:cNvSpPr>
+            <a:spLocks noGrp="1"/>
+          </p:cNvSpPr>
+          <p:nvPr>
+            <p:ph type="sldNum" sz="quarter" idx="7"/>
+          </p:nvPr>
+        </p:nvSpPr>
+        <p:spPr/>
+        <p:txBody>
+          <a:bodyPr/>
+          <a:lstStyle/>
+          <a:p>
+            <a:fld id="{B6F15528-21DE-4FAA-801E-634DDDAF4B2B}" type="slidenum">
+              <a:rPr lang="es-ES" smtClean="0"/>
+              <a:t>10</a:t>
+            </a:fld>
+            <a:endParaRPr lang="es-ES"/>
+          </a:p>
+        </p:txBody>
+      </p:sp>
+      <p:sp>
+        <p:nvSpPr>
+          <p:cNvPr id="10" name="Título 1">
+            <a:extLst>
+              <a:ext uri="{FF2B5EF4-FFF2-40B4-BE49-F238E27FC236}">
+                <a16:creationId xmlns:a16="http://schemas.microsoft.com/office/drawing/2014/main" id="{767FE45B-5CEE-45CD-AC79-25FB89879217}"/>
+              </a:ext>
+            </a:extLst>
+          </p:cNvPr>
+          <p:cNvSpPr txBox="1">
+            <a:spLocks/>
+          </p:cNvSpPr>
+          <p:nvPr/>
+        </p:nvSpPr>
+        <p:spPr>
+          <a:xfrm>
+            <a:off x="590550" y="560189"/>
+            <a:ext cx="10991850" cy="615553"/>
+          </a:xfrm>
+          <a:prstGeom prst="rect">
+            <a:avLst/>
+          </a:prstGeom>
+        </p:spPr>
+        <p:txBody>
+          <a:bodyPr wrap="square" lIns="0" tIns="0" rIns="0" bIns="0">
+            <a:spAutoFit/>
+          </a:bodyPr>
+          <a:lstStyle>
+            <a:lvl1pPr>
+              <a:defRPr sz="2000" b="1" i="0">
+                <a:solidFill>
+                  <a:schemeClr val="tx1"/>
+                </a:solidFill>
+                <a:latin typeface="Calibri"/>
+                <a:ea typeface="+mj-ea"/>
+                <a:cs typeface="Calibri"/>
+              </a:defRPr>
+            </a:lvl1pPr>
+          </a:lstStyle>
+          <a:p>
+            <a:r>
+              <a:rPr lang="en-US" kern="0" dirty="0"/>
+              <a:t>1. Repeat the LO.1. wavelength behavior simulations, considering the updated materials and dimensions. </a:t>
+            </a:r>
+            <a:endParaRPr lang="es-ES" kern="0" dirty="0"/>
+          </a:p>
+        </p:txBody>
+      </p:sp>
+      <p:pic>
+        <p:nvPicPr>
+          <p:cNvPr id="12" name="Imagen 11">
+            <a:extLst>
+              <a:ext uri="{FF2B5EF4-FFF2-40B4-BE49-F238E27FC236}">
+                <a16:creationId xmlns:a16="http://schemas.microsoft.com/office/drawing/2014/main" id="{E3822B9E-A299-47F4-A8D7-6E324A496E38}"/>
+              </a:ext>
+            </a:extLst>
+          </p:cNvPr>
+          <p:cNvPicPr>
+            <a:picLocks noChangeAspect="1"/>
+          </p:cNvPicPr>
+          <p:nvPr/>
+        </p:nvPicPr>
+        <p:blipFill>
+          <a:blip r:embed="rId2"/>
+          <a:stretch>
+            <a:fillRect/>
+          </a:stretch>
+        </p:blipFill>
+        <p:spPr>
+          <a:xfrm>
+            <a:off x="6840086" y="1603200"/>
+            <a:ext cx="2994280" cy="2365273"/>
+          </a:xfrm>
+          <a:prstGeom prst="rect">
+            <a:avLst/>
+          </a:prstGeom>
+        </p:spPr>
+      </p:pic>
+      <p:pic>
+        <p:nvPicPr>
+          <p:cNvPr id="14" name="Imagen 13">
+            <a:extLst>
+              <a:ext uri="{FF2B5EF4-FFF2-40B4-BE49-F238E27FC236}">
+                <a16:creationId xmlns:a16="http://schemas.microsoft.com/office/drawing/2014/main" id="{8160718F-5644-4C8A-AACE-FDAA995FB504}"/>
+              </a:ext>
+            </a:extLst>
+          </p:cNvPr>
+          <p:cNvPicPr>
+            <a:picLocks noChangeAspect="1"/>
+          </p:cNvPicPr>
+          <p:nvPr/>
+        </p:nvPicPr>
+        <p:blipFill>
+          <a:blip r:embed="rId3"/>
+          <a:stretch>
+            <a:fillRect/>
+          </a:stretch>
+        </p:blipFill>
+        <p:spPr>
+          <a:xfrm>
+            <a:off x="6840086" y="3827024"/>
+            <a:ext cx="2994280" cy="2365273"/>
+          </a:xfrm>
+          <a:prstGeom prst="rect">
+            <a:avLst/>
+          </a:prstGeom>
+        </p:spPr>
+      </p:pic>
+      <p:pic>
+        <p:nvPicPr>
+          <p:cNvPr id="15" name="Imagen 14">
+            <a:extLst>
+              <a:ext uri="{FF2B5EF4-FFF2-40B4-BE49-F238E27FC236}">
+                <a16:creationId xmlns:a16="http://schemas.microsoft.com/office/drawing/2014/main" id="{93ED8E60-C140-4C24-BA5C-39FF14A1E412}"/>
+              </a:ext>
+            </a:extLst>
+          </p:cNvPr>
+          <p:cNvPicPr>
+            <a:picLocks noChangeAspect="1"/>
+          </p:cNvPicPr>
+          <p:nvPr/>
+        </p:nvPicPr>
+        <p:blipFill>
+          <a:blip r:embed="rId4"/>
+          <a:stretch>
+            <a:fillRect/>
+          </a:stretch>
+        </p:blipFill>
+        <p:spPr>
+          <a:xfrm>
+            <a:off x="1922914" y="1603200"/>
+            <a:ext cx="2953886" cy="2297467"/>
+          </a:xfrm>
+          <a:prstGeom prst="rect">
+            <a:avLst/>
+          </a:prstGeom>
+        </p:spPr>
+      </p:pic>
+      <p:pic>
+        <p:nvPicPr>
+          <p:cNvPr id="16" name="Imagen 15">
+            <a:extLst>
+              <a:ext uri="{FF2B5EF4-FFF2-40B4-BE49-F238E27FC236}">
+                <a16:creationId xmlns:a16="http://schemas.microsoft.com/office/drawing/2014/main" id="{2DD75B9B-6D09-40E6-9CA2-A453F5727E3B}"/>
+              </a:ext>
+            </a:extLst>
+          </p:cNvPr>
+          <p:cNvPicPr>
+            <a:picLocks noChangeAspect="1"/>
+          </p:cNvPicPr>
+          <p:nvPr/>
+        </p:nvPicPr>
+        <p:blipFill>
+          <a:blip r:embed="rId5"/>
+          <a:stretch>
+            <a:fillRect/>
+          </a:stretch>
+        </p:blipFill>
+        <p:spPr>
+          <a:xfrm>
+            <a:off x="1849938" y="3844400"/>
+            <a:ext cx="2994281" cy="2297467"/>
+          </a:xfrm>
+          <a:prstGeom prst="rect">
+            <a:avLst/>
+          </a:prstGeom>
+        </p:spPr>
+      </p:pic>
+      <p:sp>
+        <p:nvSpPr>
+          <p:cNvPr id="19" name="CuadroTexto 18">
+            <a:extLst>
+              <a:ext uri="{FF2B5EF4-FFF2-40B4-BE49-F238E27FC236}">
+                <a16:creationId xmlns:a16="http://schemas.microsoft.com/office/drawing/2014/main" id="{E1CED8DD-47FB-44FE-9165-B8AD37A784AF}"/>
+              </a:ext>
+            </a:extLst>
+          </p:cNvPr>
+          <p:cNvSpPr txBox="1"/>
+          <p:nvPr/>
+        </p:nvSpPr>
+        <p:spPr>
+          <a:xfrm>
+            <a:off x="3042385" y="1127298"/>
+            <a:ext cx="714943" cy="369332"/>
+          </a:xfrm>
+          <a:prstGeom prst="rect">
+            <a:avLst/>
+          </a:prstGeom>
+          <a:noFill/>
+        </p:spPr>
+        <p:txBody>
+          <a:bodyPr wrap="square" rtlCol="0">
+            <a:spAutoFit/>
+          </a:bodyPr>
+          <a:lstStyle/>
+          <a:p>
+            <a:pPr algn="ctr"/>
+            <a:r>
+              <a:rPr lang="es-ES" b="1" dirty="0" err="1"/>
+              <a:t>SiNx</a:t>
+            </a:r>
+            <a:endParaRPr lang="es-ES" b="1" dirty="0"/>
+          </a:p>
+        </p:txBody>
+      </p:sp>
+      <p:sp>
+        <p:nvSpPr>
+          <p:cNvPr id="20" name="CuadroTexto 19">
+            <a:extLst>
+              <a:ext uri="{FF2B5EF4-FFF2-40B4-BE49-F238E27FC236}">
+                <a16:creationId xmlns:a16="http://schemas.microsoft.com/office/drawing/2014/main" id="{6FFA4C21-0303-4CD2-AFBA-587E5CD85F8C}"/>
+              </a:ext>
+            </a:extLst>
+          </p:cNvPr>
+          <p:cNvSpPr txBox="1"/>
+          <p:nvPr/>
+        </p:nvSpPr>
+        <p:spPr>
+          <a:xfrm>
+            <a:off x="7979754" y="1127298"/>
+            <a:ext cx="714943" cy="369332"/>
+          </a:xfrm>
+          <a:prstGeom prst="rect">
+            <a:avLst/>
+          </a:prstGeom>
+          <a:noFill/>
+        </p:spPr>
+        <p:txBody>
+          <a:bodyPr wrap="square" rtlCol="0">
+            <a:spAutoFit/>
+          </a:bodyPr>
+          <a:lstStyle/>
+          <a:p>
+            <a:pPr algn="ctr"/>
+            <a:r>
+              <a:rPr lang="es-ES" b="1" dirty="0"/>
+              <a:t>SOI</a:t>
+            </a:r>
+          </a:p>
+        </p:txBody>
+      </p:sp>
+    </p:spTree>
+    <p:extLst>
+      <p:ext uri="{BB962C8B-B14F-4D97-AF65-F5344CB8AC3E}">
+        <p14:creationId xmlns:p14="http://schemas.microsoft.com/office/powerpoint/2010/main" val="2869963321"/>
+      </p:ext>
+    </p:extLst>
+  </p:cSld>
+  <p:clrMapOvr>
+    <a:masterClrMapping/>
+  </p:clrMapOvr>
+</p:sld>
+</file>
+
+<file path=ppt/slides/slide11.xml><?xml version="1.0" encoding="utf-8"?>
+<p:sld xmlns:a="http://schemas.openxmlformats.org/drawingml/2006/main" xmlns:r="http://schemas.openxmlformats.org/officeDocument/2006/relationships" xmlns:p="http://schemas.openxmlformats.org/presentationml/2006/main">
+  <p:cSld>
+    <p:spTree>
+      <p:nvGrpSpPr>
+        <p:cNvPr id="1" name=""/>
+        <p:cNvGrpSpPr/>
+        <p:nvPr/>
+      </p:nvGrpSpPr>
+      <p:grpSpPr>
+        <a:xfrm>
+          <a:off x="0" y="0"/>
+          <a:ext cx="0" cy="0"/>
+          <a:chOff x="0" y="0"/>
+          <a:chExt cx="0" cy="0"/>
+        </a:xfrm>
+      </p:grpSpPr>
+      <p:sp>
+        <p:nvSpPr>
+          <p:cNvPr id="2" name="Título 1">
+            <a:extLst>
+              <a:ext uri="{FF2B5EF4-FFF2-40B4-BE49-F238E27FC236}">
+                <a16:creationId xmlns:a16="http://schemas.microsoft.com/office/drawing/2014/main" id="{CF56BE25-EC0B-4C94-B233-66A1360E4571}"/>
+              </a:ext>
+            </a:extLst>
+          </p:cNvPr>
+          <p:cNvSpPr>
+            <a:spLocks noGrp="1"/>
+          </p:cNvSpPr>
+          <p:nvPr>
+            <p:ph type="title"/>
+          </p:nvPr>
+        </p:nvSpPr>
+        <p:spPr/>
+        <p:txBody>
+          <a:bodyPr/>
+          <a:lstStyle/>
+          <a:p>
+            <a:r>
+              <a:rPr lang="en-US" dirty="0"/>
+              <a:t>2. Repeat the LO.2. width dependence analysis, now sweeping in a 300nm - 1um range. </a:t>
+            </a:r>
+            <a:endParaRPr lang="es-ES" dirty="0"/>
+          </a:p>
+        </p:txBody>
+      </p:sp>
+      <p:sp>
+        <p:nvSpPr>
+          <p:cNvPr id="3" name="Marcador de texto 2">
+            <a:extLst>
+              <a:ext uri="{FF2B5EF4-FFF2-40B4-BE49-F238E27FC236}">
+                <a16:creationId xmlns:a16="http://schemas.microsoft.com/office/drawing/2014/main" id="{C6F929DE-2303-44AD-9A2D-C4AD0C6A9616}"/>
+              </a:ext>
+            </a:extLst>
+          </p:cNvPr>
+          <p:cNvSpPr>
+            <a:spLocks noGrp="1"/>
+          </p:cNvSpPr>
+          <p:nvPr>
+            <p:ph type="body" idx="1"/>
+          </p:nvPr>
+        </p:nvSpPr>
+        <p:spPr>
+          <a:xfrm>
+            <a:off x="609600" y="4419600"/>
+            <a:ext cx="10972800" cy="1684020"/>
+          </a:xfrm>
+        </p:spPr>
+        <p:txBody>
+          <a:bodyPr/>
+          <a:lstStyle/>
+          <a:p>
+            <a:endParaRPr lang="es-ES" dirty="0"/>
+          </a:p>
+        </p:txBody>
+      </p:sp>
+      <p:sp>
+        <p:nvSpPr>
+          <p:cNvPr id="4" name="Marcador de pie de página 3">
+            <a:extLst>
+              <a:ext uri="{FF2B5EF4-FFF2-40B4-BE49-F238E27FC236}">
+                <a16:creationId xmlns:a16="http://schemas.microsoft.com/office/drawing/2014/main" id="{46A970DD-A35D-460C-A5FA-862864B2C6D2}"/>
+              </a:ext>
+            </a:extLst>
+          </p:cNvPr>
+          <p:cNvSpPr>
+            <a:spLocks noGrp="1"/>
+          </p:cNvSpPr>
+          <p:nvPr>
+            <p:ph type="ftr" sz="quarter" idx="5"/>
+          </p:nvPr>
+        </p:nvSpPr>
+        <p:spPr/>
+        <p:txBody>
+          <a:bodyPr/>
+          <a:lstStyle/>
+          <a:p>
+            <a:pPr marL="12700">
+              <a:spcBef>
+                <a:spcPts val="15"/>
+              </a:spcBef>
+            </a:pPr>
+            <a:r>
+              <a:rPr lang="es-ES" spc="-5"/>
+              <a:t>LAB 1.0. WAVEGUIDES</a:t>
+            </a:r>
+            <a:endParaRPr lang="es-ES" spc="-5" dirty="0"/>
+          </a:p>
+        </p:txBody>
+      </p:sp>
+      <p:sp>
+        <p:nvSpPr>
+          <p:cNvPr id="5" name="Marcador de número de diapositiva 4">
+            <a:extLst>
+              <a:ext uri="{FF2B5EF4-FFF2-40B4-BE49-F238E27FC236}">
+                <a16:creationId xmlns:a16="http://schemas.microsoft.com/office/drawing/2014/main" id="{F18F8E7C-FF2C-4C50-99EA-809558B785D9}"/>
+              </a:ext>
+            </a:extLst>
+          </p:cNvPr>
+          <p:cNvSpPr>
+            <a:spLocks noGrp="1"/>
+          </p:cNvSpPr>
+          <p:nvPr>
+            <p:ph type="sldNum" sz="quarter" idx="7"/>
+          </p:nvPr>
+        </p:nvSpPr>
+        <p:spPr/>
+        <p:txBody>
+          <a:bodyPr/>
+          <a:lstStyle/>
+          <a:p>
+            <a:fld id="{B6F15528-21DE-4FAA-801E-634DDDAF4B2B}" type="slidenum">
+              <a:rPr lang="es-ES" smtClean="0"/>
+              <a:t>11</a:t>
+            </a:fld>
+            <a:endParaRPr lang="es-ES"/>
+          </a:p>
+        </p:txBody>
+      </p:sp>
+      <p:pic>
+        <p:nvPicPr>
+          <p:cNvPr id="6" name="Imagen 5">
+            <a:extLst>
+              <a:ext uri="{FF2B5EF4-FFF2-40B4-BE49-F238E27FC236}">
+                <a16:creationId xmlns:a16="http://schemas.microsoft.com/office/drawing/2014/main" id="{89EB951E-B859-42C0-846A-EE8B11364D3A}"/>
+              </a:ext>
+            </a:extLst>
+          </p:cNvPr>
+          <p:cNvPicPr>
+            <a:picLocks noChangeAspect="1"/>
+          </p:cNvPicPr>
+          <p:nvPr/>
+        </p:nvPicPr>
+        <p:blipFill>
+          <a:blip r:embed="rId2"/>
+          <a:stretch>
+            <a:fillRect/>
+          </a:stretch>
+        </p:blipFill>
+        <p:spPr>
+          <a:xfrm>
+            <a:off x="819150" y="1247272"/>
+            <a:ext cx="4978173" cy="2898008"/>
+          </a:xfrm>
+          <a:prstGeom prst="rect">
+            <a:avLst/>
+          </a:prstGeom>
+        </p:spPr>
+      </p:pic>
+      <p:pic>
+        <p:nvPicPr>
+          <p:cNvPr id="10" name="Imagen 9">
+            <a:extLst>
+              <a:ext uri="{FF2B5EF4-FFF2-40B4-BE49-F238E27FC236}">
+                <a16:creationId xmlns:a16="http://schemas.microsoft.com/office/drawing/2014/main" id="{4305327A-1C7C-4DD3-8B62-0A5C4E080F09}"/>
+              </a:ext>
+            </a:extLst>
+          </p:cNvPr>
+          <p:cNvPicPr>
+            <a:picLocks noChangeAspect="1"/>
+          </p:cNvPicPr>
+          <p:nvPr/>
+        </p:nvPicPr>
+        <p:blipFill>
+          <a:blip r:embed="rId3"/>
+          <a:stretch>
+            <a:fillRect/>
+          </a:stretch>
+        </p:blipFill>
+        <p:spPr>
+          <a:xfrm>
+            <a:off x="6400800" y="1247272"/>
+            <a:ext cx="4978173" cy="2898008"/>
+          </a:xfrm>
+          <a:prstGeom prst="rect">
+            <a:avLst/>
+          </a:prstGeom>
+        </p:spPr>
+      </p:pic>
+      <p:sp>
+        <p:nvSpPr>
+          <p:cNvPr id="11" name="CuadroTexto 10">
+            <a:extLst>
+              <a:ext uri="{FF2B5EF4-FFF2-40B4-BE49-F238E27FC236}">
+                <a16:creationId xmlns:a16="http://schemas.microsoft.com/office/drawing/2014/main" id="{19325A31-46A6-4398-81D6-885EBAD863FD}"/>
+              </a:ext>
+            </a:extLst>
+          </p:cNvPr>
+          <p:cNvSpPr txBox="1"/>
+          <p:nvPr/>
+        </p:nvSpPr>
+        <p:spPr>
+          <a:xfrm>
+            <a:off x="2743200" y="764855"/>
+            <a:ext cx="714943" cy="369332"/>
+          </a:xfrm>
+          <a:prstGeom prst="rect">
+            <a:avLst/>
+          </a:prstGeom>
+          <a:noFill/>
+        </p:spPr>
+        <p:txBody>
+          <a:bodyPr wrap="square" rtlCol="0">
+            <a:spAutoFit/>
+          </a:bodyPr>
+          <a:lstStyle/>
+          <a:p>
+            <a:pPr algn="ctr"/>
+            <a:r>
+              <a:rPr lang="es-ES" b="1" dirty="0" err="1"/>
+              <a:t>SiNx</a:t>
+            </a:r>
+            <a:endParaRPr lang="es-ES" b="1" dirty="0"/>
+          </a:p>
+        </p:txBody>
+      </p:sp>
+      <p:sp>
+        <p:nvSpPr>
+          <p:cNvPr id="12" name="CuadroTexto 11">
+            <a:extLst>
+              <a:ext uri="{FF2B5EF4-FFF2-40B4-BE49-F238E27FC236}">
+                <a16:creationId xmlns:a16="http://schemas.microsoft.com/office/drawing/2014/main" id="{BF85ECDB-7570-49A2-8C15-330B84627778}"/>
+              </a:ext>
+            </a:extLst>
+          </p:cNvPr>
+          <p:cNvSpPr txBox="1"/>
+          <p:nvPr/>
+        </p:nvSpPr>
+        <p:spPr>
+          <a:xfrm>
+            <a:off x="8532414" y="762500"/>
+            <a:ext cx="714943" cy="369332"/>
+          </a:xfrm>
+          <a:prstGeom prst="rect">
+            <a:avLst/>
+          </a:prstGeom>
+          <a:noFill/>
+        </p:spPr>
+        <p:txBody>
+          <a:bodyPr wrap="square" rtlCol="0">
+            <a:spAutoFit/>
+          </a:bodyPr>
+          <a:lstStyle/>
+          <a:p>
+            <a:pPr algn="ctr"/>
+            <a:r>
+              <a:rPr lang="es-ES" b="1" dirty="0"/>
+              <a:t>SOI</a:t>
+            </a:r>
+          </a:p>
+        </p:txBody>
+      </p:sp>
+    </p:spTree>
+    <p:extLst>
+      <p:ext uri="{BB962C8B-B14F-4D97-AF65-F5344CB8AC3E}">
+        <p14:creationId xmlns:p14="http://schemas.microsoft.com/office/powerpoint/2010/main" val="119383740"/>
+      </p:ext>
+    </p:extLst>
+  </p:cSld>
+  <p:clrMapOvr>
+    <a:masterClrMapping/>
+  </p:clrMapOvr>
+</p:sld>
+</file>
+
+<file path=ppt/slides/slide12.xml><?xml version="1.0" encoding="utf-8"?>
+<p:sld xmlns:a="http://schemas.openxmlformats.org/drawingml/2006/main" xmlns:r="http://schemas.openxmlformats.org/officeDocument/2006/relationships" xmlns:p="http://schemas.openxmlformats.org/presentationml/2006/main">
+  <p:cSld>
+    <p:spTree>
+      <p:nvGrpSpPr>
+        <p:cNvPr id="1" name=""/>
+        <p:cNvGrpSpPr/>
+        <p:nvPr/>
+      </p:nvGrpSpPr>
+      <p:grpSpPr>
+        <a:xfrm>
+          <a:off x="0" y="0"/>
+          <a:ext cx="0" cy="0"/>
+          <a:chOff x="0" y="0"/>
+          <a:chExt cx="0" cy="0"/>
+        </a:xfrm>
+      </p:grpSpPr>
+      <p:sp>
+        <p:nvSpPr>
+          <p:cNvPr id="2" name="Título 1">
+            <a:extLst>
+              <a:ext uri="{FF2B5EF4-FFF2-40B4-BE49-F238E27FC236}">
+                <a16:creationId xmlns:a16="http://schemas.microsoft.com/office/drawing/2014/main" id="{E65D5F59-2192-47F2-854B-1FA39D4DE720}"/>
+              </a:ext>
+            </a:extLst>
+          </p:cNvPr>
+          <p:cNvSpPr>
+            <a:spLocks noGrp="1"/>
+          </p:cNvSpPr>
+          <p:nvPr>
+            <p:ph type="title"/>
+          </p:nvPr>
+        </p:nvSpPr>
+        <p:spPr/>
+        <p:txBody>
+          <a:bodyPr/>
+          <a:lstStyle/>
+          <a:p>
+            <a:r>
+              <a:rPr lang="en-US" dirty="0"/>
+              <a:t>3. Find the safe radius for this technology. Consider sweeping the radius in a 5um to 30um range. </a:t>
+            </a:r>
+            <a:endParaRPr lang="es-ES" dirty="0"/>
+          </a:p>
+        </p:txBody>
+      </p:sp>
+      <p:sp>
+        <p:nvSpPr>
+          <p:cNvPr id="4" name="Marcador de pie de página 3">
+            <a:extLst>
+              <a:ext uri="{FF2B5EF4-FFF2-40B4-BE49-F238E27FC236}">
+                <a16:creationId xmlns:a16="http://schemas.microsoft.com/office/drawing/2014/main" id="{31E7DA9E-A8F4-4743-BC2D-DED943DCC65E}"/>
+              </a:ext>
+            </a:extLst>
+          </p:cNvPr>
+          <p:cNvSpPr>
+            <a:spLocks noGrp="1"/>
+          </p:cNvSpPr>
+          <p:nvPr>
+            <p:ph type="ftr" sz="quarter" idx="5"/>
+          </p:nvPr>
+        </p:nvSpPr>
+        <p:spPr/>
+        <p:txBody>
+          <a:bodyPr/>
+          <a:lstStyle/>
+          <a:p>
+            <a:pPr marL="12700">
+              <a:spcBef>
+                <a:spcPts val="15"/>
+              </a:spcBef>
+            </a:pPr>
+            <a:r>
+              <a:rPr lang="es-ES" spc="-5"/>
+              <a:t>LAB 1.0. WAVEGUIDES</a:t>
+            </a:r>
+            <a:endParaRPr lang="es-ES" spc="-5" dirty="0"/>
+          </a:p>
+        </p:txBody>
+      </p:sp>
+      <p:sp>
+        <p:nvSpPr>
+          <p:cNvPr id="5" name="Marcador de número de diapositiva 4">
+            <a:extLst>
+              <a:ext uri="{FF2B5EF4-FFF2-40B4-BE49-F238E27FC236}">
+                <a16:creationId xmlns:a16="http://schemas.microsoft.com/office/drawing/2014/main" id="{654D4401-B60A-4558-A201-A505E182615F}"/>
+              </a:ext>
+            </a:extLst>
+          </p:cNvPr>
+          <p:cNvSpPr>
+            <a:spLocks noGrp="1"/>
+          </p:cNvSpPr>
+          <p:nvPr>
+            <p:ph type="sldNum" sz="quarter" idx="7"/>
+          </p:nvPr>
+        </p:nvSpPr>
+        <p:spPr/>
+        <p:txBody>
+          <a:bodyPr/>
+          <a:lstStyle/>
+          <a:p>
+            <a:fld id="{B6F15528-21DE-4FAA-801E-634DDDAF4B2B}" type="slidenum">
+              <a:rPr lang="es-ES" smtClean="0"/>
+              <a:t>12</a:t>
+            </a:fld>
+            <a:endParaRPr lang="es-ES"/>
+          </a:p>
+        </p:txBody>
+      </p:sp>
+      <p:pic>
+        <p:nvPicPr>
+          <p:cNvPr id="7" name="Imagen 6">
+            <a:extLst>
+              <a:ext uri="{FF2B5EF4-FFF2-40B4-BE49-F238E27FC236}">
+                <a16:creationId xmlns:a16="http://schemas.microsoft.com/office/drawing/2014/main" id="{FF538905-6877-4030-A77A-17E028116AF7}"/>
+              </a:ext>
+            </a:extLst>
+          </p:cNvPr>
+          <p:cNvPicPr>
+            <a:picLocks noChangeAspect="1"/>
+          </p:cNvPicPr>
+          <p:nvPr/>
+        </p:nvPicPr>
+        <p:blipFill>
+          <a:blip r:embed="rId2"/>
+          <a:stretch>
+            <a:fillRect/>
+          </a:stretch>
+        </p:blipFill>
+        <p:spPr>
+          <a:xfrm>
+            <a:off x="1528165" y="3705644"/>
+            <a:ext cx="3087510" cy="2477632"/>
+          </a:xfrm>
+          <a:prstGeom prst="rect">
+            <a:avLst/>
+          </a:prstGeom>
+        </p:spPr>
+      </p:pic>
+      <p:pic>
+        <p:nvPicPr>
+          <p:cNvPr id="9" name="Imagen 8">
+            <a:extLst>
+              <a:ext uri="{FF2B5EF4-FFF2-40B4-BE49-F238E27FC236}">
+                <a16:creationId xmlns:a16="http://schemas.microsoft.com/office/drawing/2014/main" id="{7F54C6F4-1C5A-4C15-8070-96AFC1B1B47C}"/>
+              </a:ext>
+            </a:extLst>
+          </p:cNvPr>
+          <p:cNvPicPr>
+            <a:picLocks noChangeAspect="1"/>
+          </p:cNvPicPr>
+          <p:nvPr/>
+        </p:nvPicPr>
+        <p:blipFill>
+          <a:blip r:embed="rId3"/>
+          <a:stretch>
+            <a:fillRect/>
+          </a:stretch>
+        </p:blipFill>
+        <p:spPr>
+          <a:xfrm>
+            <a:off x="4648200" y="3733800"/>
+            <a:ext cx="3620911" cy="2431183"/>
+          </a:xfrm>
+          <a:prstGeom prst="rect">
+            <a:avLst/>
+          </a:prstGeom>
+        </p:spPr>
+      </p:pic>
+      <p:pic>
+        <p:nvPicPr>
+          <p:cNvPr id="11" name="Imagen 10">
+            <a:extLst>
+              <a:ext uri="{FF2B5EF4-FFF2-40B4-BE49-F238E27FC236}">
+                <a16:creationId xmlns:a16="http://schemas.microsoft.com/office/drawing/2014/main" id="{23E6A83C-2131-4475-8886-B7A49F0D7BC1}"/>
+              </a:ext>
+            </a:extLst>
+          </p:cNvPr>
+          <p:cNvPicPr>
+            <a:picLocks noChangeAspect="1"/>
+          </p:cNvPicPr>
+          <p:nvPr/>
+        </p:nvPicPr>
+        <p:blipFill>
+          <a:blip r:embed="rId4"/>
+          <a:stretch>
+            <a:fillRect/>
+          </a:stretch>
+        </p:blipFill>
+        <p:spPr>
+          <a:xfrm>
+            <a:off x="8301636" y="3734602"/>
+            <a:ext cx="3620911" cy="2448674"/>
+          </a:xfrm>
+          <a:prstGeom prst="rect">
+            <a:avLst/>
+          </a:prstGeom>
+        </p:spPr>
+      </p:pic>
+      <p:pic>
+        <p:nvPicPr>
+          <p:cNvPr id="12" name="Imagen 11">
+            <a:extLst>
+              <a:ext uri="{FF2B5EF4-FFF2-40B4-BE49-F238E27FC236}">
+                <a16:creationId xmlns:a16="http://schemas.microsoft.com/office/drawing/2014/main" id="{93DBABFF-2D52-40A9-9786-651F806B9608}"/>
+              </a:ext>
+            </a:extLst>
+          </p:cNvPr>
+          <p:cNvPicPr>
+            <a:picLocks noChangeAspect="1"/>
+          </p:cNvPicPr>
+          <p:nvPr/>
+        </p:nvPicPr>
+        <p:blipFill>
+          <a:blip r:embed="rId5"/>
+          <a:stretch>
+            <a:fillRect/>
+          </a:stretch>
+        </p:blipFill>
+        <p:spPr>
+          <a:xfrm>
+            <a:off x="1528165" y="1016443"/>
+            <a:ext cx="3077718" cy="2431183"/>
+          </a:xfrm>
+          <a:prstGeom prst="rect">
+            <a:avLst/>
+          </a:prstGeom>
+        </p:spPr>
+      </p:pic>
+      <p:pic>
+        <p:nvPicPr>
+          <p:cNvPr id="13" name="Imagen 12">
+            <a:extLst>
+              <a:ext uri="{FF2B5EF4-FFF2-40B4-BE49-F238E27FC236}">
+                <a16:creationId xmlns:a16="http://schemas.microsoft.com/office/drawing/2014/main" id="{EFF9D476-B78E-4B5D-8DB8-5F421778A9F1}"/>
+              </a:ext>
+            </a:extLst>
+          </p:cNvPr>
+          <p:cNvPicPr>
+            <a:picLocks noChangeAspect="1"/>
+          </p:cNvPicPr>
+          <p:nvPr/>
+        </p:nvPicPr>
+        <p:blipFill>
+          <a:blip r:embed="rId6"/>
+          <a:stretch>
+            <a:fillRect/>
+          </a:stretch>
+        </p:blipFill>
+        <p:spPr>
+          <a:xfrm>
+            <a:off x="4648199" y="1016443"/>
+            <a:ext cx="3620911" cy="2431183"/>
+          </a:xfrm>
+          <a:prstGeom prst="rect">
+            <a:avLst/>
+          </a:prstGeom>
+        </p:spPr>
+      </p:pic>
+      <p:pic>
+        <p:nvPicPr>
+          <p:cNvPr id="14" name="Imagen 13">
+            <a:extLst>
+              <a:ext uri="{FF2B5EF4-FFF2-40B4-BE49-F238E27FC236}">
+                <a16:creationId xmlns:a16="http://schemas.microsoft.com/office/drawing/2014/main" id="{5B9354A5-3DE2-4B10-8DCB-2EA27FC5DC52}"/>
+              </a:ext>
+            </a:extLst>
+          </p:cNvPr>
+          <p:cNvPicPr>
+            <a:picLocks noChangeAspect="1"/>
+          </p:cNvPicPr>
+          <p:nvPr/>
+        </p:nvPicPr>
+        <p:blipFill>
+          <a:blip r:embed="rId7"/>
+          <a:stretch>
+            <a:fillRect/>
+          </a:stretch>
+        </p:blipFill>
+        <p:spPr>
+          <a:xfrm>
+            <a:off x="8269111" y="998952"/>
+            <a:ext cx="3620912" cy="2448674"/>
+          </a:xfrm>
+          <a:prstGeom prst="rect">
+            <a:avLst/>
+          </a:prstGeom>
+        </p:spPr>
+      </p:pic>
+      <p:sp>
+        <p:nvSpPr>
+          <p:cNvPr id="15" name="CuadroTexto 14">
+            <a:extLst>
+              <a:ext uri="{FF2B5EF4-FFF2-40B4-BE49-F238E27FC236}">
+                <a16:creationId xmlns:a16="http://schemas.microsoft.com/office/drawing/2014/main" id="{496C4321-F89F-4689-B9FC-496891F48508}"/>
+              </a:ext>
+            </a:extLst>
+          </p:cNvPr>
+          <p:cNvSpPr txBox="1"/>
+          <p:nvPr/>
+        </p:nvSpPr>
+        <p:spPr>
+          <a:xfrm>
+            <a:off x="565150" y="1964898"/>
+            <a:ext cx="714943" cy="369332"/>
+          </a:xfrm>
+          <a:prstGeom prst="rect">
+            <a:avLst/>
+          </a:prstGeom>
+          <a:noFill/>
+        </p:spPr>
+        <p:txBody>
+          <a:bodyPr wrap="square" rtlCol="0">
+            <a:spAutoFit/>
+          </a:bodyPr>
+          <a:lstStyle/>
+          <a:p>
+            <a:pPr algn="ctr"/>
+            <a:r>
+              <a:rPr lang="es-ES" b="1" dirty="0" err="1"/>
+              <a:t>SiNx</a:t>
+            </a:r>
+            <a:endParaRPr lang="es-ES" b="1" dirty="0"/>
+          </a:p>
+        </p:txBody>
+      </p:sp>
+      <p:sp>
+        <p:nvSpPr>
+          <p:cNvPr id="16" name="CuadroTexto 15">
+            <a:extLst>
+              <a:ext uri="{FF2B5EF4-FFF2-40B4-BE49-F238E27FC236}">
+                <a16:creationId xmlns:a16="http://schemas.microsoft.com/office/drawing/2014/main" id="{2F368033-4F13-4EAA-8779-45705D181695}"/>
+              </a:ext>
+            </a:extLst>
+          </p:cNvPr>
+          <p:cNvSpPr txBox="1"/>
+          <p:nvPr/>
+        </p:nvSpPr>
+        <p:spPr>
+          <a:xfrm>
+            <a:off x="590550" y="4637356"/>
+            <a:ext cx="714943" cy="369332"/>
+          </a:xfrm>
+          <a:prstGeom prst="rect">
+            <a:avLst/>
+          </a:prstGeom>
+          <a:noFill/>
+        </p:spPr>
+        <p:txBody>
+          <a:bodyPr wrap="square" rtlCol="0">
+            <a:spAutoFit/>
+          </a:bodyPr>
+          <a:lstStyle/>
+          <a:p>
+            <a:pPr algn="ctr"/>
+            <a:r>
+              <a:rPr lang="es-ES" b="1" dirty="0"/>
+              <a:t>SOI</a:t>
+            </a:r>
+          </a:p>
+        </p:txBody>
+      </p:sp>
+    </p:spTree>
+    <p:extLst>
+      <p:ext uri="{BB962C8B-B14F-4D97-AF65-F5344CB8AC3E}">
+        <p14:creationId xmlns:p14="http://schemas.microsoft.com/office/powerpoint/2010/main" val="1423489770"/>
+      </p:ext>
+    </p:extLst>
+  </p:cSld>
+  <p:clrMapOvr>
+    <a:masterClrMapping/>
+  </p:clrMapOvr>
+</p:sld>
+</file>
+
+<file path=ppt/slides/slide13.xml><?xml version="1.0" encoding="utf-8"?>
+<p:sld xmlns:a="http://schemas.openxmlformats.org/drawingml/2006/main" xmlns:r="http://schemas.openxmlformats.org/officeDocument/2006/relationships" xmlns:p="http://schemas.openxmlformats.org/presentationml/2006/main">
+  <p:cSld>
+    <p:spTree>
+      <p:nvGrpSpPr>
+        <p:cNvPr id="1" name=""/>
+        <p:cNvGrpSpPr/>
+        <p:nvPr/>
+      </p:nvGrpSpPr>
+      <p:grpSpPr>
+        <a:xfrm>
+          <a:off x="0" y="0"/>
+          <a:ext cx="0" cy="0"/>
+          <a:chOff x="0" y="0"/>
+          <a:chExt cx="0" cy="0"/>
+        </a:xfrm>
+      </p:grpSpPr>
+      <p:sp>
+        <p:nvSpPr>
+          <p:cNvPr id="2" name="Título 1">
+            <a:extLst>
+              <a:ext uri="{FF2B5EF4-FFF2-40B4-BE49-F238E27FC236}">
+                <a16:creationId xmlns:a16="http://schemas.microsoft.com/office/drawing/2014/main" id="{5C1F146B-C962-4952-BDA4-999B04F9D5A4}"/>
+              </a:ext>
+            </a:extLst>
+          </p:cNvPr>
+          <p:cNvSpPr>
+            <a:spLocks noGrp="1"/>
+          </p:cNvSpPr>
+          <p:nvPr>
+            <p:ph type="title"/>
+          </p:nvPr>
+        </p:nvSpPr>
+        <p:spPr/>
+        <p:txBody>
+          <a:bodyPr/>
+          <a:lstStyle/>
+          <a:p>
+            <a:r>
+              <a:rPr lang="es-ES" dirty="0"/>
+              <a:t>4. Compare </a:t>
+            </a:r>
+            <a:r>
+              <a:rPr lang="es-ES" dirty="0" err="1"/>
+              <a:t>the</a:t>
+            </a:r>
+            <a:r>
+              <a:rPr lang="es-ES" dirty="0"/>
+              <a:t> </a:t>
+            </a:r>
+            <a:r>
+              <a:rPr lang="es-ES" dirty="0" err="1"/>
+              <a:t>SiNx</a:t>
+            </a:r>
+            <a:r>
+              <a:rPr lang="es-ES" dirty="0"/>
+              <a:t> and SOI </a:t>
+            </a:r>
+            <a:r>
+              <a:rPr lang="es-ES" dirty="0" err="1"/>
+              <a:t>technologies</a:t>
+            </a:r>
+            <a:endParaRPr lang="es-ES" dirty="0"/>
+          </a:p>
+        </p:txBody>
+      </p:sp>
+      <mc:AlternateContent xmlns:mc="http://schemas.openxmlformats.org/markup-compatibility/2006">
+        <mc:Choice xmlns:a14="http://schemas.microsoft.com/office/drawing/2010/main" Requires="a14">
+          <p:sp>
+            <p:nvSpPr>
+              <p:cNvPr id="3" name="Marcador de texto 2">
+                <a:extLst>
+                  <a:ext uri="{FF2B5EF4-FFF2-40B4-BE49-F238E27FC236}">
+                    <a16:creationId xmlns:a16="http://schemas.microsoft.com/office/drawing/2014/main" id="{1556D432-6169-4784-905C-38807A0FED9D}"/>
+                  </a:ext>
+                </a:extLst>
+              </p:cNvPr>
+              <p:cNvSpPr>
+                <a:spLocks noGrp="1"/>
+              </p:cNvSpPr>
+              <p:nvPr>
+                <p:ph type="body" idx="1"/>
+              </p:nvPr>
+            </p:nvSpPr>
+            <p:spPr>
+              <a:xfrm>
+                <a:off x="609600" y="762000"/>
+                <a:ext cx="10972800" cy="4476418"/>
+              </a:xfrm>
+            </p:spPr>
+            <p:txBody>
+              <a:bodyPr/>
+              <a:lstStyle/>
+              <a:p>
+                <a:pPr marL="228600" indent="-228600">
+                  <a:buAutoNum type="arabicPeriod"/>
+                </a:pPr>
+                <a:r>
+                  <a:rPr lang="es-ES" sz="1200" dirty="0"/>
+                  <a:t>Confinamiento y dimensiones (</a:t>
+                </a:r>
+                <a14:m>
+                  <m:oMath xmlns:m="http://schemas.openxmlformats.org/officeDocument/2006/math">
+                    <m:sSub>
+                      <m:sSubPr>
+                        <m:ctrlPr>
+                          <a:rPr lang="es-ES" sz="1200" i="1" dirty="0" smtClean="0">
+                            <a:latin typeface="Cambria Math" panose="02040503050406030204" pitchFamily="18" charset="0"/>
+                          </a:rPr>
+                        </m:ctrlPr>
+                      </m:sSubPr>
+                      <m:e>
+                        <m:r>
+                          <a:rPr lang="es-ES" sz="1200" i="1" dirty="0" smtClean="0">
+                            <a:latin typeface="Cambria Math" panose="02040503050406030204" pitchFamily="18" charset="0"/>
+                          </a:rPr>
+                          <m:t>𝑛</m:t>
+                        </m:r>
+                      </m:e>
+                      <m:sub>
+                        <m:r>
+                          <a:rPr lang="es-ES" sz="1200" b="0" i="1" dirty="0" smtClean="0">
+                            <a:latin typeface="Cambria Math" panose="02040503050406030204" pitchFamily="18" charset="0"/>
+                          </a:rPr>
+                          <m:t>𝑒𝑓𝑓</m:t>
+                        </m:r>
+                      </m:sub>
+                    </m:sSub>
+                  </m:oMath>
+                </a14:m>
+                <a:r>
+                  <a:rPr lang="es-ES" sz="1200" i="1" dirty="0">
+                    <a:latin typeface="Cambria Math" panose="02040503050406030204" pitchFamily="18" charset="0"/>
+                  </a:rPr>
+                  <a:t> </a:t>
+                </a:r>
+                <a:r>
+                  <a:rPr lang="es-ES" sz="1200" dirty="0"/>
+                  <a:t>vs </a:t>
+                </a:r>
+                <a:r>
+                  <a:rPr lang="es-ES" sz="1200" dirty="0" err="1"/>
+                  <a:t>width</a:t>
+                </a:r>
+                <a:r>
+                  <a:rPr lang="es-ES" sz="1200" dirty="0"/>
+                  <a:t>):</a:t>
+                </a:r>
+              </a:p>
+              <a:p>
+                <a:endParaRPr lang="es-ES" sz="1200" dirty="0"/>
+              </a:p>
+              <a:p>
+                <a:pPr marL="171450" indent="-171450">
+                  <a:buFont typeface="Arial" panose="020B0604020202020204" pitchFamily="34" charset="0"/>
+                  <a:buChar char="•"/>
+                </a:pPr>
+                <a:r>
+                  <a:rPr lang="es-ES" sz="1200" dirty="0"/>
+                  <a:t>SOI: Debido al alto contraste de índice de refracción entre el silicio (n </a:t>
+                </a:r>
+                <a14:m>
+                  <m:oMath xmlns:m="http://schemas.openxmlformats.org/officeDocument/2006/math">
+                    <m:r>
+                      <a:rPr lang="es-ES" sz="1200" i="1">
+                        <a:latin typeface="Cambria Math" panose="02040503050406030204" pitchFamily="18" charset="0"/>
+                        <a:ea typeface="Cambria Math" panose="02040503050406030204" pitchFamily="18" charset="0"/>
+                      </a:rPr>
+                      <m:t>~</m:t>
+                    </m:r>
+                  </m:oMath>
+                </a14:m>
+                <a:r>
+                  <a:rPr lang="es-ES" sz="1200" dirty="0"/>
+                  <a:t>3.47) y el </a:t>
+                </a:r>
+                <a:r>
+                  <a:rPr lang="es-ES" sz="1200" dirty="0" err="1"/>
+                  <a:t>cladding</a:t>
+                </a:r>
+                <a:r>
+                  <a:rPr lang="es-ES" sz="1200" dirty="0"/>
+                  <a:t> (n </a:t>
+                </a:r>
+                <a14:m>
+                  <m:oMath xmlns:m="http://schemas.openxmlformats.org/officeDocument/2006/math">
+                    <m:r>
+                      <a:rPr lang="es-ES" sz="1200" i="1" smtClean="0">
+                        <a:latin typeface="Cambria Math" panose="02040503050406030204" pitchFamily="18" charset="0"/>
+                        <a:ea typeface="Cambria Math" panose="02040503050406030204" pitchFamily="18" charset="0"/>
+                      </a:rPr>
+                      <m:t>~</m:t>
+                    </m:r>
+                  </m:oMath>
+                </a14:m>
+                <a:r>
+                  <a:rPr lang="es-ES" sz="1200" dirty="0"/>
+                  <a:t>1.44), las guías SOI presentan un índice efectivo mucho mayor (</a:t>
+                </a:r>
+                <a14:m>
+                  <m:oMath xmlns:m="http://schemas.openxmlformats.org/officeDocument/2006/math">
+                    <m:sSub>
+                      <m:sSubPr>
+                        <m:ctrlPr>
+                          <a:rPr lang="es-ES" sz="1200" i="1" dirty="0" smtClean="0">
+                            <a:latin typeface="Cambria Math" panose="02040503050406030204" pitchFamily="18" charset="0"/>
+                          </a:rPr>
+                        </m:ctrlPr>
+                      </m:sSubPr>
+                      <m:e>
+                        <m:r>
+                          <a:rPr lang="es-ES" sz="1200" i="1" dirty="0" smtClean="0">
+                            <a:latin typeface="Cambria Math" panose="02040503050406030204" pitchFamily="18" charset="0"/>
+                          </a:rPr>
+                          <m:t>𝑛</m:t>
+                        </m:r>
+                      </m:e>
+                      <m:sub>
+                        <m:r>
+                          <a:rPr lang="es-ES" sz="1200" b="0" i="1" dirty="0" smtClean="0">
+                            <a:latin typeface="Cambria Math" panose="02040503050406030204" pitchFamily="18" charset="0"/>
+                          </a:rPr>
+                          <m:t>𝑒𝑓𝑓</m:t>
+                        </m:r>
+                      </m:sub>
+                    </m:sSub>
+                    <m:r>
+                      <a:rPr lang="es-ES" sz="1200" i="1" dirty="0" smtClean="0">
+                        <a:latin typeface="Cambria Math" panose="02040503050406030204" pitchFamily="18" charset="0"/>
+                      </a:rPr>
+                      <m:t> </m:t>
+                    </m:r>
+                  </m:oMath>
+                </a14:m>
+                <a:r>
+                  <a:rPr lang="es-ES" sz="1200" dirty="0"/>
+                  <a:t>&gt; 2.4 para TE0) incluso para anchos reducidos. Esto permite un confinamiento de la luz muy fuerte en dimensiones nanométricas.</a:t>
+                </a:r>
+              </a:p>
+              <a:p>
+                <a:endParaRPr lang="es-ES" sz="1200" dirty="0"/>
+              </a:p>
+              <a:p>
+                <a:pPr marL="171450" indent="-171450">
+                  <a:buFont typeface="Arial" panose="020B0604020202020204" pitchFamily="34" charset="0"/>
+                  <a:buChar char="•"/>
+                </a:pPr>
+                <a:r>
+                  <a:rPr lang="es-ES" sz="1200" dirty="0" err="1"/>
+                  <a:t>SiNx</a:t>
+                </a:r>
+                <a:r>
+                  <a:rPr lang="es-ES" sz="1200" dirty="0"/>
+                  <a:t>: El contraste es moderado (núcleo n </a:t>
+                </a:r>
+                <a14:m>
+                  <m:oMath xmlns:m="http://schemas.openxmlformats.org/officeDocument/2006/math">
+                    <m:r>
+                      <a:rPr lang="es-ES" sz="1200" i="1">
+                        <a:latin typeface="Cambria Math" panose="02040503050406030204" pitchFamily="18" charset="0"/>
+                        <a:ea typeface="Cambria Math" panose="02040503050406030204" pitchFamily="18" charset="0"/>
+                      </a:rPr>
+                      <m:t>~</m:t>
+                    </m:r>
+                  </m:oMath>
+                </a14:m>
+                <a:r>
+                  <a:rPr lang="es-ES" sz="1200" dirty="0"/>
+                  <a:t>2.0), resultando en índices efectivos menores (</a:t>
+                </a:r>
+                <a14:m>
+                  <m:oMath xmlns:m="http://schemas.openxmlformats.org/officeDocument/2006/math">
+                    <m:sSub>
+                      <m:sSubPr>
+                        <m:ctrlPr>
+                          <a:rPr lang="es-ES" sz="1200" i="1" dirty="0" smtClean="0">
+                            <a:latin typeface="Cambria Math" panose="02040503050406030204" pitchFamily="18" charset="0"/>
+                          </a:rPr>
+                        </m:ctrlPr>
+                      </m:sSubPr>
+                      <m:e>
+                        <m:r>
+                          <a:rPr lang="es-ES" sz="1200" i="1" dirty="0" smtClean="0">
+                            <a:latin typeface="Cambria Math" panose="02040503050406030204" pitchFamily="18" charset="0"/>
+                          </a:rPr>
+                          <m:t>𝑛</m:t>
+                        </m:r>
+                      </m:e>
+                      <m:sub>
+                        <m:r>
+                          <a:rPr lang="es-ES" sz="1200" b="0" i="1" dirty="0" smtClean="0">
+                            <a:latin typeface="Cambria Math" panose="02040503050406030204" pitchFamily="18" charset="0"/>
+                          </a:rPr>
+                          <m:t>𝑒𝑓𝑓</m:t>
+                        </m:r>
+                      </m:sub>
+                    </m:sSub>
+                    <m:r>
+                      <a:rPr lang="es-ES" sz="1200" b="0" i="1" dirty="0" smtClean="0">
+                        <a:latin typeface="Cambria Math" panose="02040503050406030204" pitchFamily="18" charset="0"/>
+                      </a:rPr>
+                      <m:t> </m:t>
+                    </m:r>
+                    <m:r>
+                      <a:rPr lang="es-ES" sz="1200" i="1">
+                        <a:latin typeface="Cambria Math" panose="02040503050406030204" pitchFamily="18" charset="0"/>
+                        <a:ea typeface="Cambria Math" panose="02040503050406030204" pitchFamily="18" charset="0"/>
+                      </a:rPr>
+                      <m:t>~ </m:t>
+                    </m:r>
+                  </m:oMath>
+                </a14:m>
+                <a:r>
+                  <a:rPr lang="es-ES" sz="1200" dirty="0"/>
+                  <a:t>1.6). Esto requiere guías más anchas para confinar bien la luz.</a:t>
+                </a:r>
+              </a:p>
+              <a:p>
+                <a:endParaRPr lang="es-ES" sz="1200" dirty="0"/>
+              </a:p>
+              <a:p>
+                <a:r>
+                  <a:rPr lang="es-ES" sz="1200" dirty="0"/>
+                  <a:t>2. Radio de curvatura y densidad de integración:</a:t>
+                </a:r>
+              </a:p>
+              <a:p>
+                <a:endParaRPr lang="es-ES" sz="1200" dirty="0"/>
+              </a:p>
+              <a:p>
+                <a:pPr marL="171450" indent="-171450">
+                  <a:buFont typeface="Arial" panose="020B0604020202020204" pitchFamily="34" charset="0"/>
+                  <a:buChar char="•"/>
+                </a:pPr>
+                <a:r>
+                  <a:rPr lang="es-ES" sz="1200" dirty="0"/>
+                  <a:t>SOI: Gracias al fuerte confinamiento, el radio seguro es extremadamente pequeño (</a:t>
+                </a:r>
+                <a14:m>
+                  <m:oMath xmlns:m="http://schemas.openxmlformats.org/officeDocument/2006/math">
+                    <m:r>
+                      <a:rPr lang="es-ES" sz="1200" i="1">
+                        <a:latin typeface="Cambria Math" panose="02040503050406030204" pitchFamily="18" charset="0"/>
+                        <a:ea typeface="Cambria Math" panose="02040503050406030204" pitchFamily="18" charset="0"/>
+                      </a:rPr>
+                      <m:t>~</m:t>
+                    </m:r>
+                  </m:oMath>
+                </a14:m>
+                <a:r>
+                  <a:rPr lang="es-ES" sz="1200" dirty="0"/>
+                  <a:t> 5 </a:t>
+                </a:r>
+                <a14:m>
+                  <m:oMath xmlns:m="http://schemas.openxmlformats.org/officeDocument/2006/math">
+                    <m:r>
+                      <a:rPr lang="es-ES" sz="1200" i="1">
+                        <a:latin typeface="Cambria Math" panose="02040503050406030204" pitchFamily="18" charset="0"/>
+                        <a:ea typeface="Cambria Math" panose="02040503050406030204" pitchFamily="18" charset="0"/>
+                      </a:rPr>
+                      <m:t>𝜇</m:t>
+                    </m:r>
+                    <m:r>
+                      <a:rPr lang="es-ES" sz="1200" i="1">
+                        <a:latin typeface="Cambria Math" panose="02040503050406030204" pitchFamily="18" charset="0"/>
+                        <a:ea typeface="Cambria Math" panose="02040503050406030204" pitchFamily="18" charset="0"/>
+                      </a:rPr>
+                      <m:t>𝑚</m:t>
+                    </m:r>
+                    <m:r>
+                      <a:rPr lang="es-ES" sz="1200" i="1">
+                        <a:latin typeface="Cambria Math" panose="02040503050406030204" pitchFamily="18" charset="0"/>
+                        <a:ea typeface="Cambria Math" panose="02040503050406030204" pitchFamily="18" charset="0"/>
+                      </a:rPr>
+                      <m:t> </m:t>
+                    </m:r>
+                  </m:oMath>
+                </a14:m>
+                <a:r>
+                  <a:rPr lang="es-ES" sz="1200" dirty="0"/>
+                  <a:t>). Como se ve en las gráficas, a 5 </a:t>
+                </a:r>
+                <a14:m>
+                  <m:oMath xmlns:m="http://schemas.openxmlformats.org/officeDocument/2006/math">
+                    <m:r>
+                      <a:rPr lang="es-ES" sz="1200" i="1" smtClean="0">
+                        <a:latin typeface="Cambria Math" panose="02040503050406030204" pitchFamily="18" charset="0"/>
+                        <a:ea typeface="Cambria Math" panose="02040503050406030204" pitchFamily="18" charset="0"/>
+                      </a:rPr>
+                      <m:t>𝜇</m:t>
+                    </m:r>
+                    <m:r>
+                      <a:rPr lang="es-ES" sz="1200" b="0" i="1" smtClean="0">
+                        <a:latin typeface="Cambria Math" panose="02040503050406030204" pitchFamily="18" charset="0"/>
+                        <a:ea typeface="Cambria Math" panose="02040503050406030204" pitchFamily="18" charset="0"/>
+                      </a:rPr>
+                      <m:t>𝑚</m:t>
+                    </m:r>
+                  </m:oMath>
+                </a14:m>
+                <a:r>
+                  <a:rPr lang="es-ES" sz="1200" dirty="0"/>
+                  <a:t> las pérdidas para TE son casi nulas (&lt; 0.01 dB). Esto permite una muy alta densidad de integración, ideal para circuitos fotónicos compactos.</a:t>
+                </a:r>
+              </a:p>
+              <a:p>
+                <a:endParaRPr lang="es-ES" sz="1200" dirty="0"/>
+              </a:p>
+              <a:p>
+                <a:pPr marL="171450" indent="-171450">
+                  <a:buFont typeface="Arial" panose="020B0604020202020204" pitchFamily="34" charset="0"/>
+                  <a:buChar char="•"/>
+                </a:pPr>
+                <a:r>
+                  <a:rPr lang="es-ES" sz="1200" dirty="0" err="1"/>
+                  <a:t>SiNx</a:t>
+                </a:r>
+                <a:r>
+                  <a:rPr lang="es-ES" sz="1200" dirty="0"/>
+                  <a:t>: Requiere radios mucho mayores. El radio seguro determinado fue de 50 </a:t>
+                </a:r>
+                <a14:m>
+                  <m:oMath xmlns:m="http://schemas.openxmlformats.org/officeDocument/2006/math">
+                    <m:r>
+                      <a:rPr lang="es-ES" sz="1200" i="1" smtClean="0">
+                        <a:latin typeface="Cambria Math" panose="02040503050406030204" pitchFamily="18" charset="0"/>
+                        <a:ea typeface="Cambria Math" panose="02040503050406030204" pitchFamily="18" charset="0"/>
+                      </a:rPr>
+                      <m:t>𝜇</m:t>
+                    </m:r>
+                    <m:r>
+                      <a:rPr lang="es-ES" sz="1200" b="0" i="1" smtClean="0">
+                        <a:latin typeface="Cambria Math" panose="02040503050406030204" pitchFamily="18" charset="0"/>
+                        <a:ea typeface="Cambria Math" panose="02040503050406030204" pitchFamily="18" charset="0"/>
+                      </a:rPr>
+                      <m:t>𝑚</m:t>
+                    </m:r>
+                  </m:oMath>
+                </a14:m>
+                <a:r>
+                  <a:rPr lang="es-ES" sz="1200" dirty="0"/>
+                  <a:t>. Aunque las pérdidas de propagación son bajas, el </a:t>
+                </a:r>
+                <a:r>
+                  <a:rPr lang="es-ES" sz="1200" dirty="0" err="1"/>
+                  <a:t>footprint</a:t>
+                </a:r>
+                <a:r>
+                  <a:rPr lang="es-ES" sz="1200" dirty="0"/>
+                  <a:t> de los componentes curvos es unas 10 veces mayor que en SOI.</a:t>
+                </a:r>
+              </a:p>
+              <a:p>
+                <a:pPr marL="171450" indent="-171450">
+                  <a:buFont typeface="Arial" panose="020B0604020202020204" pitchFamily="34" charset="0"/>
+                  <a:buChar char="•"/>
+                </a:pPr>
+                <a:endParaRPr lang="es-ES" sz="1200" dirty="0"/>
+              </a:p>
+              <a:p>
+                <a:r>
+                  <a:rPr lang="es-ES" sz="1200" dirty="0"/>
+                  <a:t>3. Sensibilidad a la Polarización:</a:t>
+                </a:r>
+              </a:p>
+              <a:p>
+                <a:endParaRPr lang="es-ES" sz="1200" dirty="0"/>
+              </a:p>
+              <a:p>
+                <a:r>
+                  <a:rPr lang="es-ES" sz="1200" dirty="0"/>
+                  <a:t>Ambas tecnologías muestran que el modo TM es el factor limitante en curvas cerradas. En SOI, el modo TM falla por debajo de 10 </a:t>
+                </a:r>
+                <a14:m>
+                  <m:oMath xmlns:m="http://schemas.openxmlformats.org/officeDocument/2006/math">
+                    <m:r>
+                      <a:rPr lang="es-ES" sz="1200" i="1">
+                        <a:latin typeface="Cambria Math" panose="02040503050406030204" pitchFamily="18" charset="0"/>
+                        <a:ea typeface="Cambria Math" panose="02040503050406030204" pitchFamily="18" charset="0"/>
+                      </a:rPr>
+                      <m:t>𝜇</m:t>
+                    </m:r>
+                    <m:r>
+                      <a:rPr lang="es-ES" sz="1200" i="1">
+                        <a:latin typeface="Cambria Math" panose="02040503050406030204" pitchFamily="18" charset="0"/>
+                        <a:ea typeface="Cambria Math" panose="02040503050406030204" pitchFamily="18" charset="0"/>
+                      </a:rPr>
+                      <m:t>𝑚</m:t>
+                    </m:r>
+                  </m:oMath>
+                </a14:m>
+                <a:r>
+                  <a:rPr lang="es-ES" sz="1200" dirty="0"/>
+                  <a:t> , mientras que en </a:t>
+                </a:r>
+                <a:r>
+                  <a:rPr lang="es-ES" sz="1200" dirty="0" err="1"/>
+                  <a:t>SiNx</a:t>
+                </a:r>
+                <a:r>
+                  <a:rPr lang="es-ES" sz="1200" dirty="0"/>
+                  <a:t> falla por debajo de 50 </a:t>
+                </a:r>
+                <a14:m>
+                  <m:oMath xmlns:m="http://schemas.openxmlformats.org/officeDocument/2006/math">
+                    <m:r>
+                      <a:rPr lang="es-ES" sz="1200" i="1" smtClean="0">
+                        <a:latin typeface="Cambria Math" panose="02040503050406030204" pitchFamily="18" charset="0"/>
+                        <a:ea typeface="Cambria Math" panose="02040503050406030204" pitchFamily="18" charset="0"/>
+                      </a:rPr>
+                      <m:t>𝜇</m:t>
+                    </m:r>
+                    <m:r>
+                      <a:rPr lang="es-ES" sz="1200" b="0" i="1" smtClean="0">
+                        <a:latin typeface="Cambria Math" panose="02040503050406030204" pitchFamily="18" charset="0"/>
+                        <a:ea typeface="Cambria Math" panose="02040503050406030204" pitchFamily="18" charset="0"/>
+                      </a:rPr>
+                      <m:t>𝑚</m:t>
+                    </m:r>
+                  </m:oMath>
+                </a14:m>
+                <a:r>
+                  <a:rPr lang="es-ES" sz="1200" dirty="0"/>
+                  <a:t>.</a:t>
+                </a:r>
+              </a:p>
+              <a:p>
+                <a:endParaRPr lang="es-ES" sz="1200" dirty="0"/>
+              </a:p>
+              <a:p>
+                <a:r>
+                  <a:rPr lang="es-ES" sz="1200" dirty="0"/>
+                  <a:t>Conclusión:</a:t>
+                </a:r>
+              </a:p>
+              <a:p>
+                <a:endParaRPr lang="es-ES" sz="1200" dirty="0"/>
+              </a:p>
+              <a:p>
+                <a:r>
+                  <a:rPr lang="es-ES" sz="1200" dirty="0"/>
+                  <a:t>SOI es la tecnología de elección para alta densidad de integración y componentes compactos debido a sus radios de curvatura mínimos (&lt; 5-10 </a:t>
+                </a:r>
+                <a14:m>
+                  <m:oMath xmlns:m="http://schemas.openxmlformats.org/officeDocument/2006/math">
+                    <m:r>
+                      <a:rPr lang="es-ES" sz="1200" i="1">
+                        <a:latin typeface="Cambria Math" panose="02040503050406030204" pitchFamily="18" charset="0"/>
+                        <a:ea typeface="Cambria Math" panose="02040503050406030204" pitchFamily="18" charset="0"/>
+                      </a:rPr>
+                      <m:t>𝜇</m:t>
+                    </m:r>
+                    <m:r>
+                      <a:rPr lang="es-ES" sz="1200" i="1">
+                        <a:latin typeface="Cambria Math" panose="02040503050406030204" pitchFamily="18" charset="0"/>
+                        <a:ea typeface="Cambria Math" panose="02040503050406030204" pitchFamily="18" charset="0"/>
+                      </a:rPr>
+                      <m:t>𝑚</m:t>
+                    </m:r>
+                  </m:oMath>
+                </a14:m>
+                <a:r>
+                  <a:rPr lang="es-ES" sz="1200" dirty="0"/>
+                  <a:t>). </a:t>
+                </a:r>
+                <a:r>
+                  <a:rPr lang="es-ES" sz="1200" dirty="0" err="1"/>
+                  <a:t>SiNx</a:t>
+                </a:r>
+                <a:r>
+                  <a:rPr lang="es-ES" sz="1200" dirty="0"/>
+                  <a:t>, aunque requiere mayor espacio (R </a:t>
+                </a:r>
+                <a14:m>
+                  <m:oMath xmlns:m="http://schemas.openxmlformats.org/officeDocument/2006/math">
+                    <m:r>
+                      <a:rPr lang="es-ES" sz="1200" i="1" smtClean="0">
+                        <a:latin typeface="Cambria Math" panose="02040503050406030204" pitchFamily="18" charset="0"/>
+                        <a:ea typeface="Cambria Math" panose="02040503050406030204" pitchFamily="18" charset="0"/>
+                      </a:rPr>
+                      <m:t>~</m:t>
+                    </m:r>
+                  </m:oMath>
+                </a14:m>
+                <a:r>
+                  <a:rPr lang="es-ES" sz="1200" dirty="0"/>
+                  <a:t>50 </a:t>
+                </a:r>
+                <a14:m>
+                  <m:oMath xmlns:m="http://schemas.openxmlformats.org/officeDocument/2006/math">
+                    <m:r>
+                      <a:rPr lang="es-ES" sz="1200" i="1">
+                        <a:latin typeface="Cambria Math" panose="02040503050406030204" pitchFamily="18" charset="0"/>
+                        <a:ea typeface="Cambria Math" panose="02040503050406030204" pitchFamily="18" charset="0"/>
+                      </a:rPr>
+                      <m:t>𝜇</m:t>
+                    </m:r>
+                    <m:r>
+                      <a:rPr lang="es-ES" sz="1200" i="1">
+                        <a:latin typeface="Cambria Math" panose="02040503050406030204" pitchFamily="18" charset="0"/>
+                        <a:ea typeface="Cambria Math" panose="02040503050406030204" pitchFamily="18" charset="0"/>
+                      </a:rPr>
+                      <m:t>𝑚</m:t>
+                    </m:r>
+                  </m:oMath>
+                </a14:m>
+                <a:r>
+                  <a:rPr lang="es-ES" sz="1200" dirty="0"/>
+                  <a:t>), suele ofrecer menores pérdidas por propagación y es menos sensible a la rugosidad de las paredes debido a su menor contraste de índice.</a:t>
+                </a:r>
+              </a:p>
+            </p:txBody>
+          </p:sp>
+        </mc:Choice>
+        <mc:Fallback>
+          <p:sp>
+            <p:nvSpPr>
+              <p:cNvPr id="3" name="Marcador de texto 2">
+                <a:extLst>
+                  <a:ext uri="{FF2B5EF4-FFF2-40B4-BE49-F238E27FC236}">
+                    <a16:creationId xmlns:a16="http://schemas.microsoft.com/office/drawing/2014/main" id="{1556D432-6169-4784-905C-38807A0FED9D}"/>
+                  </a:ext>
+                </a:extLst>
+              </p:cNvPr>
+              <p:cNvSpPr>
+                <a:spLocks noGrp="1" noRot="1" noChangeAspect="1" noMove="1" noResize="1" noEditPoints="1" noAdjustHandles="1" noChangeArrowheads="1" noChangeShapeType="1" noTextEdit="1"/>
+              </p:cNvSpPr>
+              <p:nvPr>
+                <p:ph type="body" idx="1"/>
+              </p:nvPr>
+            </p:nvSpPr>
+            <p:spPr>
+              <a:xfrm>
+                <a:off x="609600" y="762000"/>
+                <a:ext cx="10972800" cy="4476418"/>
+              </a:xfrm>
+              <a:blipFill>
+                <a:blip r:embed="rId2"/>
+                <a:stretch>
+                  <a:fillRect l="-889" t="-1090" r="-500" b="-1226"/>
+                </a:stretch>
+              </a:blipFill>
+            </p:spPr>
+            <p:txBody>
+              <a:bodyPr/>
+              <a:lstStyle/>
+              <a:p>
+                <a:r>
+                  <a:rPr lang="es-ES">
+                    <a:noFill/>
+                  </a:rPr>
+                  <a:t> </a:t>
+                </a:r>
+              </a:p>
+            </p:txBody>
+          </p:sp>
+        </mc:Fallback>
+      </mc:AlternateContent>
+      <p:sp>
+        <p:nvSpPr>
+          <p:cNvPr id="4" name="Marcador de pie de página 3">
+            <a:extLst>
+              <a:ext uri="{FF2B5EF4-FFF2-40B4-BE49-F238E27FC236}">
+                <a16:creationId xmlns:a16="http://schemas.microsoft.com/office/drawing/2014/main" id="{1E150C57-7620-4272-BF66-3EAB6993AC7B}"/>
+              </a:ext>
+            </a:extLst>
+          </p:cNvPr>
+          <p:cNvSpPr>
+            <a:spLocks noGrp="1"/>
+          </p:cNvSpPr>
+          <p:nvPr>
+            <p:ph type="ftr" sz="quarter" idx="5"/>
+          </p:nvPr>
+        </p:nvSpPr>
+        <p:spPr/>
+        <p:txBody>
+          <a:bodyPr/>
+          <a:lstStyle/>
+          <a:p>
+            <a:pPr marL="12700">
+              <a:spcBef>
+                <a:spcPts val="15"/>
+              </a:spcBef>
+            </a:pPr>
+            <a:r>
+              <a:rPr lang="es-ES" spc="-5"/>
+              <a:t>LAB 1.0. WAVEGUIDES</a:t>
+            </a:r>
+            <a:endParaRPr lang="es-ES" spc="-5" dirty="0"/>
+          </a:p>
+        </p:txBody>
+      </p:sp>
+      <p:sp>
+        <p:nvSpPr>
+          <p:cNvPr id="5" name="Marcador de número de diapositiva 4">
+            <a:extLst>
+              <a:ext uri="{FF2B5EF4-FFF2-40B4-BE49-F238E27FC236}">
+                <a16:creationId xmlns:a16="http://schemas.microsoft.com/office/drawing/2014/main" id="{AF9A3757-B02C-4AD6-BCE3-635DC7345E32}"/>
+              </a:ext>
+            </a:extLst>
+          </p:cNvPr>
+          <p:cNvSpPr>
+            <a:spLocks noGrp="1"/>
+          </p:cNvSpPr>
+          <p:nvPr>
+            <p:ph type="sldNum" sz="quarter" idx="7"/>
+          </p:nvPr>
+        </p:nvSpPr>
+        <p:spPr/>
+        <p:txBody>
+          <a:bodyPr/>
+          <a:lstStyle/>
+          <a:p>
+            <a:fld id="{B6F15528-21DE-4FAA-801E-634DDDAF4B2B}" type="slidenum">
+              <a:rPr lang="es-ES" smtClean="0"/>
+              <a:t>13</a:t>
+            </a:fld>
+            <a:endParaRPr lang="es-ES"/>
+          </a:p>
+        </p:txBody>
+      </p:sp>
+    </p:spTree>
+    <p:extLst>
+      <p:ext uri="{BB962C8B-B14F-4D97-AF65-F5344CB8AC3E}">
+        <p14:creationId xmlns:p14="http://schemas.microsoft.com/office/powerpoint/2010/main" val="2015208960"/>
+      </p:ext>
+    </p:extLst>
+  </p:cSld>
+  <p:clrMapOvr>
+    <a:masterClrMapping/>
+  </p:clrMapOvr>
+</p:sld>
+</file>
+
+<file path=ppt/slides/slide14.xml><?xml version="1.0" encoding="utf-8"?>
+<p:sld xmlns:a="http://schemas.openxmlformats.org/drawingml/2006/main" xmlns:r="http://schemas.openxmlformats.org/officeDocument/2006/relationships" xmlns:p="http://schemas.openxmlformats.org/presentationml/2006/main">
+  <p:cSld>
+    <p:spTree>
+      <p:nvGrpSpPr>
+        <p:cNvPr id="1" name=""/>
+        <p:cNvGrpSpPr/>
+        <p:nvPr/>
+      </p:nvGrpSpPr>
+      <p:grpSpPr>
+        <a:xfrm>
+          <a:off x="0" y="0"/>
+          <a:ext cx="0" cy="0"/>
+          <a:chOff x="0" y="0"/>
+          <a:chExt cx="0" cy="0"/>
+        </a:xfrm>
+      </p:grpSpPr>
+      <p:sp>
+        <p:nvSpPr>
+          <p:cNvPr id="3" name="object 3"/>
+          <p:cNvSpPr/>
+          <p:nvPr/>
+        </p:nvSpPr>
+        <p:spPr>
+          <a:xfrm>
+            <a:off x="3945635" y="2636520"/>
+            <a:ext cx="8246363" cy="1584959"/>
+          </a:xfrm>
+          <a:prstGeom prst="rect">
+            <a:avLst/>
+          </a:prstGeom>
+          <a:blipFill>
+            <a:blip r:embed="rId2" cstate="print"/>
+            <a:stretch>
+              <a:fillRect/>
+            </a:stretch>
+          </a:blipFill>
+        </p:spPr>
+        <p:txBody>
+          <a:bodyPr wrap="square" lIns="0" tIns="0" rIns="0" bIns="0" rtlCol="0"/>
+          <a:lstStyle/>
+          <a:p>
+            <a:endParaRPr/>
+          </a:p>
+        </p:txBody>
+      </p:sp>
+      <p:sp>
+        <p:nvSpPr>
+          <p:cNvPr id="4" name="object 4"/>
+          <p:cNvSpPr txBox="1">
+            <a:spLocks noGrp="1"/>
+          </p:cNvSpPr>
+          <p:nvPr>
+            <p:ph type="title"/>
+          </p:nvPr>
+        </p:nvSpPr>
+        <p:spPr>
+          <a:xfrm>
+            <a:off x="4513326" y="3165729"/>
+            <a:ext cx="2233295" cy="513715"/>
+          </a:xfrm>
+          <a:prstGeom prst="rect">
+            <a:avLst/>
+          </a:prstGeom>
+        </p:spPr>
+        <p:txBody>
+          <a:bodyPr vert="horz" wrap="square" lIns="0" tIns="13335" rIns="0" bIns="0" rtlCol="0">
+            <a:spAutoFit/>
+          </a:bodyPr>
+          <a:lstStyle/>
+          <a:p>
+            <a:pPr marL="12700">
+              <a:lnSpc>
+                <a:spcPct val="100000"/>
+              </a:lnSpc>
+              <a:spcBef>
+                <a:spcPts val="105"/>
+              </a:spcBef>
+            </a:pPr>
+            <a:r>
+              <a:rPr sz="3200" b="1" spc="-5" dirty="0">
+                <a:solidFill>
+                  <a:srgbClr val="FFFFFF"/>
+                </a:solidFill>
+                <a:latin typeface="Lucida Sans"/>
+                <a:cs typeface="Lucida Sans"/>
+              </a:rPr>
+              <a:t>Thank</a:t>
+            </a:r>
+            <a:r>
+              <a:rPr sz="3200" b="1" spc="-55" dirty="0">
+                <a:solidFill>
+                  <a:srgbClr val="FFFFFF"/>
+                </a:solidFill>
+                <a:latin typeface="Lucida Sans"/>
+                <a:cs typeface="Lucida Sans"/>
+              </a:rPr>
+              <a:t> </a:t>
+            </a:r>
+            <a:r>
+              <a:rPr sz="3200" b="1" dirty="0">
+                <a:solidFill>
+                  <a:srgbClr val="FFFFFF"/>
+                </a:solidFill>
+                <a:latin typeface="Lucida Sans"/>
+                <a:cs typeface="Lucida Sans"/>
+              </a:rPr>
+              <a:t>you</a:t>
+            </a:r>
+            <a:endParaRPr sz="3200">
+              <a:latin typeface="Lucida Sans"/>
+              <a:cs typeface="Lucida Sans"/>
+            </a:endParaRPr>
+          </a:p>
+        </p:txBody>
+      </p:sp>
+      <p:sp>
+        <p:nvSpPr>
+          <p:cNvPr id="5" name="Marcador de número de diapositiva 4">
+            <a:extLst>
+              <a:ext uri="{FF2B5EF4-FFF2-40B4-BE49-F238E27FC236}">
+                <a16:creationId xmlns:a16="http://schemas.microsoft.com/office/drawing/2014/main" id="{B052DA19-AD24-7D24-2AE9-51F8F5A7F5E0}"/>
+              </a:ext>
+            </a:extLst>
+          </p:cNvPr>
+          <p:cNvSpPr>
+            <a:spLocks noGrp="1"/>
+          </p:cNvSpPr>
+          <p:nvPr>
+            <p:ph type="sldNum" sz="quarter" idx="7"/>
+          </p:nvPr>
+        </p:nvSpPr>
+        <p:spPr/>
+        <p:txBody>
+          <a:bodyPr/>
+          <a:lstStyle/>
+          <a:p>
+            <a:fld id="{B6F15528-21DE-4FAA-801E-634DDDAF4B2B}" type="slidenum">
+              <a:rPr lang="es-ES" smtClean="0"/>
+              <a:t>14</a:t>
             </a:fld>
             <a:endParaRPr lang="es-ES"/>
           </a:p>
@@ -7979,8 +9900,8 @@
           </a:p>
         </p:txBody>
       </p:sp>
-      <mc:AlternateContent xmlns:mc="http://schemas.openxmlformats.org/markup-compatibility/2006">
-        <mc:Choice xmlns:a14="http://schemas.microsoft.com/office/drawing/2010/main" Requires="a14">
+      <mc:AlternateContent xmlns:mc="http://schemas.openxmlformats.org/markup-compatibility/2006" xmlns:a14="http://schemas.microsoft.com/office/drawing/2010/main">
+        <mc:Choice Requires="a14">
           <p:sp>
             <p:nvSpPr>
               <p:cNvPr id="2" name="CuadroTexto 1">
@@ -8438,7 +10359,7 @@
             </p:txBody>
           </p:sp>
         </mc:Choice>
-        <mc:Fallback>
+        <mc:Fallback xmlns="">
           <p:sp>
             <p:nvSpPr>
               <p:cNvPr id="2" name="CuadroTexto 1">
@@ -9300,49 +11221,62 @@
       </p:pic>
       <p:pic>
         <p:nvPicPr>
-          <p:cNvPr id="1026" name="Picture 2">
+          <p:cNvPr id="9" name="Imagen 8">
             <a:extLst>
               <a:ext uri="{FF2B5EF4-FFF2-40B4-BE49-F238E27FC236}">
-                <a16:creationId xmlns:a16="http://schemas.microsoft.com/office/drawing/2014/main" id="{983B254C-7F47-E79E-7E50-51DAB25BFECA}"/>
+                <a16:creationId xmlns:a16="http://schemas.microsoft.com/office/drawing/2014/main" id="{5422221C-F3D4-43E2-9AED-FD3F6BD48214}"/>
               </a:ext>
             </a:extLst>
           </p:cNvPr>
           <p:cNvPicPr>
-            <a:picLocks noChangeAspect="1" noChangeArrowheads="1"/>
+            <a:picLocks noChangeAspect="1"/>
           </p:cNvPicPr>
           <p:nvPr/>
         </p:nvPicPr>
         <p:blipFill>
-          <a:blip r:embed="rId3">
-            <a:extLst>
-              <a:ext uri="{28A0092B-C50C-407E-A947-70E740481C1C}">
-                <a14:useLocalDpi xmlns:a14="http://schemas.microsoft.com/office/drawing/2010/main" val="0"/>
-              </a:ext>
-            </a:extLst>
-          </a:blip>
-          <a:srcRect/>
+          <a:blip r:embed="rId3"/>
           <a:stretch>
             <a:fillRect/>
           </a:stretch>
         </p:blipFill>
-        <p:spPr bwMode="auto">
+        <p:spPr>
           <a:xfrm>
-            <a:off x="3733800" y="725294"/>
-            <a:ext cx="3657600" cy="2899548"/>
+            <a:off x="1219200" y="780234"/>
+            <a:ext cx="3429000" cy="2718327"/>
           </a:xfrm>
           <a:prstGeom prst="rect">
             <a:avLst/>
           </a:prstGeom>
-          <a:noFill/>
-          <a:extLst>
-            <a:ext uri="{909E8E84-426E-40DD-AFC4-6F175D3DCCD1}">
-              <a14:hiddenFill xmlns:a14="http://schemas.microsoft.com/office/drawing/2010/main">
-                <a:solidFill>
-                  <a:srgbClr val="FFFFFF"/>
-                </a:solidFill>
-              </a14:hiddenFill>
-            </a:ext>
-          </a:extLst>
+        </p:spPr>
+      </p:pic>
+      <p:pic>
+        <p:nvPicPr>
+          <p:cNvPr id="11" name="Imagen 10">
+            <a:extLst>
+              <a:ext uri="{FF2B5EF4-FFF2-40B4-BE49-F238E27FC236}">
+                <a16:creationId xmlns:a16="http://schemas.microsoft.com/office/drawing/2014/main" id="{A71245E8-3970-4E6D-9FED-5632CC5B067E}"/>
+              </a:ext>
+            </a:extLst>
+          </p:cNvPr>
+          <p:cNvPicPr>
+            <a:picLocks noChangeAspect="1"/>
+          </p:cNvPicPr>
+          <p:nvPr/>
+        </p:nvPicPr>
+        <p:blipFill>
+          <a:blip r:embed="rId4"/>
+          <a:stretch>
+            <a:fillRect/>
+          </a:stretch>
+        </p:blipFill>
+        <p:spPr>
+          <a:xfrm>
+            <a:off x="6995141" y="780234"/>
+            <a:ext cx="3429000" cy="2718326"/>
+          </a:xfrm>
+          <a:prstGeom prst="rect">
+            <a:avLst/>
+          </a:prstGeom>
         </p:spPr>
       </p:pic>
     </p:spTree>
@@ -9999,37 +11933,14 @@
       </p:grpSpPr>
       <p:sp>
         <p:nvSpPr>
-          <p:cNvPr id="3" name="object 3"/>
-          <p:cNvSpPr/>
-          <p:nvPr/>
-        </p:nvSpPr>
-        <p:spPr>
-          <a:xfrm>
-            <a:off x="3945635" y="2636520"/>
-            <a:ext cx="8246363" cy="1584959"/>
-          </a:xfrm>
-          <a:prstGeom prst="rect">
-            <a:avLst/>
-          </a:prstGeom>
-          <a:blipFill>
-            <a:blip r:embed="rId2" cstate="print"/>
-            <a:stretch>
-              <a:fillRect/>
-            </a:stretch>
-          </a:blipFill>
-        </p:spPr>
-        <p:txBody>
-          <a:bodyPr wrap="square" lIns="0" tIns="0" rIns="0" bIns="0" rtlCol="0"/>
-          <a:lstStyle/>
-          <a:p>
-            <a:endParaRPr/>
-          </a:p>
-        </p:txBody>
-      </p:sp>
-      <p:sp>
-        <p:nvSpPr>
-          <p:cNvPr id="4" name="object 4"/>
-          <p:cNvSpPr txBox="1">
+          <p:cNvPr id="2" name="Título 1">
+            <a:extLst>
+              <a:ext uri="{FF2B5EF4-FFF2-40B4-BE49-F238E27FC236}">
+                <a16:creationId xmlns:a16="http://schemas.microsoft.com/office/drawing/2014/main" id="{6E35989B-EC37-4F64-96CC-43C44129BF0A}"/>
+              </a:ext>
+            </a:extLst>
+          </p:cNvPr>
+          <p:cNvSpPr>
             <a:spLocks noGrp="1"/>
           </p:cNvSpPr>
           <p:nvPr>
@@ -10038,61 +11949,94 @@
         </p:nvSpPr>
         <p:spPr>
           <a:xfrm>
-            <a:off x="4513326" y="3165729"/>
-            <a:ext cx="2233295" cy="513715"/>
+            <a:off x="590550" y="206752"/>
+            <a:ext cx="10991850" cy="307777"/>
           </a:xfrm>
-          <a:prstGeom prst="rect">
-            <a:avLst/>
-          </a:prstGeom>
         </p:spPr>
         <p:txBody>
-          <a:bodyPr vert="horz" wrap="square" lIns="0" tIns="13335" rIns="0" bIns="0" rtlCol="0">
-            <a:spAutoFit/>
-          </a:bodyPr>
+          <a:bodyPr/>
           <a:lstStyle/>
           <a:p>
+            <a:r>
+              <a:rPr lang="en-US" sz="2000" dirty="0"/>
+              <a:t>Learning outcome #4 – Bend waveguide radius vs. loss – deep</a:t>
+            </a:r>
+            <a:endParaRPr lang="es-ES" dirty="0"/>
+          </a:p>
+        </p:txBody>
+      </p:sp>
+      <p:sp>
+        <p:nvSpPr>
+          <p:cNvPr id="3" name="Marcador de texto 2">
+            <a:extLst>
+              <a:ext uri="{FF2B5EF4-FFF2-40B4-BE49-F238E27FC236}">
+                <a16:creationId xmlns:a16="http://schemas.microsoft.com/office/drawing/2014/main" id="{1A9C6F30-2C1A-453E-8E40-61C22FF1F397}"/>
+              </a:ext>
+            </a:extLst>
+          </p:cNvPr>
+          <p:cNvSpPr>
+            <a:spLocks noGrp="1"/>
+          </p:cNvSpPr>
+          <p:nvPr>
+            <p:ph type="body" idx="1"/>
+          </p:nvPr>
+        </p:nvSpPr>
+        <p:spPr>
+          <a:xfrm>
+            <a:off x="6086475" y="2675930"/>
+            <a:ext cx="5419725" cy="1002268"/>
+          </a:xfrm>
+        </p:spPr>
+        <p:txBody>
+          <a:bodyPr/>
+          <a:lstStyle/>
+          <a:p>
+            <a:r>
+              <a:rPr lang="es-ES" sz="1200" dirty="0"/>
+              <a:t>En la gráfica que muestra el índice efectivo frente al radio de curvatura se puede observar que para el modo TE0 el índice se mantiene prácticamente constante e independiente del radio de curvatura (aprox. 1.59), lo que demuestra la gran estabilidad y el fuerte confinamiento de la luz en la guía </a:t>
+            </a:r>
+            <a:r>
+              <a:rPr lang="es-ES" sz="1200" i="1" dirty="0" err="1"/>
+              <a:t>deep</a:t>
+            </a:r>
+            <a:r>
+              <a:rPr lang="es-ES" sz="1200" dirty="0"/>
+              <a:t>. Por el contrario, el modo TM0 sufre una caída drástica en 25 µm, indicando una deformación severa del modo. </a:t>
+            </a:r>
+          </a:p>
+        </p:txBody>
+      </p:sp>
+      <p:sp>
+        <p:nvSpPr>
+          <p:cNvPr id="4" name="Marcador de pie de página 3">
+            <a:extLst>
+              <a:ext uri="{FF2B5EF4-FFF2-40B4-BE49-F238E27FC236}">
+                <a16:creationId xmlns:a16="http://schemas.microsoft.com/office/drawing/2014/main" id="{77B520AA-6A00-4259-A6FE-F826A76F321B}"/>
+              </a:ext>
+            </a:extLst>
+          </p:cNvPr>
+          <p:cNvSpPr>
+            <a:spLocks noGrp="1"/>
+          </p:cNvSpPr>
+          <p:nvPr>
+            <p:ph type="ftr" sz="quarter" idx="5"/>
+          </p:nvPr>
+        </p:nvSpPr>
+        <p:spPr/>
+        <p:txBody>
+          <a:bodyPr/>
+          <a:lstStyle/>
+          <a:p>
             <a:pPr marL="12700">
-              <a:lnSpc>
-                <a:spcPct val="100000"/>
-              </a:lnSpc>
               <a:spcBef>
-                <a:spcPts val="105"/>
+                <a:spcPts val="15"/>
               </a:spcBef>
             </a:pPr>
             <a:r>
-              <a:rPr sz="3200" b="1" spc="-5" dirty="0">
-                <a:solidFill>
-                  <a:srgbClr val="FFFFFF"/>
-                </a:solidFill>
-                <a:latin typeface="Lucida Sans"/>
-                <a:cs typeface="Lucida Sans"/>
-              </a:rPr>
-              <a:t>Thank</a:t>
-            </a:r>
-            <a:r>
-              <a:rPr sz="3200" b="1" spc="-55" dirty="0">
-                <a:solidFill>
-                  <a:srgbClr val="FFFFFF"/>
-                </a:solidFill>
-                <a:latin typeface="Lucida Sans"/>
-                <a:cs typeface="Lucida Sans"/>
-              </a:rPr>
-              <a:t> </a:t>
-            </a:r>
-            <a:r>
-              <a:rPr sz="3200" b="1" dirty="0">
-                <a:solidFill>
-                  <a:srgbClr val="FFFFFF"/>
-                </a:solidFill>
-                <a:latin typeface="Lucida Sans"/>
-                <a:cs typeface="Lucida Sans"/>
-              </a:rPr>
-              <a:t>you</a:t>
-            </a:r>
-            <a:endParaRPr sz="3200">
-              <a:latin typeface="Lucida Sans"/>
-              <a:cs typeface="Lucida Sans"/>
-            </a:endParaRPr>
+              <a:rPr lang="es-ES" spc="-5"/>
+              <a:t>LAB 1.0. WAVEGUIDES</a:t>
+            </a:r>
+            <a:endParaRPr lang="es-ES" spc="-5" dirty="0"/>
           </a:p>
         </p:txBody>
       </p:sp>
@@ -10101,7 +12045,7 @@
           <p:cNvPr id="5" name="Marcador de número de diapositiva 4">
             <a:extLst>
               <a:ext uri="{FF2B5EF4-FFF2-40B4-BE49-F238E27FC236}">
-                <a16:creationId xmlns:a16="http://schemas.microsoft.com/office/drawing/2014/main" id="{B052DA19-AD24-7D24-2AE9-51F8F5A7F5E0}"/>
+                <a16:creationId xmlns:a16="http://schemas.microsoft.com/office/drawing/2014/main" id="{386C9D40-BFCD-4E7B-A72F-34A171AD259C}"/>
               </a:ext>
             </a:extLst>
           </p:cNvPr>
@@ -10125,7 +12069,385 @@
           </a:p>
         </p:txBody>
       </p:sp>
+      <p:pic>
+        <p:nvPicPr>
+          <p:cNvPr id="7" name="Imagen 6">
+            <a:extLst>
+              <a:ext uri="{FF2B5EF4-FFF2-40B4-BE49-F238E27FC236}">
+                <a16:creationId xmlns:a16="http://schemas.microsoft.com/office/drawing/2014/main" id="{AFA37951-1C73-4E76-B943-19DEDC10DA9A}"/>
+              </a:ext>
+            </a:extLst>
+          </p:cNvPr>
+          <p:cNvPicPr>
+            <a:picLocks noChangeAspect="1"/>
+          </p:cNvPicPr>
+          <p:nvPr/>
+        </p:nvPicPr>
+        <p:blipFill>
+          <a:blip r:embed="rId2"/>
+          <a:stretch>
+            <a:fillRect/>
+          </a:stretch>
+        </p:blipFill>
+        <p:spPr>
+          <a:xfrm>
+            <a:off x="838200" y="1418099"/>
+            <a:ext cx="4453467" cy="3517930"/>
+          </a:xfrm>
+          <a:prstGeom prst="rect">
+            <a:avLst/>
+          </a:prstGeom>
+        </p:spPr>
+      </p:pic>
     </p:spTree>
+    <p:extLst>
+      <p:ext uri="{BB962C8B-B14F-4D97-AF65-F5344CB8AC3E}">
+        <p14:creationId xmlns:p14="http://schemas.microsoft.com/office/powerpoint/2010/main" val="1094044524"/>
+      </p:ext>
+    </p:extLst>
+  </p:cSld>
+  <p:clrMapOvr>
+    <a:masterClrMapping/>
+  </p:clrMapOvr>
+</p:sld>
+</file>
+
+<file path=ppt/slides/slide9.xml><?xml version="1.0" encoding="utf-8"?>
+<p:sld xmlns:a="http://schemas.openxmlformats.org/drawingml/2006/main" xmlns:r="http://schemas.openxmlformats.org/officeDocument/2006/relationships" xmlns:p="http://schemas.openxmlformats.org/presentationml/2006/main">
+  <p:cSld>
+    <p:spTree>
+      <p:nvGrpSpPr>
+        <p:cNvPr id="1" name=""/>
+        <p:cNvGrpSpPr/>
+        <p:nvPr/>
+      </p:nvGrpSpPr>
+      <p:grpSpPr>
+        <a:xfrm>
+          <a:off x="0" y="0"/>
+          <a:ext cx="0" cy="0"/>
+          <a:chOff x="0" y="0"/>
+          <a:chExt cx="0" cy="0"/>
+        </a:xfrm>
+      </p:grpSpPr>
+      <p:sp>
+        <p:nvSpPr>
+          <p:cNvPr id="2" name="Título 1">
+            <a:extLst>
+              <a:ext uri="{FF2B5EF4-FFF2-40B4-BE49-F238E27FC236}">
+                <a16:creationId xmlns:a16="http://schemas.microsoft.com/office/drawing/2014/main" id="{6E35989B-EC37-4F64-96CC-43C44129BF0A}"/>
+              </a:ext>
+            </a:extLst>
+          </p:cNvPr>
+          <p:cNvSpPr>
+            <a:spLocks noGrp="1"/>
+          </p:cNvSpPr>
+          <p:nvPr>
+            <p:ph type="title"/>
+          </p:nvPr>
+        </p:nvSpPr>
+        <p:spPr>
+          <a:xfrm>
+            <a:off x="590550" y="206752"/>
+            <a:ext cx="10991850" cy="307777"/>
+          </a:xfrm>
+        </p:spPr>
+        <p:txBody>
+          <a:bodyPr/>
+          <a:lstStyle/>
+          <a:p>
+            <a:r>
+              <a:rPr lang="en-US" sz="2000" dirty="0"/>
+              <a:t>Learning outcome #4 – Bend waveguide radius vs. loss – deep</a:t>
+            </a:r>
+            <a:endParaRPr lang="es-ES" dirty="0"/>
+          </a:p>
+        </p:txBody>
+      </p:sp>
+      <p:sp>
+        <p:nvSpPr>
+          <p:cNvPr id="4" name="Marcador de pie de página 3">
+            <a:extLst>
+              <a:ext uri="{FF2B5EF4-FFF2-40B4-BE49-F238E27FC236}">
+                <a16:creationId xmlns:a16="http://schemas.microsoft.com/office/drawing/2014/main" id="{77B520AA-6A00-4259-A6FE-F826A76F321B}"/>
+              </a:ext>
+            </a:extLst>
+          </p:cNvPr>
+          <p:cNvSpPr>
+            <a:spLocks noGrp="1"/>
+          </p:cNvSpPr>
+          <p:nvPr>
+            <p:ph type="ftr" sz="quarter" idx="5"/>
+          </p:nvPr>
+        </p:nvSpPr>
+        <p:spPr/>
+        <p:txBody>
+          <a:bodyPr/>
+          <a:lstStyle/>
+          <a:p>
+            <a:pPr marL="12700">
+              <a:spcBef>
+                <a:spcPts val="15"/>
+              </a:spcBef>
+            </a:pPr>
+            <a:r>
+              <a:rPr lang="es-ES" spc="-5"/>
+              <a:t>LAB 1.0. WAVEGUIDES</a:t>
+            </a:r>
+            <a:endParaRPr lang="es-ES" spc="-5" dirty="0"/>
+          </a:p>
+        </p:txBody>
+      </p:sp>
+      <p:sp>
+        <p:nvSpPr>
+          <p:cNvPr id="5" name="Marcador de número de diapositiva 4">
+            <a:extLst>
+              <a:ext uri="{FF2B5EF4-FFF2-40B4-BE49-F238E27FC236}">
+                <a16:creationId xmlns:a16="http://schemas.microsoft.com/office/drawing/2014/main" id="{386C9D40-BFCD-4E7B-A72F-34A171AD259C}"/>
+              </a:ext>
+            </a:extLst>
+          </p:cNvPr>
+          <p:cNvSpPr>
+            <a:spLocks noGrp="1"/>
+          </p:cNvSpPr>
+          <p:nvPr>
+            <p:ph type="sldNum" sz="quarter" idx="7"/>
+          </p:nvPr>
+        </p:nvSpPr>
+        <p:spPr/>
+        <p:txBody>
+          <a:bodyPr/>
+          <a:lstStyle/>
+          <a:p>
+            <a:fld id="{B6F15528-21DE-4FAA-801E-634DDDAF4B2B}" type="slidenum">
+              <a:rPr lang="es-ES" smtClean="0"/>
+              <a:t>9</a:t>
+            </a:fld>
+            <a:endParaRPr lang="es-ES"/>
+          </a:p>
+        </p:txBody>
+      </p:sp>
+      <p:sp>
+        <p:nvSpPr>
+          <p:cNvPr id="10" name="Marcador de texto 2">
+            <a:extLst>
+              <a:ext uri="{FF2B5EF4-FFF2-40B4-BE49-F238E27FC236}">
+                <a16:creationId xmlns:a16="http://schemas.microsoft.com/office/drawing/2014/main" id="{82705104-5DF5-473B-9FE2-0429FB31E93C}"/>
+              </a:ext>
+            </a:extLst>
+          </p:cNvPr>
+          <p:cNvSpPr txBox="1">
+            <a:spLocks/>
+          </p:cNvSpPr>
+          <p:nvPr/>
+        </p:nvSpPr>
+        <p:spPr>
+          <a:xfrm>
+            <a:off x="6133991" y="1612665"/>
+            <a:ext cx="4960620" cy="1107996"/>
+          </a:xfrm>
+          <a:prstGeom prst="rect">
+            <a:avLst/>
+          </a:prstGeom>
+        </p:spPr>
+        <p:txBody>
+          <a:bodyPr wrap="square" lIns="0" tIns="0" rIns="0" bIns="0">
+            <a:spAutoFit/>
+          </a:bodyPr>
+          <a:lstStyle>
+            <a:lvl1pPr marL="0">
+              <a:defRPr>
+                <a:latin typeface="+mn-lt"/>
+                <a:ea typeface="+mn-ea"/>
+                <a:cs typeface="+mn-cs"/>
+              </a:defRPr>
+            </a:lvl1pPr>
+            <a:lvl2pPr marL="457200">
+              <a:defRPr>
+                <a:latin typeface="+mn-lt"/>
+                <a:ea typeface="+mn-ea"/>
+                <a:cs typeface="+mn-cs"/>
+              </a:defRPr>
+            </a:lvl2pPr>
+            <a:lvl3pPr marL="914400">
+              <a:defRPr>
+                <a:latin typeface="+mn-lt"/>
+                <a:ea typeface="+mn-ea"/>
+                <a:cs typeface="+mn-cs"/>
+              </a:defRPr>
+            </a:lvl3pPr>
+            <a:lvl4pPr marL="1371600">
+              <a:defRPr>
+                <a:latin typeface="+mn-lt"/>
+                <a:ea typeface="+mn-ea"/>
+                <a:cs typeface="+mn-cs"/>
+              </a:defRPr>
+            </a:lvl4pPr>
+            <a:lvl5pPr marL="1828800">
+              <a:defRPr>
+                <a:latin typeface="+mn-lt"/>
+                <a:ea typeface="+mn-ea"/>
+                <a:cs typeface="+mn-cs"/>
+              </a:defRPr>
+            </a:lvl5pPr>
+            <a:lvl6pPr marL="2286000">
+              <a:defRPr>
+                <a:latin typeface="+mn-lt"/>
+                <a:ea typeface="+mn-ea"/>
+                <a:cs typeface="+mn-cs"/>
+              </a:defRPr>
+            </a:lvl6pPr>
+            <a:lvl7pPr marL="2743200">
+              <a:defRPr>
+                <a:latin typeface="+mn-lt"/>
+                <a:ea typeface="+mn-ea"/>
+                <a:cs typeface="+mn-cs"/>
+              </a:defRPr>
+            </a:lvl7pPr>
+            <a:lvl8pPr marL="3200400">
+              <a:defRPr>
+                <a:latin typeface="+mn-lt"/>
+                <a:ea typeface="+mn-ea"/>
+                <a:cs typeface="+mn-cs"/>
+              </a:defRPr>
+            </a:lvl8pPr>
+            <a:lvl9pPr marL="3657600">
+              <a:defRPr>
+                <a:latin typeface="+mn-lt"/>
+                <a:ea typeface="+mn-ea"/>
+                <a:cs typeface="+mn-cs"/>
+              </a:defRPr>
+            </a:lvl9pPr>
+          </a:lstStyle>
+          <a:p>
+            <a:r>
+              <a:rPr lang="es-ES" sz="1200" kern="0" dirty="0">
+                <a:solidFill>
+                  <a:sysClr val="windowText" lastClr="000000"/>
+                </a:solidFill>
+              </a:rPr>
+              <a:t>Respecto a la gráfica de las perdidas para diferentes curvaturas para el modo TE, podemos observar que  </a:t>
+            </a:r>
+            <a:r>
+              <a:rPr lang="es-ES" sz="1200" dirty="0"/>
+              <a:t>el radio de 25 µm supera el límite de pérdidas aceptable (&gt; 0.1 dB) debido al alto </a:t>
+            </a:r>
+            <a:r>
+              <a:rPr lang="es-ES" sz="1200" i="1" dirty="0" err="1"/>
+              <a:t>mismatch</a:t>
+            </a:r>
+            <a:r>
+              <a:rPr lang="es-ES" sz="1200" dirty="0"/>
+              <a:t>. Sin embargo, a partir de 50 µm, la pérdida total cae drásticamente a valores seguros (~0.04 dB), estableciendo este como el radio mínimo seguro donde las pérdidas por propagación son despreciables.</a:t>
+            </a:r>
+            <a:endParaRPr lang="es-ES" sz="1200" kern="0" dirty="0">
+              <a:solidFill>
+                <a:sysClr val="windowText" lastClr="000000"/>
+              </a:solidFill>
+            </a:endParaRPr>
+          </a:p>
+        </p:txBody>
+      </p:sp>
+      <p:pic>
+        <p:nvPicPr>
+          <p:cNvPr id="16" name="Imagen 15">
+            <a:extLst>
+              <a:ext uri="{FF2B5EF4-FFF2-40B4-BE49-F238E27FC236}">
+                <a16:creationId xmlns:a16="http://schemas.microsoft.com/office/drawing/2014/main" id="{CEF01B9A-780C-4F6B-AA81-6AF195AE7CD4}"/>
+              </a:ext>
+            </a:extLst>
+          </p:cNvPr>
+          <p:cNvPicPr>
+            <a:picLocks noChangeAspect="1"/>
+          </p:cNvPicPr>
+          <p:nvPr/>
+        </p:nvPicPr>
+        <p:blipFill>
+          <a:blip r:embed="rId2"/>
+          <a:stretch>
+            <a:fillRect/>
+          </a:stretch>
+        </p:blipFill>
+        <p:spPr>
+          <a:xfrm>
+            <a:off x="1135380" y="836429"/>
+            <a:ext cx="3962400" cy="2660469"/>
+          </a:xfrm>
+          <a:prstGeom prst="rect">
+            <a:avLst/>
+          </a:prstGeom>
+        </p:spPr>
+      </p:pic>
+      <p:pic>
+        <p:nvPicPr>
+          <p:cNvPr id="8" name="Imagen 7">
+            <a:extLst>
+              <a:ext uri="{FF2B5EF4-FFF2-40B4-BE49-F238E27FC236}">
+                <a16:creationId xmlns:a16="http://schemas.microsoft.com/office/drawing/2014/main" id="{8BD00B6F-61C5-4C92-92A1-8E9FF40389F6}"/>
+              </a:ext>
+            </a:extLst>
+          </p:cNvPr>
+          <p:cNvPicPr>
+            <a:picLocks noChangeAspect="1"/>
+          </p:cNvPicPr>
+          <p:nvPr/>
+        </p:nvPicPr>
+        <p:blipFill>
+          <a:blip r:embed="rId3"/>
+          <a:stretch>
+            <a:fillRect/>
+          </a:stretch>
+        </p:blipFill>
+        <p:spPr>
+          <a:xfrm>
+            <a:off x="1135380" y="3715265"/>
+            <a:ext cx="3962399" cy="2679608"/>
+          </a:xfrm>
+          <a:prstGeom prst="rect">
+            <a:avLst/>
+          </a:prstGeom>
+        </p:spPr>
+      </p:pic>
+      <p:sp>
+        <p:nvSpPr>
+          <p:cNvPr id="9" name="CuadroTexto 8">
+            <a:extLst>
+              <a:ext uri="{FF2B5EF4-FFF2-40B4-BE49-F238E27FC236}">
+                <a16:creationId xmlns:a16="http://schemas.microsoft.com/office/drawing/2014/main" id="{4E6FFA97-BEF9-465D-9837-BFF2C3E8D676}"/>
+              </a:ext>
+            </a:extLst>
+          </p:cNvPr>
+          <p:cNvSpPr txBox="1"/>
+          <p:nvPr/>
+        </p:nvSpPr>
+        <p:spPr>
+          <a:xfrm>
+            <a:off x="6108590" y="4343400"/>
+            <a:ext cx="4960621" cy="1200329"/>
+          </a:xfrm>
+          <a:prstGeom prst="rect">
+            <a:avLst/>
+          </a:prstGeom>
+          <a:noFill/>
+        </p:spPr>
+        <p:txBody>
+          <a:bodyPr wrap="square">
+            <a:spAutoFit/>
+          </a:bodyPr>
+          <a:lstStyle/>
+          <a:p>
+            <a:r>
+              <a:rPr lang="es-ES" sz="1200" dirty="0"/>
+              <a:t>Por otro lado, el modo TM muestra una sensibilidad crítica a la curvatura. En R=25 µm, la pérdida es muy alta (&gt; 250 dB), indicando que el modo sufre radiación total o corte. Sin embargo, en R=50 µm, la guía recupera su funcionamiento óptimo con pérdidas casi nulas. Por tanto, el radio seguro global del diseño se fija en 50 µm, condicionado por la estabilidad de esta polarización</a:t>
+            </a:r>
+          </a:p>
+        </p:txBody>
+      </p:sp>
+    </p:spTree>
+    <p:extLst>
+      <p:ext uri="{BB962C8B-B14F-4D97-AF65-F5344CB8AC3E}">
+        <p14:creationId xmlns:p14="http://schemas.microsoft.com/office/powerpoint/2010/main" val="2888553728"/>
+      </p:ext>
+    </p:extLst>
   </p:cSld>
   <p:clrMapOvr>
     <a:masterClrMapping/>

--- a/LabBook_10.pptx
+++ b/LabBook_10.pptx
@@ -399,7 +399,7 @@
           <a:p>
             <a:fld id="{8438F8DC-35B0-48E6-A86E-42F1F08DD00F}" type="datetimeFigureOut">
               <a:rPr lang="es-ES" smtClean="0"/>
-              <a:t>04/03/2026</a:t>
+              <a:t>5/3/26</a:t>
             </a:fld>
             <a:endParaRPr lang="es-ES"/>
           </a:p>
@@ -576,7 +576,7 @@
           <a:p>
             <a:fld id="{FACBDC12-F39B-4B97-8F4D-6734F9D366FF}" type="datetimeFigureOut">
               <a:rPr lang="es-ES" smtClean="0"/>
-              <a:t>04/03/2026</a:t>
+              <a:t>5/3/26</a:t>
             </a:fld>
             <a:endParaRPr lang="es-ES"/>
           </a:p>
@@ -3259,36 +3259,6 @@
       </p:sp>
       <p:sp>
         <p:nvSpPr>
-          <p:cNvPr id="3" name="Marcador de texto 2">
-            <a:extLst>
-              <a:ext uri="{FF2B5EF4-FFF2-40B4-BE49-F238E27FC236}">
-                <a16:creationId xmlns:a16="http://schemas.microsoft.com/office/drawing/2014/main" id="{C6F929DE-2303-44AD-9A2D-C4AD0C6A9616}"/>
-              </a:ext>
-            </a:extLst>
-          </p:cNvPr>
-          <p:cNvSpPr>
-            <a:spLocks noGrp="1"/>
-          </p:cNvSpPr>
-          <p:nvPr>
-            <p:ph type="body" idx="1"/>
-          </p:nvPr>
-        </p:nvSpPr>
-        <p:spPr>
-          <a:xfrm>
-            <a:off x="609600" y="4419600"/>
-            <a:ext cx="10972800" cy="1684020"/>
-          </a:xfrm>
-        </p:spPr>
-        <p:txBody>
-          <a:bodyPr/>
-          <a:lstStyle/>
-          <a:p>
-            <a:endParaRPr lang="es-ES" dirty="0"/>
-          </a:p>
-        </p:txBody>
-      </p:sp>
-      <p:sp>
-        <p:nvSpPr>
           <p:cNvPr id="4" name="Marcador de pie de página 3">
             <a:extLst>
               <a:ext uri="{FF2B5EF4-FFF2-40B4-BE49-F238E27FC236}">
@@ -3372,8 +3342,8 @@
         </p:blipFill>
         <p:spPr>
           <a:xfrm>
-            <a:off x="819150" y="1247272"/>
-            <a:ext cx="4978173" cy="2898008"/>
+            <a:off x="749073" y="1972246"/>
+            <a:ext cx="5270728" cy="3068316"/>
           </a:xfrm>
           <a:prstGeom prst="rect">
             <a:avLst/>
@@ -3402,8 +3372,8 @@
         </p:blipFill>
         <p:spPr>
           <a:xfrm>
-            <a:off x="6400800" y="1247272"/>
-            <a:ext cx="4978173" cy="2898008"/>
+            <a:off x="6330723" y="1972246"/>
+            <a:ext cx="5270728" cy="3068316"/>
           </a:xfrm>
           <a:prstGeom prst="rect">
             <a:avLst/>
@@ -3424,7 +3394,7 @@
         </p:nvSpPr>
         <p:spPr>
           <a:xfrm>
-            <a:off x="2743200" y="764855"/>
+            <a:off x="2745186" y="1373955"/>
             <a:ext cx="714943" cy="369332"/>
           </a:xfrm>
           <a:prstGeom prst="rect">
@@ -3461,7 +3431,7 @@
         </p:nvSpPr>
         <p:spPr>
           <a:xfrm>
-            <a:off x="8532414" y="762500"/>
+            <a:off x="8534400" y="1371600"/>
             <a:ext cx="714943" cy="369332"/>
           </a:xfrm>
           <a:prstGeom prst="rect">
@@ -3937,14 +3907,43 @@
           </a:p>
         </p:txBody>
       </p:sp>
+      <p:sp>
+        <p:nvSpPr>
+          <p:cNvPr id="5" name="Marcador de número de diapositiva 4">
+            <a:extLst>
+              <a:ext uri="{FF2B5EF4-FFF2-40B4-BE49-F238E27FC236}">
+                <a16:creationId xmlns:a16="http://schemas.microsoft.com/office/drawing/2014/main" id="{AF9A3757-B02C-4AD6-BCE3-635DC7345E32}"/>
+              </a:ext>
+            </a:extLst>
+          </p:cNvPr>
+          <p:cNvSpPr>
+            <a:spLocks noGrp="1"/>
+          </p:cNvSpPr>
+          <p:nvPr>
+            <p:ph type="sldNum" sz="quarter" idx="7"/>
+          </p:nvPr>
+        </p:nvSpPr>
+        <p:spPr/>
+        <p:txBody>
+          <a:bodyPr/>
+          <a:lstStyle/>
+          <a:p>
+            <a:fld id="{B6F15528-21DE-4FAA-801E-634DDDAF4B2B}" type="slidenum">
+              <a:rPr lang="es-ES" smtClean="0"/>
+              <a:t>13</a:t>
+            </a:fld>
+            <a:endParaRPr lang="es-ES"/>
+          </a:p>
+        </p:txBody>
+      </p:sp>
       <mc:AlternateContent xmlns:mc="http://schemas.openxmlformats.org/markup-compatibility/2006">
         <mc:Choice xmlns:a14="http://schemas.microsoft.com/office/drawing/2010/main" Requires="a14">
           <p:sp>
             <p:nvSpPr>
-              <p:cNvPr id="3" name="Marcador de texto 2">
+              <p:cNvPr id="8" name="Marcador de texto 2">
                 <a:extLst>
                   <a:ext uri="{FF2B5EF4-FFF2-40B4-BE49-F238E27FC236}">
-                    <a16:creationId xmlns:a16="http://schemas.microsoft.com/office/drawing/2014/main" id="{1556D432-6169-4784-905C-38807A0FED9D}"/>
+                    <a16:creationId xmlns:a16="http://schemas.microsoft.com/office/drawing/2014/main" id="{68F66DC8-8B17-9F74-C57A-0EEBDCB9C4C5}"/>
                   </a:ext>
                 </a:extLst>
               </p:cNvPr>
@@ -3957,16 +3956,17 @@
             </p:nvSpPr>
             <p:spPr>
               <a:xfrm>
-                <a:off x="609600" y="762000"/>
-                <a:ext cx="10972800" cy="4476418"/>
+                <a:off x="304800" y="767094"/>
+                <a:ext cx="11582400" cy="5215082"/>
               </a:xfrm>
             </p:spPr>
             <p:txBody>
               <a:bodyPr/>
               <a:lstStyle/>
               <a:p>
-                <a:pPr marL="228600" indent="-228600">
-                  <a:buAutoNum type="arabicPeriod"/>
+                <a:pPr marL="171450" indent="-171450">
+                  <a:buFont typeface="Arial" panose="020B0604020202020204" pitchFamily="34" charset="0"/>
+                  <a:buChar char="•"/>
                 </a:pPr>
                 <a:r>
                   <a:rPr lang="es-ES" sz="1200" dirty="0"/>
@@ -4021,10 +4021,13 @@
                 </a:r>
               </a:p>
               <a:p>
+                <a:pPr marL="228600" indent="-228600">
+                  <a:buAutoNum type="arabicPeriod"/>
+                </a:pPr>
                 <a:endParaRPr lang="es-ES" sz="1200" dirty="0"/>
               </a:p>
               <a:p>
-                <a:pPr marL="171450" indent="-171450">
+                <a:pPr marL="628650" lvl="1" indent="-171450">
                   <a:buFont typeface="Arial" panose="020B0604020202020204" pitchFamily="34" charset="0"/>
                   <a:buChar char="•"/>
                 </a:pPr>
@@ -4111,10 +4114,11 @@
                 </a:r>
               </a:p>
               <a:p>
+                <a:pPr lvl="1"/>
                 <a:endParaRPr lang="es-ES" sz="1200" dirty="0"/>
               </a:p>
               <a:p>
-                <a:pPr marL="171450" indent="-171450">
+                <a:pPr marL="628650" lvl="1" indent="-171450">
                   <a:buFont typeface="Arial" panose="020B0604020202020204" pitchFamily="34" charset="0"/>
                   <a:buChar char="•"/>
                 </a:pPr>
@@ -4189,12 +4193,84 @@
                 </a:r>
               </a:p>
               <a:p>
+                <a:pPr marL="628650" lvl="1" indent="-171450">
+                  <a:buFont typeface="Arial" panose="020B0604020202020204" pitchFamily="34" charset="0"/>
+                  <a:buChar char="•"/>
+                </a:pPr>
                 <a:endParaRPr lang="es-ES" sz="1200" dirty="0"/>
               </a:p>
               <a:p>
+                <a:pPr marL="171450" indent="-171450">
+                  <a:buFont typeface="Arial" panose="020B0604020202020204" pitchFamily="34" charset="0"/>
+                  <a:buChar char="•"/>
+                </a:pPr>
                 <a:r>
                   <a:rPr lang="es-ES" sz="1200" dirty="0"/>
-                  <a:t>2. Radio de curvatura y densidad de integración:</a:t>
+                  <a:t>Además, se puede observar en las gráficas una gran diferencia en cómo se comporta la polarización al variar el ancho de la guía:</a:t>
+                </a:r>
+              </a:p>
+              <a:p>
+                <a:pPr marL="171450" indent="-171450">
+                  <a:buFont typeface="Arial" panose="020B0604020202020204" pitchFamily="34" charset="0"/>
+                  <a:buChar char="•"/>
+                </a:pPr>
+                <a:endParaRPr lang="es-ES" sz="1200" dirty="0"/>
+              </a:p>
+              <a:p>
+                <a:pPr marL="628650" lvl="1" indent="-171450">
+                  <a:buFont typeface="Arial" panose="020B0604020202020204" pitchFamily="34" charset="0"/>
+                  <a:buChar char="•"/>
+                </a:pPr>
+                <a:r>
+                  <a:rPr lang="es-ES" sz="1200" dirty="0"/>
+                  <a:t>En </a:t>
+                </a:r>
+                <a:r>
+                  <a:rPr lang="es-ES" sz="1200" dirty="0" err="1"/>
+                  <a:t>SiNx</a:t>
+                </a:r>
+                <a:r>
+                  <a:rPr lang="es-ES" sz="1200" dirty="0"/>
+                  <a:t>: La polarización es bastante estable. Si nos fijamos en la escala de colores (fracción TE), vemos que los modos mantienen su identidad todo el rato. El modo rojo sigue siendo rojo (TE) y el azul sigue siendo azul (TM) en todo el rango de anchos, sin llegar a cruzarse ni mezclarse.</a:t>
+                </a:r>
+              </a:p>
+              <a:p>
+                <a:pPr marL="171450" indent="-171450">
+                  <a:buFont typeface="Arial" panose="020B0604020202020204" pitchFamily="34" charset="0"/>
+                  <a:buChar char="•"/>
+                </a:pPr>
+                <a:endParaRPr lang="es-ES" sz="1200" dirty="0"/>
+              </a:p>
+              <a:p>
+                <a:pPr marL="628650" lvl="1" indent="-171450">
+                  <a:buFont typeface="Arial" panose="020B0604020202020204" pitchFamily="34" charset="0"/>
+                  <a:buChar char="•"/>
+                </a:pPr>
+                <a:r>
+                  <a:rPr lang="es-ES" sz="1200" dirty="0"/>
+                  <a:t>En SOI: Vemos que hay mucha más sensibilidad geométrica. Alrededor de los 0.65 - 0.7 </a:t>
+                </a:r>
+                <a14:m>
+                  <m:oMath xmlns:m="http://schemas.openxmlformats.org/officeDocument/2006/math">
+                    <m:r>
+                      <a:rPr lang="es-ES" sz="1200" i="1" smtClean="0">
+                        <a:latin typeface="Cambria Math" panose="02040503050406030204" pitchFamily="18" charset="0"/>
+                        <a:ea typeface="Cambria Math" panose="02040503050406030204" pitchFamily="18" charset="0"/>
+                      </a:rPr>
+                      <m:t>𝜇</m:t>
+                    </m:r>
+                    <m:r>
+                      <a:rPr lang="es-ES" sz="1200" b="0" i="1" smtClean="0">
+                        <a:latin typeface="Cambria Math" panose="02040503050406030204" pitchFamily="18" charset="0"/>
+                        <a:ea typeface="Cambria Math" panose="02040503050406030204" pitchFamily="18" charset="0"/>
+                      </a:rPr>
+                      <m:t>𝑚</m:t>
+                    </m:r>
+                  </m:oMath>
+                </a14:m>
+                <a:r>
+                  <a:rPr lang="es-ES" sz="1200" dirty="0"/>
+                  <a:t>, se nota claramente un cruce de modos entre el modo 1 y el modo 2. Justo en ese punto, los colores de los marcadores se invierten por completo. Esto significa que los modos intercambian su polarización. Esto nos indica que en la tecnología SOI hay que tener bastante más cuidado al elegir el ancho de la guía, ya que un error de diseño nos puede rotar la polarización de la luz en el circuito.</a:t>
                 </a:r>
               </a:p>
               <a:p>
@@ -4202,6 +4278,19 @@
               </a:p>
               <a:p>
                 <a:pPr marL="171450" indent="-171450">
+                  <a:buFont typeface="Arial" panose="020B0604020202020204" pitchFamily="34" charset="0"/>
+                  <a:buChar char="•"/>
+                </a:pPr>
+                <a:r>
+                  <a:rPr lang="es-ES" sz="1200" dirty="0"/>
+                  <a:t>Radio de curvatura y densidad de integración:</a:t>
+                </a:r>
+              </a:p>
+              <a:p>
+                <a:endParaRPr lang="es-ES" sz="1200" dirty="0"/>
+              </a:p>
+              <a:p>
+                <a:pPr marL="628650" lvl="1" indent="-171450">
                   <a:buFont typeface="Arial" panose="020B0604020202020204" pitchFamily="34" charset="0"/>
                   <a:buChar char="•"/>
                 </a:pPr>
@@ -4277,10 +4366,11 @@
                 </a:r>
               </a:p>
               <a:p>
+                <a:pPr lvl="1"/>
                 <a:endParaRPr lang="es-ES" sz="1200" dirty="0"/>
               </a:p>
               <a:p>
-                <a:pPr marL="171450" indent="-171450">
+                <a:pPr marL="628650" lvl="1" indent="-171450">
                   <a:buFont typeface="Arial" panose="020B0604020202020204" pitchFamily="34" charset="0"/>
                   <a:buChar char="•"/>
                 </a:pPr>
@@ -4331,9 +4421,13 @@
                 <a:endParaRPr lang="es-ES" sz="1200" dirty="0"/>
               </a:p>
               <a:p>
+                <a:pPr marL="171450" indent="-171450">
+                  <a:buFont typeface="Arial" panose="020B0604020202020204" pitchFamily="34" charset="0"/>
+                  <a:buChar char="•"/>
+                </a:pPr>
                 <a:r>
                   <a:rPr lang="es-ES" sz="1200" dirty="0"/>
-                  <a:t>3. Sensibilidad a la Polarización:</a:t>
+                  <a:t>Sensibilidad a la Polarización:</a:t>
                 </a:r>
               </a:p>
               <a:p>
@@ -4400,98 +4494,16 @@
               <a:p>
                 <a:endParaRPr lang="es-ES" sz="1200" dirty="0"/>
               </a:p>
-              <a:p>
-                <a:r>
-                  <a:rPr lang="es-ES" sz="1200" dirty="0"/>
-                  <a:t>Conclusión:</a:t>
-                </a:r>
-              </a:p>
-              <a:p>
-                <a:endParaRPr lang="es-ES" sz="1200" dirty="0"/>
-              </a:p>
-              <a:p>
-                <a:r>
-                  <a:rPr lang="es-ES" sz="1200" dirty="0"/>
-                  <a:t>SOI es la tecnología de elección para alta densidad de integración y componentes compactos debido a sus radios de curvatura mínimos (&lt; 5-10 </a:t>
-                </a:r>
-                <a14:m>
-                  <m:oMath xmlns:m="http://schemas.openxmlformats.org/officeDocument/2006/math">
-                    <m:r>
-                      <a:rPr lang="es-ES" sz="1200" i="1">
-                        <a:latin typeface="Cambria Math" panose="02040503050406030204" pitchFamily="18" charset="0"/>
-                        <a:ea typeface="Cambria Math" panose="02040503050406030204" pitchFamily="18" charset="0"/>
-                      </a:rPr>
-                      <m:t>𝜇</m:t>
-                    </m:r>
-                    <m:r>
-                      <a:rPr lang="es-ES" sz="1200" i="1">
-                        <a:latin typeface="Cambria Math" panose="02040503050406030204" pitchFamily="18" charset="0"/>
-                        <a:ea typeface="Cambria Math" panose="02040503050406030204" pitchFamily="18" charset="0"/>
-                      </a:rPr>
-                      <m:t>𝑚</m:t>
-                    </m:r>
-                  </m:oMath>
-                </a14:m>
-                <a:r>
-                  <a:rPr lang="es-ES" sz="1200" dirty="0"/>
-                  <a:t>). </a:t>
-                </a:r>
-                <a:r>
-                  <a:rPr lang="es-ES" sz="1200" dirty="0" err="1"/>
-                  <a:t>SiNx</a:t>
-                </a:r>
-                <a:r>
-                  <a:rPr lang="es-ES" sz="1200" dirty="0"/>
-                  <a:t>, aunque requiere mayor espacio (R </a:t>
-                </a:r>
-                <a14:m>
-                  <m:oMath xmlns:m="http://schemas.openxmlformats.org/officeDocument/2006/math">
-                    <m:r>
-                      <a:rPr lang="es-ES" sz="1200" i="1" smtClean="0">
-                        <a:latin typeface="Cambria Math" panose="02040503050406030204" pitchFamily="18" charset="0"/>
-                        <a:ea typeface="Cambria Math" panose="02040503050406030204" pitchFamily="18" charset="0"/>
-                      </a:rPr>
-                      <m:t>~</m:t>
-                    </m:r>
-                  </m:oMath>
-                </a14:m>
-                <a:r>
-                  <a:rPr lang="es-ES" sz="1200" dirty="0"/>
-                  <a:t>50 </a:t>
-                </a:r>
-                <a14:m>
-                  <m:oMath xmlns:m="http://schemas.openxmlformats.org/officeDocument/2006/math">
-                    <m:r>
-                      <a:rPr lang="es-ES" sz="1200" i="1">
-                        <a:latin typeface="Cambria Math" panose="02040503050406030204" pitchFamily="18" charset="0"/>
-                        <a:ea typeface="Cambria Math" panose="02040503050406030204" pitchFamily="18" charset="0"/>
-                      </a:rPr>
-                      <m:t>𝜇</m:t>
-                    </m:r>
-                    <m:r>
-                      <a:rPr lang="es-ES" sz="1200" i="1">
-                        <a:latin typeface="Cambria Math" panose="02040503050406030204" pitchFamily="18" charset="0"/>
-                        <a:ea typeface="Cambria Math" panose="02040503050406030204" pitchFamily="18" charset="0"/>
-                      </a:rPr>
-                      <m:t>𝑚</m:t>
-                    </m:r>
-                  </m:oMath>
-                </a14:m>
-                <a:r>
-                  <a:rPr lang="es-ES" sz="1200" dirty="0"/>
-                  <a:t>), suele ofrecer menores pérdidas por propagación y es menos sensible a la rugosidad de las paredes debido a su menor contraste de índice.</a:t>
-                </a:r>
-              </a:p>
             </p:txBody>
           </p:sp>
         </mc:Choice>
         <mc:Fallback>
           <p:sp>
             <p:nvSpPr>
-              <p:cNvPr id="3" name="Marcador de texto 2">
+              <p:cNvPr id="8" name="Marcador de texto 2">
                 <a:extLst>
                   <a:ext uri="{FF2B5EF4-FFF2-40B4-BE49-F238E27FC236}">
-                    <a16:creationId xmlns:a16="http://schemas.microsoft.com/office/drawing/2014/main" id="{1556D432-6169-4784-905C-38807A0FED9D}"/>
+                    <a16:creationId xmlns:a16="http://schemas.microsoft.com/office/drawing/2014/main" id="{68F66DC8-8B17-9F74-C57A-0EEBDCB9C4C5}"/>
                   </a:ext>
                 </a:extLst>
               </p:cNvPr>
@@ -4504,13 +4516,13 @@
             </p:nvSpPr>
             <p:spPr>
               <a:xfrm>
-                <a:off x="609600" y="762000"/>
-                <a:ext cx="10972800" cy="4476418"/>
+                <a:off x="304800" y="767094"/>
+                <a:ext cx="11582400" cy="5215082"/>
               </a:xfrm>
               <a:blipFill>
                 <a:blip r:embed="rId2"/>
                 <a:stretch>
-                  <a:fillRect l="-889" t="-1090" r="-500" b="-1226"/>
+                  <a:fillRect l="-876" t="-973"/>
                 </a:stretch>
               </a:blipFill>
             </p:spPr>
@@ -4529,69 +4541,6 @@
           </p:sp>
         </mc:Fallback>
       </mc:AlternateContent>
-      <p:sp>
-        <p:nvSpPr>
-          <p:cNvPr id="4" name="Marcador de pie de página 3">
-            <a:extLst>
-              <a:ext uri="{FF2B5EF4-FFF2-40B4-BE49-F238E27FC236}">
-                <a16:creationId xmlns:a16="http://schemas.microsoft.com/office/drawing/2014/main" id="{1E150C57-7620-4272-BF66-3EAB6993AC7B}"/>
-              </a:ext>
-            </a:extLst>
-          </p:cNvPr>
-          <p:cNvSpPr>
-            <a:spLocks noGrp="1"/>
-          </p:cNvSpPr>
-          <p:nvPr>
-            <p:ph type="ftr" sz="quarter" idx="5"/>
-          </p:nvPr>
-        </p:nvSpPr>
-        <p:spPr/>
-        <p:txBody>
-          <a:bodyPr/>
-          <a:lstStyle/>
-          <a:p>
-            <a:pPr marL="12700">
-              <a:spcBef>
-                <a:spcPts val="15"/>
-              </a:spcBef>
-            </a:pPr>
-            <a:r>
-              <a:rPr lang="es-ES" spc="-5"/>
-              <a:t>LAB 1.0. WAVEGUIDES</a:t>
-            </a:r>
-            <a:endParaRPr lang="es-ES" spc="-5" dirty="0"/>
-          </a:p>
-        </p:txBody>
-      </p:sp>
-      <p:sp>
-        <p:nvSpPr>
-          <p:cNvPr id="5" name="Marcador de número de diapositiva 4">
-            <a:extLst>
-              <a:ext uri="{FF2B5EF4-FFF2-40B4-BE49-F238E27FC236}">
-                <a16:creationId xmlns:a16="http://schemas.microsoft.com/office/drawing/2014/main" id="{AF9A3757-B02C-4AD6-BCE3-635DC7345E32}"/>
-              </a:ext>
-            </a:extLst>
-          </p:cNvPr>
-          <p:cNvSpPr>
-            <a:spLocks noGrp="1"/>
-          </p:cNvSpPr>
-          <p:nvPr>
-            <p:ph type="sldNum" sz="quarter" idx="7"/>
-          </p:nvPr>
-        </p:nvSpPr>
-        <p:spPr/>
-        <p:txBody>
-          <a:bodyPr/>
-          <a:lstStyle/>
-          <a:p>
-            <a:fld id="{B6F15528-21DE-4FAA-801E-634DDDAF4B2B}" type="slidenum">
-              <a:rPr lang="es-ES" smtClean="0"/>
-              <a:t>13</a:t>
-            </a:fld>
-            <a:endParaRPr lang="es-ES"/>
-          </a:p>
-        </p:txBody>
-      </p:sp>
     </p:spTree>
     <p:extLst>
       <p:ext uri="{BB962C8B-B14F-4D97-AF65-F5344CB8AC3E}">
